--- a/Cybersecurity_Trends_in_Nigeria.pptx
+++ b/Cybersecurity_Trends_in_Nigeria.pptx
@@ -20,9 +20,10 @@
     <p:sldId id="268" r:id="rId14"/>
     <p:sldId id="269" r:id="rId15"/>
     <p:sldId id="270" r:id="rId16"/>
+    <p:sldId id="271" r:id="rId17"/>
   </p:sldIdLst>
   <p:notesMasterIdLst>
-    <p:notesMasterId r:id="rId17"/>
+    <p:notesMasterId r:id="rId18"/>
   </p:notesMasterIdLst>
   <p:sldSz cx="12192000" cy="6858000"/>
   <p:notesSz cx="6858000" cy="12192000"/>
@@ -1405,7 +1406,7 @@
           <a:p>
             <a:r>
               <a:rPr lang="en-US" dirty="0"/>
-              <a:t>Regulation has caught up fast. The Nigeria Data Protection Act's implementation directive took effect in September 2025, giving the NDPC a clear enforcement framework. In August 2025 the Commission issued compliance notices to 1,368 organizations at once - mostly financial institutions, insurers, gaming companies, and pension firms - with a short window to demonstrate compliance. And the fines are real: Meta was fined $32.8 million in February 2025, and MultiChoice Nigeria was fined ₦766.2 million in July for privacy violations and illegal cross-border data transfers. The message to every organization operating in Nigeria: data protection is no longer a paperwork exercise. (~55 sec)</a:t>
+              <a:t>Four sectors carry most of the exposure. Banking and fintech face ransomware, credential theft, and payment fraud - the money is the target. Government agencies, especially registries and systems tied to elections, are high-value because of the downstream trust they anchor - the CAC breach is the clearest example. Telecom is exposed through subscriber data and SIM-swap-enabled fraud, which feeds directly into banking fraud. Healthcare is earlier in its exposure curve but rising, with patient data theft and disruption risk. The thread tying all four together: these are organized, targeted campaigns now, not smash-and-grab opportunism. (~55 sec)</a:t>
             </a:r>
             <a:endParaRPr lang="en-US" dirty="0"/>
           </a:p>
@@ -1493,7 +1494,7 @@
           <a:p>
             <a:r>
               <a:rPr lang="en-US" dirty="0"/>
-              <a:t>Signed February 2024, this amendment updates Nigeria's original 2015 cybercrime law. Four provisions matter most for organizations: first, a mandatory 72-hour window to report any attack or intrusion to the National CERT. Second, service providers now must retain traffic and subscriber data for two years. Third - and this is the controversial one - security agencies gained expanded power to intercept communications without a court order in urgent situations, which has drawn civil-liberties criticism. Fourth, new offences around cyberstalking and disinformation, plus a cybersecurity levy that adds to the cost of doing business. Net effect: compliance obligations just got a lot more concrete. (~55 sec)</a:t>
+              <a:t>Regulation has caught up fast. The Nigeria Data Protection Act's implementation directive took effect in September 2025, giving the NDPC a clear enforcement framework. In August 2025 the Commission issued compliance notices to 1,368 organizations at once - mostly financial institutions, insurers, gaming companies, and pension firms - with a short window to demonstrate compliance. And the fines are real: Meta was fined $32.8 million in February 2025, and MultiChoice Nigeria was fined ₦766.2 million in July for privacy violations and illegal cross-border data transfers. The message to every organization operating in Nigeria: data protection is no longer a paperwork exercise. (~55 sec)</a:t>
             </a:r>
             <a:endParaRPr lang="en-US" dirty="0"/>
           </a:p>
@@ -1581,7 +1582,7 @@
           <a:p>
             <a:r>
               <a:rPr lang="en-US" dirty="0"/>
-              <a:t>On the strategy side, Nigeria stood up the National Cybersecurity Coordination Centre - the NCCC - unveiled at the 2025 National Cybersecurity Conference themed 'Nigeria's Moment to Lead.' It sits between NITDA and the Office of the National Security Adviser, and it's built around an action plan spanning seven thematic areas from the National Cybersecurity Strategy. The core message coming out of that conference was blunt: no single agency can secure Nigeria's cyberspace alone - this requires genuine multi-agency coordination. There's also a cultural push here, to end the historical pattern of organizations staying quiet about breaches instead of disclosing and responding. (~55 sec)</a:t>
+              <a:t>Signed February 2024, this amendment updates Nigeria's original 2015 cybercrime law. Four provisions matter most for organizations: first, a mandatory 72-hour window to report any attack or intrusion to the National CERT. Second, service providers now must retain traffic and subscriber data for two years. Third - and this is the controversial one - security agencies gained expanded power to intercept communications without a court order in urgent situations, which has drawn civil-liberties criticism. Fourth, new offences around cyberstalking and disinformation, plus a cybersecurity levy that adds to the cost of doing business. Net effect: compliance obligations just got a lot more concrete. (~55 sec)</a:t>
             </a:r>
             <a:endParaRPr lang="en-US" dirty="0"/>
           </a:p>
@@ -1669,7 +1670,7 @@
           <a:p>
             <a:r>
               <a:rPr lang="en-US" dirty="0"/>
-              <a:t>This is the constraint that limits everything else we've discussed. Nigeria has about 25,760 active cybersecurity professionals for a population of over 220 million - one expert for every 8,000 citizens, against a global benchmark of one per 800. NITDA estimates the country needs over 275,000 professionals to close that gap, a 90.6% shortfall. The government's response is the 3 Million Technical Talent programme, aiming to train three million digital professionals by 2027. There's also a market opportunity here - Nigeria's cybersecurity market is projected to grow from about $254 million in 2026 to $415 million by 2031. The takeaway: no amount of new law or tooling outruns a shortage of people who can actually operate it. (~65 sec)</a:t>
+              <a:t>On the strategy side, Nigeria stood up the National Cybersecurity Coordination Centre - the NCCC - unveiled at the 2025 National Cybersecurity Conference themed 'Nigeria's Moment to Lead.' It sits between NITDA and the Office of the National Security Adviser, and it's built around an action plan spanning seven thematic areas from the National Cybersecurity Strategy. The core message coming out of that conference was blunt: no single agency can secure Nigeria's cyberspace alone - this requires genuine multi-agency coordination. There's also a cultural push here, to end the historical pattern of organizations staying quiet about breaches instead of disclosing and responding. (~55 sec)</a:t>
             </a:r>
             <a:endParaRPr lang="en-US" dirty="0"/>
           </a:p>
@@ -1757,7 +1758,7 @@
           <a:p>
             <a:r>
               <a:rPr lang="en-US" dirty="0"/>
-              <a:t>Five takeaways to carry out of this room. One: attacks are more frequent, more automated with AI, and increasingly about stealing identity rather than just disrupting systems. Two: regulation has real teeth now - NDPC fines and the 72-hour reporting rule mean compliance is a genuine operational requirement, not paperwork. Three: critical infrastructure is the top target, and the CAC breach shows how one vulnerability can cascade across an entire economy. Four: the talent shortage is the binding constraint underneath all of this - you can't buy your way out of a people problem. Five: the direction of travel for defense is zero-trust, identity-first security, and real information sharing across sectors. That's the briefing - happy to open it up. (~60 sec)</a:t>
+              <a:t>This is the constraint that limits everything else we've discussed. Nigeria has about 25,760 active cybersecurity professionals for a population of over 220 million - one expert for every 8,000 citizens, against a global benchmark of one per 800. NITDA estimates the country needs over 275,000 professionals to close that gap, a 90.6% shortfall. The government's response is the 3 Million Technical Talent programme, aiming to train three million digital professionals by 2027. There's also a market opportunity here - Nigeria's cybersecurity market is projected to grow from about $254 million in 2026 to $415 million by 2031. The takeaway: no amount of new law or tooling outruns a shortage of people who can actually operate it. (~65 sec)</a:t>
             </a:r>
             <a:endParaRPr lang="en-US" dirty="0"/>
           </a:p>
@@ -1845,6 +1846,94 @@
           <a:p>
             <a:r>
               <a:rPr lang="en-US" dirty="0"/>
+              <a:t>Five takeaways to carry out of this room. One: attacks are more frequent, more automated with AI, and increasingly about stealing identity rather than just disrupting systems. Two: regulation has real teeth now - NDPC fines and the 72-hour reporting rule mean compliance is a genuine operational requirement, not paperwork. Three: critical infrastructure is the top target, and the CAC breach shows how one vulnerability can cascade across an entire economy. Four: the talent shortage is the binding constraint underneath all of this - you can't buy your way out of a people problem. Five: the direction of travel for defense is zero-trust, identity-first security, and real information sharing across sectors. That's the briefing - happy to open it up. (~60 sec)</a:t>
+            </a:r>
+            <a:endParaRPr lang="en-US" dirty="0"/>
+          </a:p>
+        </p:txBody>
+      </p:sp>
+      <p:sp>
+        <p:nvSpPr>
+          <p:cNvPr id="4" name="Slide Number Placeholder 3"/>
+          <p:cNvSpPr>
+            <a:spLocks noGrp="1"/>
+          </p:cNvSpPr>
+          <p:nvPr>
+            <p:ph type="sldNum" sz="quarter" idx="10"/>
+          </p:nvPr>
+        </p:nvSpPr>
+        <p:spPr/>
+        <p:txBody>
+          <a:bodyPr/>
+          <a:lstStyle/>
+          <a:p>
+            <a:fld id="{F7021451-1387-4CA6-816F-3879F97B5CBC}" type="slidenum">
+              <a:rPr lang="en-US"/>
+              <a:t>15</a:t>
+            </a:fld>
+            <a:endParaRPr lang="en-US"/>
+          </a:p>
+        </p:txBody>
+      </p:sp>
+    </p:spTree>
+    <p:extLst>
+      <p:ext uri="{BB962C8B-B14F-4D97-AF65-F5344CB8AC3E}">
+        <p14:creationId xmlns:p14="http://schemas.microsoft.com/office/powerpoint/2010/main" val="1024086991"/>
+      </p:ext>
+    </p:extLst>
+  </p:cSld>
+  <p:clrMapOvr>
+    <a:masterClrMapping/>
+  </p:clrMapOvr>
+</p:notes>
+</file>
+
+<file path=ppt/notesSlides/notesSlide16.xml><?xml version="1.0" encoding="utf-8"?>
+<p:notes xmlns:a="http://schemas.openxmlformats.org/drawingml/2006/main" xmlns:r="http://schemas.openxmlformats.org/officeDocument/2006/relationships" xmlns:p="http://schemas.openxmlformats.org/presentationml/2006/main">
+  <p:cSld>
+    <p:spTree>
+      <p:nvGrpSpPr>
+        <p:cNvPr id="1" name=""/>
+        <p:cNvGrpSpPr/>
+        <p:nvPr/>
+      </p:nvGrpSpPr>
+      <p:grpSpPr>
+        <a:xfrm>
+          <a:off x="0" y="0"/>
+          <a:ext cx="0" cy="0"/>
+          <a:chOff x="0" y="0"/>
+          <a:chExt cx="0" cy="0"/>
+        </a:xfrm>
+      </p:grpSpPr>
+      <p:sp>
+        <p:nvSpPr>
+          <p:cNvPr id="2" name="Slide Image Placeholder 1"/>
+          <p:cNvSpPr>
+            <a:spLocks noGrp="1" noRot="1" noChangeAspect="1"/>
+          </p:cNvSpPr>
+          <p:nvPr>
+            <p:ph type="sldImg"/>
+          </p:nvPr>
+        </p:nvSpPr>
+        <p:spPr/>
+      </p:sp>
+      <p:sp>
+        <p:nvSpPr>
+          <p:cNvPr id="3" name="Notes Placeholder 2"/>
+          <p:cNvSpPr>
+            <a:spLocks noGrp="1"/>
+          </p:cNvSpPr>
+          <p:nvPr>
+            <p:ph type="body" idx="1"/>
+          </p:nvPr>
+        </p:nvSpPr>
+        <p:spPr/>
+        <p:txBody>
+          <a:bodyPr/>
+          <a:lstStyle/>
+          <a:p>
+            <a:r>
+              <a:rPr lang="en-US" dirty="0"/>
               <a:t>OPEN FLOOR - 15 minutes. Use the three seeded prompts if the room is slow to start.
 Q: Is Nigeria's cybercrime actually increasing, or is reporting just improving?
 A: Both are real. Detection and disclosure have genuinely improved (BVN-NIN integration, NDPC enforcement, the 72-hour reporting rule), which surfaces more incidents than before. But independently, attack volume metrics (1.6M attempts in H1 2026, 4,700+/week) come from network-level blocking data, not self-reporting - so the underlying volume is genuinely rising, not just better counted.
@@ -1878,7 +1967,7 @@
           <a:p>
             <a:fld id="{F7021451-1387-4CA6-816F-3879F97B5CBC}" type="slidenum">
               <a:rPr lang="en-US"/>
-              <a:t>15</a:t>
+              <a:t>16</a:t>
             </a:fld>
             <a:endParaRPr lang="en-US"/>
           </a:p>
@@ -2471,7 +2560,9 @@
           <a:p>
             <a:r>
               <a:rPr lang="en-US" dirty="0"/>
-              <a:t>This is the incident that defined 2025-2026 for Nigerian cybersecurity. A threat actor calling itself ByteToBreach breached the Corporate Affairs Commission - the registry that records legal ownership of every company in Nigeria - and exfiltrated roughly 25 million files, about 750 gigabytes, leaking 15 million-plus documents. Why it matters beyond the number: banks, courts, and the EFCC all lean on CAC records for due diligence and fraud investigations, so this single breach undermines the country's broader anti-money-laundering push. CAC had to shut its registration portal, and the NDPC opened a formal investigation. The same group also demanded a 250,000-euro ransom from Sterling Bank. The bigger pattern: ByteToBreach isn't encrypting systems for ransom the old way - it's stealing and monetizing data directly, which is becoming the dominant ransomware model. (~70 sec)</a:t>
+              <a:t>AI is the fastest-moving trend in this whole briefing, and it's cutting both ways. On the attack side: fraudsters use deepfake video to beat KYC liveness checks during remote onboarding, and AI-cloned voices - just three seconds of audio is enough for an 85%-accurate clone - to impersonate bank staff and trick people into authorizing transfers. Combined with stolen personal data, generative AI now builds synthetic identities that pass verification. Deepfake incidents in Africa surged sevenfold in the second half of 2024 alone.
+On the defense side, Nigerian fintechs have moved fast: about 87.5% now run AI for fraud detection, and the CBN is mandating it - AI-powered transaction monitoring within two years, AI-based compliance and reporting within three, with a target of cutting fraud losses 70% by 2028. But there's a real gap: reported false-negative rates on some fraud-detection models run as high as 90%, meaning most attempts still slip through - and that's compounded by the talent shortage covered later in this briefing.
+On governance, Nigeria published its National AI Strategy in September 2025 - a five-year plan with a new National AI Trust for oversight, plus NCAIR and research grants to build homegrown capability. Bottom line: attacker and defender are using the same generative AI tools, and AI-driven phishing and impersonation are projected to intensify roughly 70% in 2026. This is the trend to watch most closely. (~70 sec)</a:t>
             </a:r>
             <a:endParaRPr lang="en-US" dirty="0"/>
           </a:p>
@@ -2559,7 +2650,7 @@
           <a:p>
             <a:r>
               <a:rPr lang="en-US" dirty="0"/>
-              <a:t>Four sectors carry most of the exposure. Banking and fintech face ransomware, credential theft, and payment fraud - the money is the target. Government agencies, especially registries and systems tied to elections, are high-value because of the downstream trust they anchor - the CAC breach is the clearest example. Telecom is exposed through subscriber data and SIM-swap-enabled fraud, which feeds directly into banking fraud. Healthcare is earlier in its exposure curve but rising, with patient data theft and disruption risk. The thread tying all four together: these are organized, targeted campaigns now, not smash-and-grab opportunism. (~55 sec)</a:t>
+              <a:t>This is the incident that defined 2025-2026 for Nigerian cybersecurity. A threat actor calling itself ByteToBreach breached the Corporate Affairs Commission - the registry that records legal ownership of every company in Nigeria - and exfiltrated roughly 25 million files, about 750 gigabytes, leaking 15 million-plus documents. Why it matters beyond the number: banks, courts, and the EFCC all lean on CAC records for due diligence and fraud investigations, so this single breach undermines the country's broader anti-money-laundering push. CAC had to shut its registration portal, and the NDPC opened a formal investigation. The same group also demanded a 250,000-euro ransom from Sterling Bank. The bigger pattern: ByteToBreach isn't encrypting systems for ransom the old way - it's stealing and monetizing data directly, which is becoming the dominant ransomware model. (~70 sec)</a:t>
             </a:r>
             <a:endParaRPr lang="en-US" dirty="0"/>
           </a:p>
@@ -3341,7 +3432,7 @@
                 <a:ea typeface="Calibri" pitchFamily="34" charset="-122"/>
                 <a:cs typeface="Calibri" pitchFamily="34" charset="-120"/>
               </a:rPr>
-              <a:t>REGULATORY RESPONSE</a:t>
+              <a:t>ATTACK SURFACE</a:t>
             </a:r>
             <a:endParaRPr lang="en-US" sz="1250" dirty="0"/>
           </a:p>
@@ -3380,7 +3471,7 @@
                 <a:ea typeface="Cambria" pitchFamily="34" charset="-122"/>
                 <a:cs typeface="Cambria" pitchFamily="34" charset="-120"/>
               </a:rPr>
-              <a:t>Data protection gets real teeth</a:t>
+              <a:t>Who’s in the crosshairs</a:t>
             </a:r>
             <a:endParaRPr lang="en-US" sz="3000" dirty="0"/>
           </a:p>
@@ -3394,12 +3485,12 @@
         </p:nvSpPr>
         <p:spPr>
           <a:xfrm>
-            <a:off x="502920" y="1691640"/>
-            <a:ext cx="5349240" cy="1965960"/>
+            <a:off x="502920" y="1645920"/>
+            <a:ext cx="5349240" cy="1691640"/>
           </a:xfrm>
           <a:prstGeom prst="roundRect">
             <a:avLst>
-              <a:gd name="adj" fmla="val 4186"/>
+              <a:gd name="adj" fmla="val 5405"/>
             </a:avLst>
           </a:prstGeom>
           <a:solidFill>
@@ -3409,7 +3500,7 @@
           <a:effectLst>
             <a:outerShdw sx="100000" sy="100000" kx="0" ky="0" algn="bl" rotWithShape="0" blurRad="76200" dist="25400" dir="5400000">
               <a:srgbClr val="1B2B22">
-                <a:alpha val="16000"/>
+                <a:alpha val="14000"/>
               </a:srgbClr>
             </a:outerShdw>
           </a:effectLst>
@@ -3417,53 +3508,97 @@
       </p:sp>
       <p:sp>
         <p:nvSpPr>
-          <p:cNvPr id="5" name="Text 3"/>
-          <p:cNvSpPr/>
-          <p:nvPr/>
-        </p:nvSpPr>
-        <p:spPr>
-          <a:xfrm>
-            <a:off x="704088" y="1819656"/>
-            <a:ext cx="4946904" cy="1022299"/>
-          </a:xfrm>
-          <a:prstGeom prst="rect">
-            <a:avLst/>
-          </a:prstGeom>
-          <a:noFill/>
-          <a:ln/>
-        </p:spPr>
-        <p:txBody>
-          <a:bodyPr wrap="square" lIns="0" tIns="0" rIns="0" bIns="0" rtlCol="0" anchor="b"/>
-          <a:lstStyle/>
-          <a:p>
-            <a:pPr algn="l" indent="0" marL="0">
-              <a:buNone/>
-            </a:pPr>
-            <a:r>
-              <a:rPr lang="en-US" sz="2600" b="1" dirty="0">
-                <a:solidFill>
-                  <a:srgbClr val="0B5E34"/>
+          <p:cNvPr id="5" name="Shape 3"/>
+          <p:cNvSpPr/>
+          <p:nvPr/>
+        </p:nvSpPr>
+        <p:spPr>
+          <a:xfrm>
+            <a:off x="758952" y="1901952"/>
+            <a:ext cx="621792" cy="621792"/>
+          </a:xfrm>
+          <a:prstGeom prst="ellipse">
+            <a:avLst/>
+          </a:prstGeom>
+          <a:solidFill>
+            <a:srgbClr val="0B5E34"/>
+          </a:solidFill>
+          <a:ln/>
+        </p:spPr>
+      </p:sp>
+      <p:pic>
+        <p:nvPicPr>
+          <p:cNvPr id="6" name="Image 0" descr="preencoded.png">    </p:cNvPr>
+          <p:cNvPicPr>
+            <a:picLocks noChangeAspect="1"/>
+          </p:cNvPicPr>
+          <p:nvPr/>
+        </p:nvPicPr>
+        <p:blipFill>
+          <a:blip r:embed="rId1"/>
+          <a:stretch>
+            <a:fillRect/>
+          </a:stretch>
+        </p:blipFill>
+        <p:spPr>
+          <a:xfrm>
+            <a:off x="908182" y="2051182"/>
+            <a:ext cx="323332" cy="323332"/>
+          </a:xfrm>
+          <a:prstGeom prst="rect">
+            <a:avLst/>
+          </a:prstGeom>
+        </p:spPr>
+      </p:pic>
+      <p:sp>
+        <p:nvSpPr>
+          <p:cNvPr id="7" name="Text 4"/>
+          <p:cNvSpPr/>
+          <p:nvPr/>
+        </p:nvSpPr>
+        <p:spPr>
+          <a:xfrm>
+            <a:off x="1554480" y="1901952"/>
+            <a:ext cx="4069080" cy="457200"/>
+          </a:xfrm>
+          <a:prstGeom prst="rect">
+            <a:avLst/>
+          </a:prstGeom>
+          <a:noFill/>
+          <a:ln/>
+        </p:spPr>
+        <p:txBody>
+          <a:bodyPr wrap="square" lIns="0" tIns="0" rIns="0" bIns="0" rtlCol="0" anchor="ctr"/>
+          <a:lstStyle/>
+          <a:p>
+            <a:pPr indent="0" marL="0">
+              <a:buNone/>
+            </a:pPr>
+            <a:r>
+              <a:rPr lang="en-US" sz="1650" b="1" dirty="0">
+                <a:solidFill>
+                  <a:srgbClr val="17231C"/>
                 </a:solidFill>
                 <a:latin typeface="Cambria" pitchFamily="34" charset="0"/>
                 <a:ea typeface="Cambria" pitchFamily="34" charset="-122"/>
                 <a:cs typeface="Cambria" pitchFamily="34" charset="-120"/>
               </a:rPr>
-              <a:t>Sep 19, 2025</a:t>
-            </a:r>
-            <a:endParaRPr lang="en-US" sz="2600" dirty="0"/>
-          </a:p>
-        </p:txBody>
-      </p:sp>
-      <p:sp>
-        <p:nvSpPr>
-          <p:cNvPr id="6" name="Text 4"/>
-          <p:cNvSpPr/>
-          <p:nvPr/>
-        </p:nvSpPr>
-        <p:spPr>
-          <a:xfrm>
-            <a:off x="704088" y="2871216"/>
-            <a:ext cx="4946904" cy="707746"/>
+              <a:t>Banking &amp; Fintech</a:t>
+            </a:r>
+            <a:endParaRPr lang="en-US" sz="1650" dirty="0"/>
+          </a:p>
+        </p:txBody>
+      </p:sp>
+      <p:sp>
+        <p:nvSpPr>
+          <p:cNvPr id="8" name="Text 5"/>
+          <p:cNvSpPr/>
+          <p:nvPr/>
+        </p:nvSpPr>
+        <p:spPr>
+          <a:xfrm>
+            <a:off x="1554480" y="2377440"/>
+            <a:ext cx="4069080" cy="777240"/>
           </a:xfrm>
           <a:prstGeom prst="rect">
             <a:avLst/>
@@ -3475,11 +3610,11 @@
           <a:bodyPr wrap="square" lIns="0" tIns="0" rIns="0" bIns="0" rtlCol="0" anchor="t"/>
           <a:lstStyle/>
           <a:p>
-            <a:pPr algn="l" indent="0" marL="0">
-              <a:buNone/>
-            </a:pPr>
-            <a:r>
-              <a:rPr lang="en-US" sz="1150" dirty="0">
+            <a:pPr indent="0" marL="0">
+              <a:buNone/>
+            </a:pPr>
+            <a:r>
+              <a:rPr lang="en-US" sz="1250" dirty="0">
                 <a:solidFill>
                   <a:srgbClr val="5E6E66"/>
                 </a:solidFill>
@@ -3487,26 +3622,26 @@
                 <a:ea typeface="Calibri" pitchFamily="34" charset="-122"/>
                 <a:cs typeface="Calibri" pitchFamily="34" charset="-120"/>
               </a:rPr>
-              <a:t>NDPA General Application &amp; Implementation Directive (GAID) takes effect</a:t>
-            </a:r>
-            <a:endParaRPr lang="en-US" sz="1150" dirty="0"/>
-          </a:p>
-        </p:txBody>
-      </p:sp>
-      <p:sp>
-        <p:nvSpPr>
-          <p:cNvPr id="7" name="Shape 5"/>
-          <p:cNvSpPr/>
-          <p:nvPr/>
-        </p:nvSpPr>
-        <p:spPr>
-          <a:xfrm>
-            <a:off x="6309360" y="1691640"/>
-            <a:ext cx="5349240" cy="1965960"/>
+              <a:t>Ransomware, credential theft, payment fraud</a:t>
+            </a:r>
+            <a:endParaRPr lang="en-US" sz="1250" dirty="0"/>
+          </a:p>
+        </p:txBody>
+      </p:sp>
+      <p:sp>
+        <p:nvSpPr>
+          <p:cNvPr id="9" name="Shape 6"/>
+          <p:cNvSpPr/>
+          <p:nvPr/>
+        </p:nvSpPr>
+        <p:spPr>
+          <a:xfrm>
+            <a:off x="6309360" y="1645920"/>
+            <a:ext cx="5349240" cy="1691640"/>
           </a:xfrm>
           <a:prstGeom prst="roundRect">
             <a:avLst>
-              <a:gd name="adj" fmla="val 4186"/>
+              <a:gd name="adj" fmla="val 5405"/>
             </a:avLst>
           </a:prstGeom>
           <a:solidFill>
@@ -3516,7 +3651,7 @@
           <a:effectLst>
             <a:outerShdw sx="100000" sy="100000" kx="0" ky="0" algn="bl" rotWithShape="0" blurRad="76200" dist="25400" dir="5400000">
               <a:srgbClr val="1B2B22">
-                <a:alpha val="16000"/>
+                <a:alpha val="14000"/>
               </a:srgbClr>
             </a:outerShdw>
           </a:effectLst>
@@ -3524,53 +3659,97 @@
       </p:sp>
       <p:sp>
         <p:nvSpPr>
-          <p:cNvPr id="8" name="Text 6"/>
-          <p:cNvSpPr/>
-          <p:nvPr/>
-        </p:nvSpPr>
-        <p:spPr>
-          <a:xfrm>
-            <a:off x="6510528" y="1819656"/>
-            <a:ext cx="4946904" cy="1022299"/>
-          </a:xfrm>
-          <a:prstGeom prst="rect">
-            <a:avLst/>
-          </a:prstGeom>
-          <a:noFill/>
-          <a:ln/>
-        </p:spPr>
-        <p:txBody>
-          <a:bodyPr wrap="square" lIns="0" tIns="0" rIns="0" bIns="0" rtlCol="0" anchor="b"/>
-          <a:lstStyle/>
-          <a:p>
-            <a:pPr algn="l" indent="0" marL="0">
-              <a:buNone/>
-            </a:pPr>
-            <a:r>
-              <a:rPr lang="en-US" sz="2600" b="1" dirty="0">
-                <a:solidFill>
-                  <a:srgbClr val="0B5E34"/>
+          <p:cNvPr id="10" name="Shape 7"/>
+          <p:cNvSpPr/>
+          <p:nvPr/>
+        </p:nvSpPr>
+        <p:spPr>
+          <a:xfrm>
+            <a:off x="6565392" y="1901952"/>
+            <a:ext cx="621792" cy="621792"/>
+          </a:xfrm>
+          <a:prstGeom prst="ellipse">
+            <a:avLst/>
+          </a:prstGeom>
+          <a:solidFill>
+            <a:srgbClr val="146B47"/>
+          </a:solidFill>
+          <a:ln/>
+        </p:spPr>
+      </p:sp>
+      <p:pic>
+        <p:nvPicPr>
+          <p:cNvPr id="11" name="Image 1" descr="preencoded.png">    </p:cNvPr>
+          <p:cNvPicPr>
+            <a:picLocks noChangeAspect="1"/>
+          </p:cNvPicPr>
+          <p:nvPr/>
+        </p:nvPicPr>
+        <p:blipFill>
+          <a:blip r:embed="rId2"/>
+          <a:stretch>
+            <a:fillRect/>
+          </a:stretch>
+        </p:blipFill>
+        <p:spPr>
+          <a:xfrm>
+            <a:off x="6714622" y="2051182"/>
+            <a:ext cx="323332" cy="323332"/>
+          </a:xfrm>
+          <a:prstGeom prst="rect">
+            <a:avLst/>
+          </a:prstGeom>
+        </p:spPr>
+      </p:pic>
+      <p:sp>
+        <p:nvSpPr>
+          <p:cNvPr id="12" name="Text 8"/>
+          <p:cNvSpPr/>
+          <p:nvPr/>
+        </p:nvSpPr>
+        <p:spPr>
+          <a:xfrm>
+            <a:off x="7360920" y="1901952"/>
+            <a:ext cx="4069080" cy="457200"/>
+          </a:xfrm>
+          <a:prstGeom prst="rect">
+            <a:avLst/>
+          </a:prstGeom>
+          <a:noFill/>
+          <a:ln/>
+        </p:spPr>
+        <p:txBody>
+          <a:bodyPr wrap="square" lIns="0" tIns="0" rIns="0" bIns="0" rtlCol="0" anchor="ctr"/>
+          <a:lstStyle/>
+          <a:p>
+            <a:pPr indent="0" marL="0">
+              <a:buNone/>
+            </a:pPr>
+            <a:r>
+              <a:rPr lang="en-US" sz="1650" b="1" dirty="0">
+                <a:solidFill>
+                  <a:srgbClr val="17231C"/>
                 </a:solidFill>
                 <a:latin typeface="Cambria" pitchFamily="34" charset="0"/>
                 <a:ea typeface="Cambria" pitchFamily="34" charset="-122"/>
                 <a:cs typeface="Cambria" pitchFamily="34" charset="-120"/>
               </a:rPr>
-              <a:t>1,368</a:t>
-            </a:r>
-            <a:endParaRPr lang="en-US" sz="2600" dirty="0"/>
-          </a:p>
-        </p:txBody>
-      </p:sp>
-      <p:sp>
-        <p:nvSpPr>
-          <p:cNvPr id="9" name="Text 7"/>
-          <p:cNvSpPr/>
-          <p:nvPr/>
-        </p:nvSpPr>
-        <p:spPr>
-          <a:xfrm>
-            <a:off x="6510528" y="2871216"/>
-            <a:ext cx="4946904" cy="707746"/>
+              <a:t>Government</a:t>
+            </a:r>
+            <a:endParaRPr lang="en-US" sz="1650" dirty="0"/>
+          </a:p>
+        </p:txBody>
+      </p:sp>
+      <p:sp>
+        <p:nvSpPr>
+          <p:cNvPr id="13" name="Text 9"/>
+          <p:cNvSpPr/>
+          <p:nvPr/>
+        </p:nvSpPr>
+        <p:spPr>
+          <a:xfrm>
+            <a:off x="7360920" y="2377440"/>
+            <a:ext cx="4069080" cy="777240"/>
           </a:xfrm>
           <a:prstGeom prst="rect">
             <a:avLst/>
@@ -3582,11 +3761,11 @@
           <a:bodyPr wrap="square" lIns="0" tIns="0" rIns="0" bIns="0" rtlCol="0" anchor="t"/>
           <a:lstStyle/>
           <a:p>
-            <a:pPr algn="l" indent="0" marL="0">
-              <a:buNone/>
-            </a:pPr>
-            <a:r>
-              <a:rPr lang="en-US" sz="1150" dirty="0">
+            <a:pPr indent="0" marL="0">
+              <a:buNone/>
+            </a:pPr>
+            <a:r>
+              <a:rPr lang="en-US" sz="1250" dirty="0">
                 <a:solidFill>
                   <a:srgbClr val="5E6E66"/>
                 </a:solidFill>
@@ -3594,26 +3773,26 @@
                 <a:ea typeface="Calibri" pitchFamily="34" charset="-122"/>
                 <a:cs typeface="Calibri" pitchFamily="34" charset="-120"/>
               </a:rPr>
-              <a:t>organizations issued compliance notices in Aug 2025 (banks, insurers, gaming, pension firms)</a:t>
-            </a:r>
-            <a:endParaRPr lang="en-US" sz="1150" dirty="0"/>
-          </a:p>
-        </p:txBody>
-      </p:sp>
-      <p:sp>
-        <p:nvSpPr>
-          <p:cNvPr id="10" name="Shape 8"/>
-          <p:cNvSpPr/>
-          <p:nvPr/>
-        </p:nvSpPr>
-        <p:spPr>
-          <a:xfrm>
-            <a:off x="502920" y="4023360"/>
-            <a:ext cx="5349240" cy="1965960"/>
+              <a:t>Registries, election-related systems (e.g. CAC)</a:t>
+            </a:r>
+            <a:endParaRPr lang="en-US" sz="1250" dirty="0"/>
+          </a:p>
+        </p:txBody>
+      </p:sp>
+      <p:sp>
+        <p:nvSpPr>
+          <p:cNvPr id="14" name="Shape 10"/>
+          <p:cNvSpPr/>
+          <p:nvPr/>
+        </p:nvSpPr>
+        <p:spPr>
+          <a:xfrm>
+            <a:off x="502920" y="3657600"/>
+            <a:ext cx="5349240" cy="1691640"/>
           </a:xfrm>
           <a:prstGeom prst="roundRect">
             <a:avLst>
-              <a:gd name="adj" fmla="val 4186"/>
+              <a:gd name="adj" fmla="val 5405"/>
             </a:avLst>
           </a:prstGeom>
           <a:solidFill>
@@ -3623,7 +3802,7 @@
           <a:effectLst>
             <a:outerShdw sx="100000" sy="100000" kx="0" ky="0" algn="bl" rotWithShape="0" blurRad="76200" dist="25400" dir="5400000">
               <a:srgbClr val="1B2B22">
-                <a:alpha val="16000"/>
+                <a:alpha val="14000"/>
               </a:srgbClr>
             </a:outerShdw>
           </a:effectLst>
@@ -3631,53 +3810,97 @@
       </p:sp>
       <p:sp>
         <p:nvSpPr>
-          <p:cNvPr id="11" name="Text 9"/>
-          <p:cNvSpPr/>
-          <p:nvPr/>
-        </p:nvSpPr>
-        <p:spPr>
-          <a:xfrm>
-            <a:off x="704088" y="4151376"/>
-            <a:ext cx="4946904" cy="1022299"/>
-          </a:xfrm>
-          <a:prstGeom prst="rect">
-            <a:avLst/>
-          </a:prstGeom>
-          <a:noFill/>
-          <a:ln/>
-        </p:spPr>
-        <p:txBody>
-          <a:bodyPr wrap="square" lIns="0" tIns="0" rIns="0" bIns="0" rtlCol="0" anchor="b"/>
-          <a:lstStyle/>
-          <a:p>
-            <a:pPr algn="l" indent="0" marL="0">
-              <a:buNone/>
-            </a:pPr>
-            <a:r>
-              <a:rPr lang="en-US" sz="2600" b="1" dirty="0">
-                <a:solidFill>
-                  <a:srgbClr val="0B5E34"/>
+          <p:cNvPr id="15" name="Shape 11"/>
+          <p:cNvSpPr/>
+          <p:nvPr/>
+        </p:nvSpPr>
+        <p:spPr>
+          <a:xfrm>
+            <a:off x="758952" y="3913632"/>
+            <a:ext cx="621792" cy="621792"/>
+          </a:xfrm>
+          <a:prstGeom prst="ellipse">
+            <a:avLst/>
+          </a:prstGeom>
+          <a:solidFill>
+            <a:srgbClr val="0B5E34"/>
+          </a:solidFill>
+          <a:ln/>
+        </p:spPr>
+      </p:sp>
+      <p:pic>
+        <p:nvPicPr>
+          <p:cNvPr id="16" name="Image 2" descr="preencoded.png">    </p:cNvPr>
+          <p:cNvPicPr>
+            <a:picLocks noChangeAspect="1"/>
+          </p:cNvPicPr>
+          <p:nvPr/>
+        </p:nvPicPr>
+        <p:blipFill>
+          <a:blip r:embed="rId3"/>
+          <a:stretch>
+            <a:fillRect/>
+          </a:stretch>
+        </p:blipFill>
+        <p:spPr>
+          <a:xfrm>
+            <a:off x="908182" y="4062862"/>
+            <a:ext cx="323332" cy="323332"/>
+          </a:xfrm>
+          <a:prstGeom prst="rect">
+            <a:avLst/>
+          </a:prstGeom>
+        </p:spPr>
+      </p:pic>
+      <p:sp>
+        <p:nvSpPr>
+          <p:cNvPr id="17" name="Text 12"/>
+          <p:cNvSpPr/>
+          <p:nvPr/>
+        </p:nvSpPr>
+        <p:spPr>
+          <a:xfrm>
+            <a:off x="1554480" y="3913632"/>
+            <a:ext cx="4069080" cy="457200"/>
+          </a:xfrm>
+          <a:prstGeom prst="rect">
+            <a:avLst/>
+          </a:prstGeom>
+          <a:noFill/>
+          <a:ln/>
+        </p:spPr>
+        <p:txBody>
+          <a:bodyPr wrap="square" lIns="0" tIns="0" rIns="0" bIns="0" rtlCol="0" anchor="ctr"/>
+          <a:lstStyle/>
+          <a:p>
+            <a:pPr indent="0" marL="0">
+              <a:buNone/>
+            </a:pPr>
+            <a:r>
+              <a:rPr lang="en-US" sz="1650" b="1" dirty="0">
+                <a:solidFill>
+                  <a:srgbClr val="17231C"/>
                 </a:solidFill>
                 <a:latin typeface="Cambria" pitchFamily="34" charset="0"/>
                 <a:ea typeface="Cambria" pitchFamily="34" charset="-122"/>
                 <a:cs typeface="Cambria" pitchFamily="34" charset="-120"/>
               </a:rPr>
-              <a:t>$32.8M</a:t>
-            </a:r>
-            <a:endParaRPr lang="en-US" sz="2600" dirty="0"/>
-          </a:p>
-        </p:txBody>
-      </p:sp>
-      <p:sp>
-        <p:nvSpPr>
-          <p:cNvPr id="12" name="Text 10"/>
-          <p:cNvSpPr/>
-          <p:nvPr/>
-        </p:nvSpPr>
-        <p:spPr>
-          <a:xfrm>
-            <a:off x="704088" y="5202936"/>
-            <a:ext cx="4946904" cy="707746"/>
+              <a:t>Telecom</a:t>
+            </a:r>
+            <a:endParaRPr lang="en-US" sz="1650" dirty="0"/>
+          </a:p>
+        </p:txBody>
+      </p:sp>
+      <p:sp>
+        <p:nvSpPr>
+          <p:cNvPr id="18" name="Text 13"/>
+          <p:cNvSpPr/>
+          <p:nvPr/>
+        </p:nvSpPr>
+        <p:spPr>
+          <a:xfrm>
+            <a:off x="1554480" y="4389120"/>
+            <a:ext cx="4069080" cy="777240"/>
           </a:xfrm>
           <a:prstGeom prst="rect">
             <a:avLst/>
@@ -3689,11 +3912,11 @@
           <a:bodyPr wrap="square" lIns="0" tIns="0" rIns="0" bIns="0" rtlCol="0" anchor="t"/>
           <a:lstStyle/>
           <a:p>
-            <a:pPr algn="l" indent="0" marL="0">
-              <a:buNone/>
-            </a:pPr>
-            <a:r>
-              <a:rPr lang="en-US" sz="1150" dirty="0">
+            <a:pPr indent="0" marL="0">
+              <a:buNone/>
+            </a:pPr>
+            <a:r>
+              <a:rPr lang="en-US" sz="1250" dirty="0">
                 <a:solidFill>
                   <a:srgbClr val="5E6E66"/>
                 </a:solidFill>
@@ -3701,26 +3924,26 @@
                 <a:ea typeface="Calibri" pitchFamily="34" charset="-122"/>
                 <a:cs typeface="Calibri" pitchFamily="34" charset="-120"/>
               </a:rPr>
-              <a:t>fine against Meta (Feb 2025) for NDPA breaches, incl. cross-border transfer violations</a:t>
-            </a:r>
-            <a:endParaRPr lang="en-US" sz="1150" dirty="0"/>
-          </a:p>
-        </p:txBody>
-      </p:sp>
-      <p:sp>
-        <p:nvSpPr>
-          <p:cNvPr id="13" name="Shape 11"/>
-          <p:cNvSpPr/>
-          <p:nvPr/>
-        </p:nvSpPr>
-        <p:spPr>
-          <a:xfrm>
-            <a:off x="6309360" y="4023360"/>
-            <a:ext cx="5349240" cy="1965960"/>
+              <a:t>Subscriber data, SIM-swap-enabled fraud</a:t>
+            </a:r>
+            <a:endParaRPr lang="en-US" sz="1250" dirty="0"/>
+          </a:p>
+        </p:txBody>
+      </p:sp>
+      <p:sp>
+        <p:nvSpPr>
+          <p:cNvPr id="19" name="Shape 14"/>
+          <p:cNvSpPr/>
+          <p:nvPr/>
+        </p:nvSpPr>
+        <p:spPr>
+          <a:xfrm>
+            <a:off x="6309360" y="3657600"/>
+            <a:ext cx="5349240" cy="1691640"/>
           </a:xfrm>
           <a:prstGeom prst="roundRect">
             <a:avLst>
-              <a:gd name="adj" fmla="val 4186"/>
+              <a:gd name="adj" fmla="val 5405"/>
             </a:avLst>
           </a:prstGeom>
           <a:solidFill>
@@ -3730,7 +3953,7 @@
           <a:effectLst>
             <a:outerShdw sx="100000" sy="100000" kx="0" ky="0" algn="bl" rotWithShape="0" blurRad="76200" dist="25400" dir="5400000">
               <a:srgbClr val="1B2B22">
-                <a:alpha val="16000"/>
+                <a:alpha val="14000"/>
               </a:srgbClr>
             </a:outerShdw>
           </a:effectLst>
@@ -3738,53 +3961,97 @@
       </p:sp>
       <p:sp>
         <p:nvSpPr>
-          <p:cNvPr id="14" name="Text 12"/>
-          <p:cNvSpPr/>
-          <p:nvPr/>
-        </p:nvSpPr>
-        <p:spPr>
-          <a:xfrm>
-            <a:off x="6510528" y="4151376"/>
-            <a:ext cx="4946904" cy="1022299"/>
-          </a:xfrm>
-          <a:prstGeom prst="rect">
-            <a:avLst/>
-          </a:prstGeom>
-          <a:noFill/>
-          <a:ln/>
-        </p:spPr>
-        <p:txBody>
-          <a:bodyPr wrap="square" lIns="0" tIns="0" rIns="0" bIns="0" rtlCol="0" anchor="b"/>
-          <a:lstStyle/>
-          <a:p>
-            <a:pPr algn="l" indent="0" marL="0">
-              <a:buNone/>
-            </a:pPr>
-            <a:r>
-              <a:rPr lang="en-US" sz="2600" b="1" dirty="0">
-                <a:solidFill>
-                  <a:srgbClr val="0B5E34"/>
+          <p:cNvPr id="20" name="Shape 15"/>
+          <p:cNvSpPr/>
+          <p:nvPr/>
+        </p:nvSpPr>
+        <p:spPr>
+          <a:xfrm>
+            <a:off x="6565392" y="3913632"/>
+            <a:ext cx="621792" cy="621792"/>
+          </a:xfrm>
+          <a:prstGeom prst="ellipse">
+            <a:avLst/>
+          </a:prstGeom>
+          <a:solidFill>
+            <a:srgbClr val="146B47"/>
+          </a:solidFill>
+          <a:ln/>
+        </p:spPr>
+      </p:sp>
+      <p:pic>
+        <p:nvPicPr>
+          <p:cNvPr id="21" name="Image 3" descr="preencoded.png">    </p:cNvPr>
+          <p:cNvPicPr>
+            <a:picLocks noChangeAspect="1"/>
+          </p:cNvPicPr>
+          <p:nvPr/>
+        </p:nvPicPr>
+        <p:blipFill>
+          <a:blip r:embed="rId4"/>
+          <a:stretch>
+            <a:fillRect/>
+          </a:stretch>
+        </p:blipFill>
+        <p:spPr>
+          <a:xfrm>
+            <a:off x="6714622" y="4062862"/>
+            <a:ext cx="323332" cy="323332"/>
+          </a:xfrm>
+          <a:prstGeom prst="rect">
+            <a:avLst/>
+          </a:prstGeom>
+        </p:spPr>
+      </p:pic>
+      <p:sp>
+        <p:nvSpPr>
+          <p:cNvPr id="22" name="Text 16"/>
+          <p:cNvSpPr/>
+          <p:nvPr/>
+        </p:nvSpPr>
+        <p:spPr>
+          <a:xfrm>
+            <a:off x="7360920" y="3913632"/>
+            <a:ext cx="4069080" cy="457200"/>
+          </a:xfrm>
+          <a:prstGeom prst="rect">
+            <a:avLst/>
+          </a:prstGeom>
+          <a:noFill/>
+          <a:ln/>
+        </p:spPr>
+        <p:txBody>
+          <a:bodyPr wrap="square" lIns="0" tIns="0" rIns="0" bIns="0" rtlCol="0" anchor="ctr"/>
+          <a:lstStyle/>
+          <a:p>
+            <a:pPr indent="0" marL="0">
+              <a:buNone/>
+            </a:pPr>
+            <a:r>
+              <a:rPr lang="en-US" sz="1650" b="1" dirty="0">
+                <a:solidFill>
+                  <a:srgbClr val="17231C"/>
                 </a:solidFill>
                 <a:latin typeface="Cambria" pitchFamily="34" charset="0"/>
                 <a:ea typeface="Cambria" pitchFamily="34" charset="-122"/>
                 <a:cs typeface="Cambria" pitchFamily="34" charset="-120"/>
               </a:rPr>
-              <a:t>₦766.2M</a:t>
-            </a:r>
-            <a:endParaRPr lang="en-US" sz="2600" dirty="0"/>
-          </a:p>
-        </p:txBody>
-      </p:sp>
-      <p:sp>
-        <p:nvSpPr>
-          <p:cNvPr id="15" name="Text 13"/>
-          <p:cNvSpPr/>
-          <p:nvPr/>
-        </p:nvSpPr>
-        <p:spPr>
-          <a:xfrm>
-            <a:off x="6510528" y="5202936"/>
-            <a:ext cx="4946904" cy="707746"/>
+              <a:t>Healthcare</a:t>
+            </a:r>
+            <a:endParaRPr lang="en-US" sz="1650" dirty="0"/>
+          </a:p>
+        </p:txBody>
+      </p:sp>
+      <p:sp>
+        <p:nvSpPr>
+          <p:cNvPr id="23" name="Text 17"/>
+          <p:cNvSpPr/>
+          <p:nvPr/>
+        </p:nvSpPr>
+        <p:spPr>
+          <a:xfrm>
+            <a:off x="7360920" y="4389120"/>
+            <a:ext cx="4069080" cy="777240"/>
           </a:xfrm>
           <a:prstGeom prst="rect">
             <a:avLst/>
@@ -3796,11 +4063,11 @@
           <a:bodyPr wrap="square" lIns="0" tIns="0" rIns="0" bIns="0" rtlCol="0" anchor="t"/>
           <a:lstStyle/>
           <a:p>
-            <a:pPr algn="l" indent="0" marL="0">
-              <a:buNone/>
-            </a:pPr>
-            <a:r>
-              <a:rPr lang="en-US" sz="1150" dirty="0">
+            <a:pPr indent="0" marL="0">
+              <a:buNone/>
+            </a:pPr>
+            <a:r>
+              <a:rPr lang="en-US" sz="1250" dirty="0">
                 <a:solidFill>
                   <a:srgbClr val="5E6E66"/>
                 </a:solidFill>
@@ -3808,87 +4075,87 @@
                 <a:ea typeface="Calibri" pitchFamily="34" charset="-122"/>
                 <a:cs typeface="Calibri" pitchFamily="34" charset="-120"/>
               </a:rPr>
-              <a:t>fine against MultiChoice Nigeria (Jul 2025) for privacy violations</a:t>
-            </a:r>
-            <a:endParaRPr lang="en-US" sz="1150" dirty="0"/>
-          </a:p>
-        </p:txBody>
-      </p:sp>
-      <p:sp>
-        <p:nvSpPr>
-          <p:cNvPr id="16" name="Text 14"/>
-          <p:cNvSpPr/>
-          <p:nvPr/>
-        </p:nvSpPr>
-        <p:spPr>
-          <a:xfrm>
-            <a:off x="11368735" y="6446520"/>
-            <a:ext cx="457200" cy="274320"/>
-          </a:xfrm>
-          <a:prstGeom prst="rect">
-            <a:avLst/>
-          </a:prstGeom>
-          <a:noFill/>
-          <a:ln/>
-        </p:spPr>
-        <p:txBody>
-          <a:bodyPr wrap="square" lIns="0" tIns="0" rIns="0" bIns="0" rtlCol="0" anchor="ctr"/>
-          <a:lstStyle/>
-          <a:p>
-            <a:pPr algn="r" indent="0" marL="0">
-              <a:buNone/>
-            </a:pPr>
-            <a:r>
-              <a:rPr lang="en-US" sz="1000" dirty="0">
-                <a:solidFill>
-                  <a:srgbClr val="5E6E66"/>
+              <a:t>Patient data theft, system disruption</a:t>
+            </a:r>
+            <a:endParaRPr lang="en-US" sz="1250" dirty="0"/>
+          </a:p>
+        </p:txBody>
+      </p:sp>
+      <p:sp>
+        <p:nvSpPr>
+          <p:cNvPr id="24" name="Text 18"/>
+          <p:cNvSpPr/>
+          <p:nvPr/>
+        </p:nvSpPr>
+        <p:spPr>
+          <a:xfrm>
+            <a:off x="502920" y="5715000"/>
+            <a:ext cx="11185855" cy="365760"/>
+          </a:xfrm>
+          <a:prstGeom prst="rect">
+            <a:avLst/>
+          </a:prstGeom>
+          <a:noFill/>
+          <a:ln/>
+        </p:spPr>
+        <p:txBody>
+          <a:bodyPr wrap="square" lIns="0" tIns="0" rIns="0" bIns="0" rtlCol="0" anchor="ctr"/>
+          <a:lstStyle/>
+          <a:p>
+            <a:pPr indent="0" marL="0">
+              <a:buNone/>
+            </a:pPr>
+            <a:r>
+              <a:rPr lang="en-US" sz="1300" b="1" i="1" dirty="0">
+                <a:solidFill>
+                  <a:srgbClr val="0B5E34"/>
                 </a:solidFill>
                 <a:latin typeface="Calibri" pitchFamily="34" charset="0"/>
                 <a:ea typeface="Calibri" pitchFamily="34" charset="-122"/>
                 <a:cs typeface="Calibri" pitchFamily="34" charset="-120"/>
               </a:rPr>
-              <a:t>10</a:t>
-            </a:r>
-            <a:endParaRPr lang="en-US" sz="1000" dirty="0"/>
-          </a:p>
-        </p:txBody>
-      </p:sp>
-      <p:sp>
-        <p:nvSpPr>
-          <p:cNvPr id="17" name="Text 15"/>
-          <p:cNvSpPr/>
-          <p:nvPr/>
-        </p:nvSpPr>
-        <p:spPr>
-          <a:xfrm>
-            <a:off x="502920" y="6473952"/>
-            <a:ext cx="8412480" cy="274320"/>
-          </a:xfrm>
-          <a:prstGeom prst="rect">
-            <a:avLst/>
-          </a:prstGeom>
-          <a:noFill/>
-          <a:ln/>
-        </p:spPr>
-        <p:txBody>
-          <a:bodyPr wrap="square" lIns="0" tIns="0" rIns="0" bIns="0" rtlCol="0" anchor="ctr"/>
-          <a:lstStyle/>
-          <a:p>
-            <a:pPr indent="0" marL="0">
-              <a:buNone/>
-            </a:pPr>
-            <a:r>
-              <a:rPr lang="en-US" sz="800" i="1" dirty="0">
-                <a:solidFill>
-                  <a:srgbClr val="9AA7A0"/>
+              <a:t>Common thread: attacks are increasingly organized, targeted, and identity-driven — not opportunistic.</a:t>
+            </a:r>
+            <a:endParaRPr lang="en-US" sz="1300" dirty="0"/>
+          </a:p>
+        </p:txBody>
+      </p:sp>
+      <p:sp>
+        <p:nvSpPr>
+          <p:cNvPr id="25" name="Text 19"/>
+          <p:cNvSpPr/>
+          <p:nvPr/>
+        </p:nvSpPr>
+        <p:spPr>
+          <a:xfrm>
+            <a:off x="11368735" y="6446520"/>
+            <a:ext cx="457200" cy="274320"/>
+          </a:xfrm>
+          <a:prstGeom prst="rect">
+            <a:avLst/>
+          </a:prstGeom>
+          <a:noFill/>
+          <a:ln/>
+        </p:spPr>
+        <p:txBody>
+          <a:bodyPr wrap="square" lIns="0" tIns="0" rIns="0" bIns="0" rtlCol="0" anchor="ctr"/>
+          <a:lstStyle/>
+          <a:p>
+            <a:pPr algn="r" indent="0" marL="0">
+              <a:buNone/>
+            </a:pPr>
+            <a:r>
+              <a:rPr lang="en-US" sz="1000" dirty="0">
+                <a:solidFill>
+                  <a:srgbClr val="5E6E66"/>
                 </a:solidFill>
                 <a:latin typeface="Calibri" pitchFamily="34" charset="0"/>
                 <a:ea typeface="Calibri" pitchFamily="34" charset="-122"/>
                 <a:cs typeface="Calibri" pitchFamily="34" charset="-120"/>
               </a:rPr>
-              <a:t>Sources: Businessday NG, Vanguard, TechCabal, CBN, NDPC, NITDA/ONSA, UNODC, SC Media, ISC2/CompTIA (2025-2026 reporting)</a:t>
-            </a:r>
-            <a:endParaRPr lang="en-US" sz="800" dirty="0"/>
+              <a:t>10</a:t>
+            </a:r>
+            <a:endParaRPr lang="en-US" sz="1000" dirty="0"/>
           </a:p>
         </p:txBody>
       </p:sp>
@@ -3903,6 +4170,622 @@
 <file path=ppt/slides/slide11.xml><?xml version="1.0" encoding="utf-8"?>
 <p:sld xmlns:a="http://schemas.openxmlformats.org/drawingml/2006/main" xmlns:r="http://schemas.openxmlformats.org/officeDocument/2006/relationships" xmlns:p="http://schemas.openxmlformats.org/presentationml/2006/main">
   <p:cSld name="Slide 11">
+    <p:bg>
+      <p:bgPr>
+        <a:solidFill>
+          <a:srgbClr val="FFFFFF"/>
+        </a:solidFill>
+      </p:bgPr>
+    </p:bg>
+    <p:spTree>
+      <p:nvGrpSpPr>
+        <p:cNvPr id="1" name=""/>
+        <p:cNvGrpSpPr/>
+        <p:nvPr/>
+      </p:nvGrpSpPr>
+      <p:grpSpPr>
+        <a:xfrm>
+          <a:off x="0" y="0"/>
+          <a:ext cx="0" cy="0"/>
+          <a:chOff x="0" y="0"/>
+          <a:chExt cx="0" cy="0"/>
+        </a:xfrm>
+      </p:grpSpPr>
+      <p:sp>
+        <p:nvSpPr>
+          <p:cNvPr id="2" name="Text 0"/>
+          <p:cNvSpPr/>
+          <p:nvPr/>
+        </p:nvSpPr>
+        <p:spPr>
+          <a:xfrm>
+            <a:off x="502920" y="384048"/>
+            <a:ext cx="11185855" cy="292608"/>
+          </a:xfrm>
+          <a:prstGeom prst="rect">
+            <a:avLst/>
+          </a:prstGeom>
+          <a:noFill/>
+          <a:ln/>
+        </p:spPr>
+        <p:txBody>
+          <a:bodyPr wrap="square" lIns="0" tIns="0" rIns="0" bIns="0" rtlCol="0" anchor="ctr"/>
+          <a:lstStyle/>
+          <a:p>
+            <a:pPr indent="0" marL="0">
+              <a:buNone/>
+            </a:pPr>
+            <a:r>
+              <a:rPr lang="en-US" sz="1250" b="1" spc="200" kern="0" dirty="0">
+                <a:solidFill>
+                  <a:srgbClr val="0B5E34"/>
+                </a:solidFill>
+                <a:latin typeface="Calibri" pitchFamily="34" charset="0"/>
+                <a:ea typeface="Calibri" pitchFamily="34" charset="-122"/>
+                <a:cs typeface="Calibri" pitchFamily="34" charset="-120"/>
+              </a:rPr>
+              <a:t>REGULATORY RESPONSE</a:t>
+            </a:r>
+            <a:endParaRPr lang="en-US" sz="1250" dirty="0"/>
+          </a:p>
+        </p:txBody>
+      </p:sp>
+      <p:sp>
+        <p:nvSpPr>
+          <p:cNvPr id="3" name="Text 1"/>
+          <p:cNvSpPr/>
+          <p:nvPr/>
+        </p:nvSpPr>
+        <p:spPr>
+          <a:xfrm>
+            <a:off x="502920" y="658368"/>
+            <a:ext cx="11185855" cy="640080"/>
+          </a:xfrm>
+          <a:prstGeom prst="rect">
+            <a:avLst/>
+          </a:prstGeom>
+          <a:noFill/>
+          <a:ln/>
+        </p:spPr>
+        <p:txBody>
+          <a:bodyPr wrap="square" lIns="0" tIns="0" rIns="0" bIns="0" rtlCol="0" anchor="ctr"/>
+          <a:lstStyle/>
+          <a:p>
+            <a:pPr indent="0" marL="0">
+              <a:buNone/>
+            </a:pPr>
+            <a:r>
+              <a:rPr lang="en-US" sz="3000" b="1" dirty="0">
+                <a:solidFill>
+                  <a:srgbClr val="17231C"/>
+                </a:solidFill>
+                <a:latin typeface="Cambria" pitchFamily="34" charset="0"/>
+                <a:ea typeface="Cambria" pitchFamily="34" charset="-122"/>
+                <a:cs typeface="Cambria" pitchFamily="34" charset="-120"/>
+              </a:rPr>
+              <a:t>Data protection gets real teeth</a:t>
+            </a:r>
+            <a:endParaRPr lang="en-US" sz="3000" dirty="0"/>
+          </a:p>
+        </p:txBody>
+      </p:sp>
+      <p:sp>
+        <p:nvSpPr>
+          <p:cNvPr id="4" name="Shape 2"/>
+          <p:cNvSpPr/>
+          <p:nvPr/>
+        </p:nvSpPr>
+        <p:spPr>
+          <a:xfrm>
+            <a:off x="502920" y="1691640"/>
+            <a:ext cx="5349240" cy="1965960"/>
+          </a:xfrm>
+          <a:prstGeom prst="roundRect">
+            <a:avLst>
+              <a:gd name="adj" fmla="val 4186"/>
+            </a:avLst>
+          </a:prstGeom>
+          <a:solidFill>
+            <a:srgbClr val="F1F5F2"/>
+          </a:solidFill>
+          <a:ln/>
+          <a:effectLst>
+            <a:outerShdw sx="100000" sy="100000" kx="0" ky="0" algn="bl" rotWithShape="0" blurRad="76200" dist="25400" dir="5400000">
+              <a:srgbClr val="1B2B22">
+                <a:alpha val="16000"/>
+              </a:srgbClr>
+            </a:outerShdw>
+          </a:effectLst>
+        </p:spPr>
+      </p:sp>
+      <p:sp>
+        <p:nvSpPr>
+          <p:cNvPr id="5" name="Text 3"/>
+          <p:cNvSpPr/>
+          <p:nvPr/>
+        </p:nvSpPr>
+        <p:spPr>
+          <a:xfrm>
+            <a:off x="704088" y="1819656"/>
+            <a:ext cx="4946904" cy="1022299"/>
+          </a:xfrm>
+          <a:prstGeom prst="rect">
+            <a:avLst/>
+          </a:prstGeom>
+          <a:noFill/>
+          <a:ln/>
+        </p:spPr>
+        <p:txBody>
+          <a:bodyPr wrap="square" lIns="0" tIns="0" rIns="0" bIns="0" rtlCol="0" anchor="b"/>
+          <a:lstStyle/>
+          <a:p>
+            <a:pPr algn="l" indent="0" marL="0">
+              <a:buNone/>
+            </a:pPr>
+            <a:r>
+              <a:rPr lang="en-US" sz="2600" b="1" dirty="0">
+                <a:solidFill>
+                  <a:srgbClr val="0B5E34"/>
+                </a:solidFill>
+                <a:latin typeface="Cambria" pitchFamily="34" charset="0"/>
+                <a:ea typeface="Cambria" pitchFamily="34" charset="-122"/>
+                <a:cs typeface="Cambria" pitchFamily="34" charset="-120"/>
+              </a:rPr>
+              <a:t>Sep 19, 2025</a:t>
+            </a:r>
+            <a:endParaRPr lang="en-US" sz="2600" dirty="0"/>
+          </a:p>
+        </p:txBody>
+      </p:sp>
+      <p:sp>
+        <p:nvSpPr>
+          <p:cNvPr id="6" name="Text 4"/>
+          <p:cNvSpPr/>
+          <p:nvPr/>
+        </p:nvSpPr>
+        <p:spPr>
+          <a:xfrm>
+            <a:off x="704088" y="2871216"/>
+            <a:ext cx="4946904" cy="707746"/>
+          </a:xfrm>
+          <a:prstGeom prst="rect">
+            <a:avLst/>
+          </a:prstGeom>
+          <a:noFill/>
+          <a:ln/>
+        </p:spPr>
+        <p:txBody>
+          <a:bodyPr wrap="square" lIns="0" tIns="0" rIns="0" bIns="0" rtlCol="0" anchor="t"/>
+          <a:lstStyle/>
+          <a:p>
+            <a:pPr algn="l" indent="0" marL="0">
+              <a:buNone/>
+            </a:pPr>
+            <a:r>
+              <a:rPr lang="en-US" sz="1150" dirty="0">
+                <a:solidFill>
+                  <a:srgbClr val="5E6E66"/>
+                </a:solidFill>
+                <a:latin typeface="Calibri" pitchFamily="34" charset="0"/>
+                <a:ea typeface="Calibri" pitchFamily="34" charset="-122"/>
+                <a:cs typeface="Calibri" pitchFamily="34" charset="-120"/>
+              </a:rPr>
+              <a:t>NDPA General Application &amp; Implementation Directive (GAID) takes effect</a:t>
+            </a:r>
+            <a:endParaRPr lang="en-US" sz="1150" dirty="0"/>
+          </a:p>
+        </p:txBody>
+      </p:sp>
+      <p:sp>
+        <p:nvSpPr>
+          <p:cNvPr id="7" name="Shape 5"/>
+          <p:cNvSpPr/>
+          <p:nvPr/>
+        </p:nvSpPr>
+        <p:spPr>
+          <a:xfrm>
+            <a:off x="6309360" y="1691640"/>
+            <a:ext cx="5349240" cy="1965960"/>
+          </a:xfrm>
+          <a:prstGeom prst="roundRect">
+            <a:avLst>
+              <a:gd name="adj" fmla="val 4186"/>
+            </a:avLst>
+          </a:prstGeom>
+          <a:solidFill>
+            <a:srgbClr val="F1F5F2"/>
+          </a:solidFill>
+          <a:ln/>
+          <a:effectLst>
+            <a:outerShdw sx="100000" sy="100000" kx="0" ky="0" algn="bl" rotWithShape="0" blurRad="76200" dist="25400" dir="5400000">
+              <a:srgbClr val="1B2B22">
+                <a:alpha val="16000"/>
+              </a:srgbClr>
+            </a:outerShdw>
+          </a:effectLst>
+        </p:spPr>
+      </p:sp>
+      <p:sp>
+        <p:nvSpPr>
+          <p:cNvPr id="8" name="Text 6"/>
+          <p:cNvSpPr/>
+          <p:nvPr/>
+        </p:nvSpPr>
+        <p:spPr>
+          <a:xfrm>
+            <a:off x="6510528" y="1819656"/>
+            <a:ext cx="4946904" cy="1022299"/>
+          </a:xfrm>
+          <a:prstGeom prst="rect">
+            <a:avLst/>
+          </a:prstGeom>
+          <a:noFill/>
+          <a:ln/>
+        </p:spPr>
+        <p:txBody>
+          <a:bodyPr wrap="square" lIns="0" tIns="0" rIns="0" bIns="0" rtlCol="0" anchor="b"/>
+          <a:lstStyle/>
+          <a:p>
+            <a:pPr algn="l" indent="0" marL="0">
+              <a:buNone/>
+            </a:pPr>
+            <a:r>
+              <a:rPr lang="en-US" sz="2600" b="1" dirty="0">
+                <a:solidFill>
+                  <a:srgbClr val="0B5E34"/>
+                </a:solidFill>
+                <a:latin typeface="Cambria" pitchFamily="34" charset="0"/>
+                <a:ea typeface="Cambria" pitchFamily="34" charset="-122"/>
+                <a:cs typeface="Cambria" pitchFamily="34" charset="-120"/>
+              </a:rPr>
+              <a:t>1,368</a:t>
+            </a:r>
+            <a:endParaRPr lang="en-US" sz="2600" dirty="0"/>
+          </a:p>
+        </p:txBody>
+      </p:sp>
+      <p:sp>
+        <p:nvSpPr>
+          <p:cNvPr id="9" name="Text 7"/>
+          <p:cNvSpPr/>
+          <p:nvPr/>
+        </p:nvSpPr>
+        <p:spPr>
+          <a:xfrm>
+            <a:off x="6510528" y="2871216"/>
+            <a:ext cx="4946904" cy="707746"/>
+          </a:xfrm>
+          <a:prstGeom prst="rect">
+            <a:avLst/>
+          </a:prstGeom>
+          <a:noFill/>
+          <a:ln/>
+        </p:spPr>
+        <p:txBody>
+          <a:bodyPr wrap="square" lIns="0" tIns="0" rIns="0" bIns="0" rtlCol="0" anchor="t"/>
+          <a:lstStyle/>
+          <a:p>
+            <a:pPr algn="l" indent="0" marL="0">
+              <a:buNone/>
+            </a:pPr>
+            <a:r>
+              <a:rPr lang="en-US" sz="1150" dirty="0">
+                <a:solidFill>
+                  <a:srgbClr val="5E6E66"/>
+                </a:solidFill>
+                <a:latin typeface="Calibri" pitchFamily="34" charset="0"/>
+                <a:ea typeface="Calibri" pitchFamily="34" charset="-122"/>
+                <a:cs typeface="Calibri" pitchFamily="34" charset="-120"/>
+              </a:rPr>
+              <a:t>organizations issued compliance notices in Aug 2025 (banks, insurers, gaming, pension firms)</a:t>
+            </a:r>
+            <a:endParaRPr lang="en-US" sz="1150" dirty="0"/>
+          </a:p>
+        </p:txBody>
+      </p:sp>
+      <p:sp>
+        <p:nvSpPr>
+          <p:cNvPr id="10" name="Shape 8"/>
+          <p:cNvSpPr/>
+          <p:nvPr/>
+        </p:nvSpPr>
+        <p:spPr>
+          <a:xfrm>
+            <a:off x="502920" y="4023360"/>
+            <a:ext cx="5349240" cy="1965960"/>
+          </a:xfrm>
+          <a:prstGeom prst="roundRect">
+            <a:avLst>
+              <a:gd name="adj" fmla="val 4186"/>
+            </a:avLst>
+          </a:prstGeom>
+          <a:solidFill>
+            <a:srgbClr val="F1F5F2"/>
+          </a:solidFill>
+          <a:ln/>
+          <a:effectLst>
+            <a:outerShdw sx="100000" sy="100000" kx="0" ky="0" algn="bl" rotWithShape="0" blurRad="76200" dist="25400" dir="5400000">
+              <a:srgbClr val="1B2B22">
+                <a:alpha val="16000"/>
+              </a:srgbClr>
+            </a:outerShdw>
+          </a:effectLst>
+        </p:spPr>
+      </p:sp>
+      <p:sp>
+        <p:nvSpPr>
+          <p:cNvPr id="11" name="Text 9"/>
+          <p:cNvSpPr/>
+          <p:nvPr/>
+        </p:nvSpPr>
+        <p:spPr>
+          <a:xfrm>
+            <a:off x="704088" y="4151376"/>
+            <a:ext cx="4946904" cy="1022299"/>
+          </a:xfrm>
+          <a:prstGeom prst="rect">
+            <a:avLst/>
+          </a:prstGeom>
+          <a:noFill/>
+          <a:ln/>
+        </p:spPr>
+        <p:txBody>
+          <a:bodyPr wrap="square" lIns="0" tIns="0" rIns="0" bIns="0" rtlCol="0" anchor="b"/>
+          <a:lstStyle/>
+          <a:p>
+            <a:pPr algn="l" indent="0" marL="0">
+              <a:buNone/>
+            </a:pPr>
+            <a:r>
+              <a:rPr lang="en-US" sz="2600" b="1" dirty="0">
+                <a:solidFill>
+                  <a:srgbClr val="0B5E34"/>
+                </a:solidFill>
+                <a:latin typeface="Cambria" pitchFamily="34" charset="0"/>
+                <a:ea typeface="Cambria" pitchFamily="34" charset="-122"/>
+                <a:cs typeface="Cambria" pitchFamily="34" charset="-120"/>
+              </a:rPr>
+              <a:t>$32.8M</a:t>
+            </a:r>
+            <a:endParaRPr lang="en-US" sz="2600" dirty="0"/>
+          </a:p>
+        </p:txBody>
+      </p:sp>
+      <p:sp>
+        <p:nvSpPr>
+          <p:cNvPr id="12" name="Text 10"/>
+          <p:cNvSpPr/>
+          <p:nvPr/>
+        </p:nvSpPr>
+        <p:spPr>
+          <a:xfrm>
+            <a:off x="704088" y="5202936"/>
+            <a:ext cx="4946904" cy="707746"/>
+          </a:xfrm>
+          <a:prstGeom prst="rect">
+            <a:avLst/>
+          </a:prstGeom>
+          <a:noFill/>
+          <a:ln/>
+        </p:spPr>
+        <p:txBody>
+          <a:bodyPr wrap="square" lIns="0" tIns="0" rIns="0" bIns="0" rtlCol="0" anchor="t"/>
+          <a:lstStyle/>
+          <a:p>
+            <a:pPr algn="l" indent="0" marL="0">
+              <a:buNone/>
+            </a:pPr>
+            <a:r>
+              <a:rPr lang="en-US" sz="1150" dirty="0">
+                <a:solidFill>
+                  <a:srgbClr val="5E6E66"/>
+                </a:solidFill>
+                <a:latin typeface="Calibri" pitchFamily="34" charset="0"/>
+                <a:ea typeface="Calibri" pitchFamily="34" charset="-122"/>
+                <a:cs typeface="Calibri" pitchFamily="34" charset="-120"/>
+              </a:rPr>
+              <a:t>fine against Meta (Feb 2025) for NDPA breaches, incl. cross-border transfer violations</a:t>
+            </a:r>
+            <a:endParaRPr lang="en-US" sz="1150" dirty="0"/>
+          </a:p>
+        </p:txBody>
+      </p:sp>
+      <p:sp>
+        <p:nvSpPr>
+          <p:cNvPr id="13" name="Shape 11"/>
+          <p:cNvSpPr/>
+          <p:nvPr/>
+        </p:nvSpPr>
+        <p:spPr>
+          <a:xfrm>
+            <a:off x="6309360" y="4023360"/>
+            <a:ext cx="5349240" cy="1965960"/>
+          </a:xfrm>
+          <a:prstGeom prst="roundRect">
+            <a:avLst>
+              <a:gd name="adj" fmla="val 4186"/>
+            </a:avLst>
+          </a:prstGeom>
+          <a:solidFill>
+            <a:srgbClr val="F1F5F2"/>
+          </a:solidFill>
+          <a:ln/>
+          <a:effectLst>
+            <a:outerShdw sx="100000" sy="100000" kx="0" ky="0" algn="bl" rotWithShape="0" blurRad="76200" dist="25400" dir="5400000">
+              <a:srgbClr val="1B2B22">
+                <a:alpha val="16000"/>
+              </a:srgbClr>
+            </a:outerShdw>
+          </a:effectLst>
+        </p:spPr>
+      </p:sp>
+      <p:sp>
+        <p:nvSpPr>
+          <p:cNvPr id="14" name="Text 12"/>
+          <p:cNvSpPr/>
+          <p:nvPr/>
+        </p:nvSpPr>
+        <p:spPr>
+          <a:xfrm>
+            <a:off x="6510528" y="4151376"/>
+            <a:ext cx="4946904" cy="1022299"/>
+          </a:xfrm>
+          <a:prstGeom prst="rect">
+            <a:avLst/>
+          </a:prstGeom>
+          <a:noFill/>
+          <a:ln/>
+        </p:spPr>
+        <p:txBody>
+          <a:bodyPr wrap="square" lIns="0" tIns="0" rIns="0" bIns="0" rtlCol="0" anchor="b"/>
+          <a:lstStyle/>
+          <a:p>
+            <a:pPr algn="l" indent="0" marL="0">
+              <a:buNone/>
+            </a:pPr>
+            <a:r>
+              <a:rPr lang="en-US" sz="2600" b="1" dirty="0">
+                <a:solidFill>
+                  <a:srgbClr val="0B5E34"/>
+                </a:solidFill>
+                <a:latin typeface="Cambria" pitchFamily="34" charset="0"/>
+                <a:ea typeface="Cambria" pitchFamily="34" charset="-122"/>
+                <a:cs typeface="Cambria" pitchFamily="34" charset="-120"/>
+              </a:rPr>
+              <a:t>₦766.2M</a:t>
+            </a:r>
+            <a:endParaRPr lang="en-US" sz="2600" dirty="0"/>
+          </a:p>
+        </p:txBody>
+      </p:sp>
+      <p:sp>
+        <p:nvSpPr>
+          <p:cNvPr id="15" name="Text 13"/>
+          <p:cNvSpPr/>
+          <p:nvPr/>
+        </p:nvSpPr>
+        <p:spPr>
+          <a:xfrm>
+            <a:off x="6510528" y="5202936"/>
+            <a:ext cx="4946904" cy="707746"/>
+          </a:xfrm>
+          <a:prstGeom prst="rect">
+            <a:avLst/>
+          </a:prstGeom>
+          <a:noFill/>
+          <a:ln/>
+        </p:spPr>
+        <p:txBody>
+          <a:bodyPr wrap="square" lIns="0" tIns="0" rIns="0" bIns="0" rtlCol="0" anchor="t"/>
+          <a:lstStyle/>
+          <a:p>
+            <a:pPr algn="l" indent="0" marL="0">
+              <a:buNone/>
+            </a:pPr>
+            <a:r>
+              <a:rPr lang="en-US" sz="1150" dirty="0">
+                <a:solidFill>
+                  <a:srgbClr val="5E6E66"/>
+                </a:solidFill>
+                <a:latin typeface="Calibri" pitchFamily="34" charset="0"/>
+                <a:ea typeface="Calibri" pitchFamily="34" charset="-122"/>
+                <a:cs typeface="Calibri" pitchFamily="34" charset="-120"/>
+              </a:rPr>
+              <a:t>fine against MultiChoice Nigeria (Jul 2025) for privacy violations</a:t>
+            </a:r>
+            <a:endParaRPr lang="en-US" sz="1150" dirty="0"/>
+          </a:p>
+        </p:txBody>
+      </p:sp>
+      <p:sp>
+        <p:nvSpPr>
+          <p:cNvPr id="16" name="Text 14"/>
+          <p:cNvSpPr/>
+          <p:nvPr/>
+        </p:nvSpPr>
+        <p:spPr>
+          <a:xfrm>
+            <a:off x="11368735" y="6446520"/>
+            <a:ext cx="457200" cy="274320"/>
+          </a:xfrm>
+          <a:prstGeom prst="rect">
+            <a:avLst/>
+          </a:prstGeom>
+          <a:noFill/>
+          <a:ln/>
+        </p:spPr>
+        <p:txBody>
+          <a:bodyPr wrap="square" lIns="0" tIns="0" rIns="0" bIns="0" rtlCol="0" anchor="ctr"/>
+          <a:lstStyle/>
+          <a:p>
+            <a:pPr algn="r" indent="0" marL="0">
+              <a:buNone/>
+            </a:pPr>
+            <a:r>
+              <a:rPr lang="en-US" sz="1000" dirty="0">
+                <a:solidFill>
+                  <a:srgbClr val="5E6E66"/>
+                </a:solidFill>
+                <a:latin typeface="Calibri" pitchFamily="34" charset="0"/>
+                <a:ea typeface="Calibri" pitchFamily="34" charset="-122"/>
+                <a:cs typeface="Calibri" pitchFamily="34" charset="-120"/>
+              </a:rPr>
+              <a:t>11</a:t>
+            </a:r>
+            <a:endParaRPr lang="en-US" sz="1000" dirty="0"/>
+          </a:p>
+        </p:txBody>
+      </p:sp>
+      <p:sp>
+        <p:nvSpPr>
+          <p:cNvPr id="17" name="Text 15"/>
+          <p:cNvSpPr/>
+          <p:nvPr/>
+        </p:nvSpPr>
+        <p:spPr>
+          <a:xfrm>
+            <a:off x="502920" y="6473952"/>
+            <a:ext cx="8412480" cy="274320"/>
+          </a:xfrm>
+          <a:prstGeom prst="rect">
+            <a:avLst/>
+          </a:prstGeom>
+          <a:noFill/>
+          <a:ln/>
+        </p:spPr>
+        <p:txBody>
+          <a:bodyPr wrap="square" lIns="0" tIns="0" rIns="0" bIns="0" rtlCol="0" anchor="ctr"/>
+          <a:lstStyle/>
+          <a:p>
+            <a:pPr indent="0" marL="0">
+              <a:buNone/>
+            </a:pPr>
+            <a:r>
+              <a:rPr lang="en-US" sz="800" i="1" dirty="0">
+                <a:solidFill>
+                  <a:srgbClr val="9AA7A0"/>
+                </a:solidFill>
+                <a:latin typeface="Calibri" pitchFamily="34" charset="0"/>
+                <a:ea typeface="Calibri" pitchFamily="34" charset="-122"/>
+                <a:cs typeface="Calibri" pitchFamily="34" charset="-120"/>
+              </a:rPr>
+              <a:t>Sources: Businessday NG, Vanguard, TechCabal, CBN, NDPC, NITDA/ONSA, UNODC, SC Media, ISC2/CompTIA (2025-2026 reporting)</a:t>
+            </a:r>
+            <a:endParaRPr lang="en-US" sz="800" dirty="0"/>
+          </a:p>
+        </p:txBody>
+      </p:sp>
+    </p:spTree>
+  </p:cSld>
+  <p:clrMapOvr>
+    <a:masterClrMapping/>
+  </p:clrMapOvr>
+</p:sld>
+</file>
+
+<file path=ppt/slides/slide12.xml><?xml version="1.0" encoding="utf-8"?>
+<p:sld xmlns:a="http://schemas.openxmlformats.org/drawingml/2006/main" xmlns:r="http://schemas.openxmlformats.org/officeDocument/2006/relationships" xmlns:p="http://schemas.openxmlformats.org/presentationml/2006/main">
+  <p:cSld name="Slide 12">
     <p:bg>
       <p:bgPr>
         <a:solidFill>
@@ -4639,7 +5522,7 @@
                 <a:ea typeface="Calibri" pitchFamily="34" charset="-122"/>
                 <a:cs typeface="Calibri" pitchFamily="34" charset="-120"/>
               </a:rPr>
-              <a:t>11</a:t>
+              <a:t>12</a:t>
             </a:r>
             <a:endParaRPr lang="en-US" sz="1000" dirty="0"/>
           </a:p>
@@ -4648,759 +5531,6 @@
       <p:sp>
         <p:nvSpPr>
           <p:cNvPr id="25" name="Text 19"/>
-          <p:cNvSpPr/>
-          <p:nvPr/>
-        </p:nvSpPr>
-        <p:spPr>
-          <a:xfrm>
-            <a:off x="502920" y="6473952"/>
-            <a:ext cx="8412480" cy="274320"/>
-          </a:xfrm>
-          <a:prstGeom prst="rect">
-            <a:avLst/>
-          </a:prstGeom>
-          <a:noFill/>
-          <a:ln/>
-        </p:spPr>
-        <p:txBody>
-          <a:bodyPr wrap="square" lIns="0" tIns="0" rIns="0" bIns="0" rtlCol="0" anchor="ctr"/>
-          <a:lstStyle/>
-          <a:p>
-            <a:pPr indent="0" marL="0">
-              <a:buNone/>
-            </a:pPr>
-            <a:r>
-              <a:rPr lang="en-US" sz="800" i="1" dirty="0">
-                <a:solidFill>
-                  <a:srgbClr val="9AA7A0"/>
-                </a:solidFill>
-                <a:latin typeface="Calibri" pitchFamily="34" charset="0"/>
-                <a:ea typeface="Calibri" pitchFamily="34" charset="-122"/>
-                <a:cs typeface="Calibri" pitchFamily="34" charset="-120"/>
-              </a:rPr>
-              <a:t>Sources: Businessday NG, Vanguard, TechCabal, CBN, NDPC, NITDA/ONSA, UNODC, SC Media, ISC2/CompTIA (2025-2026 reporting)</a:t>
-            </a:r>
-            <a:endParaRPr lang="en-US" sz="800" dirty="0"/>
-          </a:p>
-        </p:txBody>
-      </p:sp>
-    </p:spTree>
-  </p:cSld>
-  <p:clrMapOvr>
-    <a:masterClrMapping/>
-  </p:clrMapOvr>
-</p:sld>
-</file>
-
-<file path=ppt/slides/slide12.xml><?xml version="1.0" encoding="utf-8"?>
-<p:sld xmlns:a="http://schemas.openxmlformats.org/drawingml/2006/main" xmlns:r="http://schemas.openxmlformats.org/officeDocument/2006/relationships" xmlns:p="http://schemas.openxmlformats.org/presentationml/2006/main">
-  <p:cSld name="Slide 12">
-    <p:bg>
-      <p:bgPr>
-        <a:solidFill>
-          <a:srgbClr val="FFFFFF"/>
-        </a:solidFill>
-      </p:bgPr>
-    </p:bg>
-    <p:spTree>
-      <p:nvGrpSpPr>
-        <p:cNvPr id="1" name=""/>
-        <p:cNvGrpSpPr/>
-        <p:nvPr/>
-      </p:nvGrpSpPr>
-      <p:grpSpPr>
-        <a:xfrm>
-          <a:off x="0" y="0"/>
-          <a:ext cx="0" cy="0"/>
-          <a:chOff x="0" y="0"/>
-          <a:chExt cx="0" cy="0"/>
-        </a:xfrm>
-      </p:grpSpPr>
-      <p:sp>
-        <p:nvSpPr>
-          <p:cNvPr id="2" name="Text 0"/>
-          <p:cNvSpPr/>
-          <p:nvPr/>
-        </p:nvSpPr>
-        <p:spPr>
-          <a:xfrm>
-            <a:off x="502920" y="384048"/>
-            <a:ext cx="11185855" cy="292608"/>
-          </a:xfrm>
-          <a:prstGeom prst="rect">
-            <a:avLst/>
-          </a:prstGeom>
-          <a:noFill/>
-          <a:ln/>
-        </p:spPr>
-        <p:txBody>
-          <a:bodyPr wrap="square" lIns="0" tIns="0" rIns="0" bIns="0" rtlCol="0" anchor="ctr"/>
-          <a:lstStyle/>
-          <a:p>
-            <a:pPr indent="0" marL="0">
-              <a:buNone/>
-            </a:pPr>
-            <a:r>
-              <a:rPr lang="en-US" sz="1250" b="1" spc="200" kern="0" dirty="0">
-                <a:solidFill>
-                  <a:srgbClr val="0B5E34"/>
-                </a:solidFill>
-                <a:latin typeface="Calibri" pitchFamily="34" charset="0"/>
-                <a:ea typeface="Calibri" pitchFamily="34" charset="-122"/>
-                <a:cs typeface="Calibri" pitchFamily="34" charset="-120"/>
-              </a:rPr>
-              <a:t>NATIONAL STRATEGY</a:t>
-            </a:r>
-            <a:endParaRPr lang="en-US" sz="1250" dirty="0"/>
-          </a:p>
-        </p:txBody>
-      </p:sp>
-      <p:sp>
-        <p:nvSpPr>
-          <p:cNvPr id="3" name="Text 1"/>
-          <p:cNvSpPr/>
-          <p:nvPr/>
-        </p:nvSpPr>
-        <p:spPr>
-          <a:xfrm>
-            <a:off x="502920" y="658368"/>
-            <a:ext cx="11185855" cy="640080"/>
-          </a:xfrm>
-          <a:prstGeom prst="rect">
-            <a:avLst/>
-          </a:prstGeom>
-          <a:noFill/>
-          <a:ln/>
-        </p:spPr>
-        <p:txBody>
-          <a:bodyPr wrap="square" lIns="0" tIns="0" rIns="0" bIns="0" rtlCol="0" anchor="ctr"/>
-          <a:lstStyle/>
-          <a:p>
-            <a:pPr indent="0" marL="0">
-              <a:buNone/>
-            </a:pPr>
-            <a:r>
-              <a:rPr lang="en-US" sz="3000" b="1" dirty="0">
-                <a:solidFill>
-                  <a:srgbClr val="17231C"/>
-                </a:solidFill>
-                <a:latin typeface="Cambria" pitchFamily="34" charset="0"/>
-                <a:ea typeface="Cambria" pitchFamily="34" charset="-122"/>
-                <a:cs typeface="Cambria" pitchFamily="34" charset="-120"/>
-              </a:rPr>
-              <a:t>Coordinating a national response</a:t>
-            </a:r>
-            <a:endParaRPr lang="en-US" sz="3000" dirty="0"/>
-          </a:p>
-        </p:txBody>
-      </p:sp>
-      <p:sp>
-        <p:nvSpPr>
-          <p:cNvPr id="4" name="Shape 2"/>
-          <p:cNvSpPr/>
-          <p:nvPr/>
-        </p:nvSpPr>
-        <p:spPr>
-          <a:xfrm>
-            <a:off x="4160520" y="2377440"/>
-            <a:ext cx="1920240" cy="1920240"/>
-          </a:xfrm>
-          <a:prstGeom prst="ellipse">
-            <a:avLst/>
-          </a:prstGeom>
-          <a:solidFill>
-            <a:srgbClr val="0B5E34"/>
-          </a:solidFill>
-          <a:ln/>
-          <a:effectLst>
-            <a:outerShdw sx="100000" sy="100000" kx="0" ky="0" algn="bl" rotWithShape="0" blurRad="101600" dist="38100" dir="5400000">
-              <a:srgbClr val="1B2B22">
-                <a:alpha val="20000"/>
-              </a:srgbClr>
-            </a:outerShdw>
-          </a:effectLst>
-        </p:spPr>
-      </p:sp>
-      <p:sp>
-        <p:nvSpPr>
-          <p:cNvPr id="5" name="Text 3"/>
-          <p:cNvSpPr/>
-          <p:nvPr/>
-        </p:nvSpPr>
-        <p:spPr>
-          <a:xfrm>
-            <a:off x="4160520" y="2880360"/>
-            <a:ext cx="1920240" cy="457200"/>
-          </a:xfrm>
-          <a:prstGeom prst="rect">
-            <a:avLst/>
-          </a:prstGeom>
-          <a:noFill/>
-          <a:ln/>
-        </p:spPr>
-        <p:txBody>
-          <a:bodyPr wrap="square" lIns="0" tIns="0" rIns="0" bIns="0" rtlCol="0" anchor="ctr"/>
-          <a:lstStyle/>
-          <a:p>
-            <a:pPr algn="ctr" indent="0" marL="0">
-              <a:buNone/>
-            </a:pPr>
-            <a:r>
-              <a:rPr lang="en-US" sz="2200" b="1" dirty="0">
-                <a:solidFill>
-                  <a:srgbClr val="FFFFFF"/>
-                </a:solidFill>
-                <a:latin typeface="Cambria" pitchFamily="34" charset="0"/>
-                <a:ea typeface="Cambria" pitchFamily="34" charset="-122"/>
-                <a:cs typeface="Cambria" pitchFamily="34" charset="-120"/>
-              </a:rPr>
-              <a:t>NCCC</a:t>
-            </a:r>
-            <a:endParaRPr lang="en-US" sz="2200" dirty="0"/>
-          </a:p>
-        </p:txBody>
-      </p:sp>
-      <p:sp>
-        <p:nvSpPr>
-          <p:cNvPr id="6" name="Text 4"/>
-          <p:cNvSpPr/>
-          <p:nvPr/>
-        </p:nvSpPr>
-        <p:spPr>
-          <a:xfrm>
-            <a:off x="4297680" y="3337560"/>
-            <a:ext cx="1645920" cy="822960"/>
-          </a:xfrm>
-          <a:prstGeom prst="rect">
-            <a:avLst/>
-          </a:prstGeom>
-          <a:noFill/>
-          <a:ln/>
-        </p:spPr>
-        <p:txBody>
-          <a:bodyPr wrap="square" lIns="0" tIns="0" rIns="0" bIns="0" rtlCol="0" anchor="ctr"/>
-          <a:lstStyle/>
-          <a:p>
-            <a:pPr algn="ctr" indent="0" marL="0">
-              <a:lnSpc>
-                <a:spcPts val="1200"/>
-              </a:lnSpc>
-              <a:buNone/>
-            </a:pPr>
-            <a:r>
-              <a:rPr lang="en-US" sz="1050" dirty="0">
-                <a:solidFill>
-                  <a:srgbClr val="D9EEE2"/>
-                </a:solidFill>
-                <a:latin typeface="Calibri" pitchFamily="34" charset="0"/>
-                <a:ea typeface="Calibri" pitchFamily="34" charset="-122"/>
-                <a:cs typeface="Calibri" pitchFamily="34" charset="-120"/>
-              </a:rPr>
-              <a:t>National Cybersecurity</a:t>
-            </a:r>
-            <a:endParaRPr lang="en-US" sz="1050" dirty="0"/>
-          </a:p>
-          <a:p>
-            <a:pPr algn="ctr" indent="0" marL="0">
-              <a:lnSpc>
-                <a:spcPts val="1200"/>
-              </a:lnSpc>
-              <a:buNone/>
-            </a:pPr>
-            <a:r>
-              <a:rPr lang="en-US" sz="1050" dirty="0">
-                <a:solidFill>
-                  <a:srgbClr val="D9EEE2"/>
-                </a:solidFill>
-                <a:latin typeface="Calibri" pitchFamily="34" charset="0"/>
-                <a:ea typeface="Calibri" pitchFamily="34" charset="-122"/>
-                <a:cs typeface="Calibri" pitchFamily="34" charset="-120"/>
-              </a:rPr>
-              <a:t>Coordination Centre</a:t>
-            </a:r>
-            <a:endParaRPr lang="en-US" sz="1050" dirty="0"/>
-          </a:p>
-        </p:txBody>
-      </p:sp>
-      <p:sp>
-        <p:nvSpPr>
-          <p:cNvPr id="7" name="Shape 5"/>
-          <p:cNvSpPr/>
-          <p:nvPr/>
-        </p:nvSpPr>
-        <p:spPr>
-          <a:xfrm>
-            <a:off x="1005840" y="1051560"/>
-            <a:ext cx="658368" cy="658368"/>
-          </a:xfrm>
-          <a:prstGeom prst="ellipse">
-            <a:avLst/>
-          </a:prstGeom>
-          <a:solidFill>
-            <a:srgbClr val="146B47"/>
-          </a:solidFill>
-          <a:ln/>
-        </p:spPr>
-      </p:sp>
-      <p:pic>
-        <p:nvPicPr>
-          <p:cNvPr id="8" name="Image 0" descr="preencoded.png">    </p:cNvPr>
-          <p:cNvPicPr>
-            <a:picLocks noChangeAspect="1"/>
-          </p:cNvPicPr>
-          <p:nvPr/>
-        </p:nvPicPr>
-        <p:blipFill>
-          <a:blip r:embed="rId1"/>
-          <a:stretch>
-            <a:fillRect/>
-          </a:stretch>
-        </p:blipFill>
-        <p:spPr>
-          <a:xfrm>
-            <a:off x="1163848" y="1209568"/>
-            <a:ext cx="342351" cy="342351"/>
-          </a:xfrm>
-          <a:prstGeom prst="rect">
-            <a:avLst/>
-          </a:prstGeom>
-        </p:spPr>
-      </p:pic>
-      <p:sp>
-        <p:nvSpPr>
-          <p:cNvPr id="9" name="Text 6"/>
-          <p:cNvSpPr/>
-          <p:nvPr/>
-        </p:nvSpPr>
-        <p:spPr>
-          <a:xfrm>
-            <a:off x="502920" y="1764792"/>
-            <a:ext cx="1645920" cy="548640"/>
-          </a:xfrm>
-          <a:prstGeom prst="rect">
-            <a:avLst/>
-          </a:prstGeom>
-          <a:noFill/>
-          <a:ln/>
-        </p:spPr>
-        <p:txBody>
-          <a:bodyPr wrap="square" lIns="0" tIns="0" rIns="0" bIns="0" rtlCol="0" anchor="ctr"/>
-          <a:lstStyle/>
-          <a:p>
-            <a:pPr algn="ctr" indent="0" marL="0">
-              <a:lnSpc>
-                <a:spcPts val="1300"/>
-              </a:lnSpc>
-              <a:buNone/>
-            </a:pPr>
-            <a:r>
-              <a:rPr lang="en-US" sz="1150" b="1" dirty="0">
-                <a:solidFill>
-                  <a:srgbClr val="17231C"/>
-                </a:solidFill>
-                <a:latin typeface="Calibri" pitchFamily="34" charset="0"/>
-                <a:ea typeface="Calibri" pitchFamily="34" charset="-122"/>
-                <a:cs typeface="Calibri" pitchFamily="34" charset="-120"/>
-              </a:rPr>
-              <a:t>NITDA</a:t>
-            </a:r>
-            <a:endParaRPr lang="en-US" sz="1150" dirty="0"/>
-          </a:p>
-        </p:txBody>
-      </p:sp>
-      <p:sp>
-        <p:nvSpPr>
-          <p:cNvPr id="10" name="Shape 7"/>
-          <p:cNvSpPr/>
-          <p:nvPr/>
-        </p:nvSpPr>
-        <p:spPr>
-          <a:xfrm>
-            <a:off x="7178040" y="1051560"/>
-            <a:ext cx="658368" cy="658368"/>
-          </a:xfrm>
-          <a:prstGeom prst="ellipse">
-            <a:avLst/>
-          </a:prstGeom>
-          <a:solidFill>
-            <a:srgbClr val="146B47"/>
-          </a:solidFill>
-          <a:ln/>
-        </p:spPr>
-      </p:sp>
-      <p:pic>
-        <p:nvPicPr>
-          <p:cNvPr id="11" name="Image 1" descr="preencoded.png">    </p:cNvPr>
-          <p:cNvPicPr>
-            <a:picLocks noChangeAspect="1"/>
-          </p:cNvPicPr>
-          <p:nvPr/>
-        </p:nvPicPr>
-        <p:blipFill>
-          <a:blip r:embed="rId2"/>
-          <a:stretch>
-            <a:fillRect/>
-          </a:stretch>
-        </p:blipFill>
-        <p:spPr>
-          <a:xfrm>
-            <a:off x="7336048" y="1209568"/>
-            <a:ext cx="342351" cy="342351"/>
-          </a:xfrm>
-          <a:prstGeom prst="rect">
-            <a:avLst/>
-          </a:prstGeom>
-        </p:spPr>
-      </p:pic>
-      <p:sp>
-        <p:nvSpPr>
-          <p:cNvPr id="12" name="Text 8"/>
-          <p:cNvSpPr/>
-          <p:nvPr/>
-        </p:nvSpPr>
-        <p:spPr>
-          <a:xfrm>
-            <a:off x="6675120" y="1764792"/>
-            <a:ext cx="1645920" cy="548640"/>
-          </a:xfrm>
-          <a:prstGeom prst="rect">
-            <a:avLst/>
-          </a:prstGeom>
-          <a:noFill/>
-          <a:ln/>
-        </p:spPr>
-        <p:txBody>
-          <a:bodyPr wrap="square" lIns="0" tIns="0" rIns="0" bIns="0" rtlCol="0" anchor="ctr"/>
-          <a:lstStyle/>
-          <a:p>
-            <a:pPr algn="ctr" indent="0" marL="0">
-              <a:lnSpc>
-                <a:spcPts val="1300"/>
-              </a:lnSpc>
-              <a:buNone/>
-            </a:pPr>
-            <a:r>
-              <a:rPr lang="en-US" sz="1150" b="1" dirty="0">
-                <a:solidFill>
-                  <a:srgbClr val="17231C"/>
-                </a:solidFill>
-                <a:latin typeface="Calibri" pitchFamily="34" charset="0"/>
-                <a:ea typeface="Calibri" pitchFamily="34" charset="-122"/>
-                <a:cs typeface="Calibri" pitchFamily="34" charset="-120"/>
-              </a:rPr>
-              <a:t>ONSA</a:t>
-            </a:r>
-            <a:endParaRPr lang="en-US" sz="1150" dirty="0"/>
-          </a:p>
-        </p:txBody>
-      </p:sp>
-      <p:sp>
-        <p:nvSpPr>
-          <p:cNvPr id="13" name="Shape 9"/>
-          <p:cNvSpPr/>
-          <p:nvPr/>
-        </p:nvSpPr>
-        <p:spPr>
-          <a:xfrm>
-            <a:off x="1005840" y="4160520"/>
-            <a:ext cx="658368" cy="658368"/>
-          </a:xfrm>
-          <a:prstGeom prst="ellipse">
-            <a:avLst/>
-          </a:prstGeom>
-          <a:solidFill>
-            <a:srgbClr val="146B47"/>
-          </a:solidFill>
-          <a:ln/>
-        </p:spPr>
-      </p:sp>
-      <p:pic>
-        <p:nvPicPr>
-          <p:cNvPr id="14" name="Image 2" descr="preencoded.png">    </p:cNvPr>
-          <p:cNvPicPr>
-            <a:picLocks noChangeAspect="1"/>
-          </p:cNvPicPr>
-          <p:nvPr/>
-        </p:nvPicPr>
-        <p:blipFill>
-          <a:blip r:embed="rId3"/>
-          <a:stretch>
-            <a:fillRect/>
-          </a:stretch>
-        </p:blipFill>
-        <p:spPr>
-          <a:xfrm>
-            <a:off x="1163848" y="4318528"/>
-            <a:ext cx="342351" cy="342351"/>
-          </a:xfrm>
-          <a:prstGeom prst="rect">
-            <a:avLst/>
-          </a:prstGeom>
-        </p:spPr>
-      </p:pic>
-      <p:sp>
-        <p:nvSpPr>
-          <p:cNvPr id="15" name="Text 10"/>
-          <p:cNvSpPr/>
-          <p:nvPr/>
-        </p:nvSpPr>
-        <p:spPr>
-          <a:xfrm>
-            <a:off x="502920" y="4873752"/>
-            <a:ext cx="1645920" cy="548640"/>
-          </a:xfrm>
-          <a:prstGeom prst="rect">
-            <a:avLst/>
-          </a:prstGeom>
-          <a:noFill/>
-          <a:ln/>
-        </p:spPr>
-        <p:txBody>
-          <a:bodyPr wrap="square" lIns="0" tIns="0" rIns="0" bIns="0" rtlCol="0" anchor="ctr"/>
-          <a:lstStyle/>
-          <a:p>
-            <a:pPr algn="ctr" indent="0" marL="0">
-              <a:lnSpc>
-                <a:spcPts val="1300"/>
-              </a:lnSpc>
-              <a:buNone/>
-            </a:pPr>
-            <a:r>
-              <a:rPr lang="en-US" sz="1150" b="1" dirty="0">
-                <a:solidFill>
-                  <a:srgbClr val="17231C"/>
-                </a:solidFill>
-                <a:latin typeface="Calibri" pitchFamily="34" charset="0"/>
-                <a:ea typeface="Calibri" pitchFamily="34" charset="-122"/>
-                <a:cs typeface="Calibri" pitchFamily="34" charset="-120"/>
-              </a:rPr>
-              <a:t>7 Thematic Areas</a:t>
-            </a:r>
-            <a:endParaRPr lang="en-US" sz="1150" dirty="0"/>
-          </a:p>
-          <a:p>
-            <a:pPr algn="ctr" indent="0" marL="0">
-              <a:lnSpc>
-                <a:spcPts val="1300"/>
-              </a:lnSpc>
-              <a:buNone/>
-            </a:pPr>
-            <a:r>
-              <a:rPr lang="en-US" sz="1150" b="1" dirty="0">
-                <a:solidFill>
-                  <a:srgbClr val="17231C"/>
-                </a:solidFill>
-                <a:latin typeface="Calibri" pitchFamily="34" charset="0"/>
-                <a:ea typeface="Calibri" pitchFamily="34" charset="-122"/>
-                <a:cs typeface="Calibri" pitchFamily="34" charset="-120"/>
-              </a:rPr>
-              <a:t>(Action Plan)</a:t>
-            </a:r>
-            <a:endParaRPr lang="en-US" sz="1150" dirty="0"/>
-          </a:p>
-        </p:txBody>
-      </p:sp>
-      <p:sp>
-        <p:nvSpPr>
-          <p:cNvPr id="16" name="Shape 11"/>
-          <p:cNvSpPr/>
-          <p:nvPr/>
-        </p:nvSpPr>
-        <p:spPr>
-          <a:xfrm>
-            <a:off x="7178040" y="4160520"/>
-            <a:ext cx="658368" cy="658368"/>
-          </a:xfrm>
-          <a:prstGeom prst="ellipse">
-            <a:avLst/>
-          </a:prstGeom>
-          <a:solidFill>
-            <a:srgbClr val="146B47"/>
-          </a:solidFill>
-          <a:ln/>
-        </p:spPr>
-      </p:sp>
-      <p:pic>
-        <p:nvPicPr>
-          <p:cNvPr id="17" name="Image 3" descr="preencoded.png">    </p:cNvPr>
-          <p:cNvPicPr>
-            <a:picLocks noChangeAspect="1"/>
-          </p:cNvPicPr>
-          <p:nvPr/>
-        </p:nvPicPr>
-        <p:blipFill>
-          <a:blip r:embed="rId4"/>
-          <a:stretch>
-            <a:fillRect/>
-          </a:stretch>
-        </p:blipFill>
-        <p:spPr>
-          <a:xfrm>
-            <a:off x="7336048" y="4318528"/>
-            <a:ext cx="342351" cy="342351"/>
-          </a:xfrm>
-          <a:prstGeom prst="rect">
-            <a:avLst/>
-          </a:prstGeom>
-        </p:spPr>
-      </p:pic>
-      <p:sp>
-        <p:nvSpPr>
-          <p:cNvPr id="18" name="Text 12"/>
-          <p:cNvSpPr/>
-          <p:nvPr/>
-        </p:nvSpPr>
-        <p:spPr>
-          <a:xfrm>
-            <a:off x="6675120" y="4873752"/>
-            <a:ext cx="1645920" cy="548640"/>
-          </a:xfrm>
-          <a:prstGeom prst="rect">
-            <a:avLst/>
-          </a:prstGeom>
-          <a:noFill/>
-          <a:ln/>
-        </p:spPr>
-        <p:txBody>
-          <a:bodyPr wrap="square" lIns="0" tIns="0" rIns="0" bIns="0" rtlCol="0" anchor="ctr"/>
-          <a:lstStyle/>
-          <a:p>
-            <a:pPr algn="ctr" indent="0" marL="0">
-              <a:lnSpc>
-                <a:spcPts val="1300"/>
-              </a:lnSpc>
-              <a:buNone/>
-            </a:pPr>
-            <a:r>
-              <a:rPr lang="en-US" sz="1150" b="1" dirty="0">
-                <a:solidFill>
-                  <a:srgbClr val="17231C"/>
-                </a:solidFill>
-                <a:latin typeface="Calibri" pitchFamily="34" charset="0"/>
-                <a:ea typeface="Calibri" pitchFamily="34" charset="-122"/>
-                <a:cs typeface="Calibri" pitchFamily="34" charset="-120"/>
-              </a:rPr>
-              <a:t>Multi-agency</a:t>
-            </a:r>
-            <a:endParaRPr lang="en-US" sz="1150" dirty="0"/>
-          </a:p>
-          <a:p>
-            <a:pPr algn="ctr" indent="0" marL="0">
-              <a:lnSpc>
-                <a:spcPts val="1300"/>
-              </a:lnSpc>
-              <a:buNone/>
-            </a:pPr>
-            <a:r>
-              <a:rPr lang="en-US" sz="1150" b="1" dirty="0">
-                <a:solidFill>
-                  <a:srgbClr val="17231C"/>
-                </a:solidFill>
-                <a:latin typeface="Calibri" pitchFamily="34" charset="0"/>
-                <a:ea typeface="Calibri" pitchFamily="34" charset="-122"/>
-                <a:cs typeface="Calibri" pitchFamily="34" charset="-120"/>
-              </a:rPr>
-              <a:t>response</a:t>
-            </a:r>
-            <a:endParaRPr lang="en-US" sz="1150" dirty="0"/>
-          </a:p>
-        </p:txBody>
-      </p:sp>
-      <p:sp>
-        <p:nvSpPr>
-          <p:cNvPr id="19" name="Text 13"/>
-          <p:cNvSpPr/>
-          <p:nvPr/>
-        </p:nvSpPr>
-        <p:spPr>
-          <a:xfrm>
-            <a:off x="502920" y="5806440"/>
-            <a:ext cx="11185855" cy="822960"/>
-          </a:xfrm>
-          <a:prstGeom prst="rect">
-            <a:avLst/>
-          </a:prstGeom>
-          <a:noFill/>
-          <a:ln/>
-        </p:spPr>
-        <p:txBody>
-          <a:bodyPr wrap="square" lIns="0" tIns="0" rIns="0" bIns="0" rtlCol="0" anchor="t"/>
-          <a:lstStyle/>
-          <a:p>
-            <a:pPr indent="0" marL="0">
-              <a:buNone/>
-            </a:pPr>
-            <a:r>
-              <a:rPr lang="en-US" sz="1300" b="1" dirty="0">
-                <a:solidFill>
-                  <a:srgbClr val="0B5E34"/>
-                </a:solidFill>
-                <a:latin typeface="Calibri" pitchFamily="34" charset="0"/>
-                <a:ea typeface="Calibri" pitchFamily="34" charset="-122"/>
-                <a:cs typeface="Calibri" pitchFamily="34" charset="-120"/>
-              </a:rPr>
-              <a:t>No single agency can secure Nigeria’s cyberspace alone. </a:t>
-            </a:r>
-            <a:pPr indent="0" marL="0">
-              <a:buNone/>
-            </a:pPr>
-            <a:r>
-              <a:rPr lang="en-US" sz="1300" dirty="0">
-                <a:solidFill>
-                  <a:srgbClr val="17231C"/>
-                </a:solidFill>
-                <a:latin typeface="Calibri" pitchFamily="34" charset="0"/>
-                <a:ea typeface="Calibri" pitchFamily="34" charset="-122"/>
-                <a:cs typeface="Calibri" pitchFamily="34" charset="-120"/>
-              </a:rPr>
-              <a:t>The NCCC was unveiled at the 2025 National Cybersecurity Conference to drive coordinated, multi-agency response — alongside a push to end the culture of silence around disclosing cyberattacks.</a:t>
-            </a:r>
-            <a:endParaRPr lang="en-US" sz="1300" dirty="0"/>
-          </a:p>
-        </p:txBody>
-      </p:sp>
-      <p:sp>
-        <p:nvSpPr>
-          <p:cNvPr id="20" name="Text 14"/>
-          <p:cNvSpPr/>
-          <p:nvPr/>
-        </p:nvSpPr>
-        <p:spPr>
-          <a:xfrm>
-            <a:off x="11368735" y="6446520"/>
-            <a:ext cx="457200" cy="274320"/>
-          </a:xfrm>
-          <a:prstGeom prst="rect">
-            <a:avLst/>
-          </a:prstGeom>
-          <a:noFill/>
-          <a:ln/>
-        </p:spPr>
-        <p:txBody>
-          <a:bodyPr wrap="square" lIns="0" tIns="0" rIns="0" bIns="0" rtlCol="0" anchor="ctr"/>
-          <a:lstStyle/>
-          <a:p>
-            <a:pPr algn="r" indent="0" marL="0">
-              <a:buNone/>
-            </a:pPr>
-            <a:r>
-              <a:rPr lang="en-US" sz="1000" dirty="0">
-                <a:solidFill>
-                  <a:srgbClr val="5E6E66"/>
-                </a:solidFill>
-                <a:latin typeface="Calibri" pitchFamily="34" charset="0"/>
-                <a:ea typeface="Calibri" pitchFamily="34" charset="-122"/>
-                <a:cs typeface="Calibri" pitchFamily="34" charset="-120"/>
-              </a:rPr>
-              <a:t>12</a:t>
-            </a:r>
-            <a:endParaRPr lang="en-US" sz="1000" dirty="0"/>
-          </a:p>
-        </p:txBody>
-      </p:sp>
-      <p:sp>
-        <p:nvSpPr>
-          <p:cNvPr id="21" name="Text 15"/>
           <p:cNvSpPr/>
           <p:nvPr/>
         </p:nvSpPr>
@@ -5502,7 +5632,7 @@
                 <a:ea typeface="Calibri" pitchFamily="34" charset="-122"/>
                 <a:cs typeface="Calibri" pitchFamily="34" charset="-120"/>
               </a:rPr>
-              <a:t>THE BINDING CONSTRAINT</a:t>
+              <a:t>NATIONAL STRATEGY</a:t>
             </a:r>
             <a:endParaRPr lang="en-US" sz="1250" dirty="0"/>
           </a:p>
@@ -5541,184 +5671,184 @@
                 <a:ea typeface="Cambria" pitchFamily="34" charset="-122"/>
                 <a:cs typeface="Cambria" pitchFamily="34" charset="-120"/>
               </a:rPr>
-              <a:t>The talent gap</a:t>
+              <a:t>Coordinating a national response</a:t>
             </a:r>
             <a:endParaRPr lang="en-US" sz="3000" dirty="0"/>
           </a:p>
         </p:txBody>
       </p:sp>
-      <p:graphicFrame>
-        <p:nvGraphicFramePr>
-          <p:cNvPr id="4" name="Chart 0" descr=""/>
-          <p:cNvGraphicFramePr/>
-          <p:nvPr/>
-        </p:nvGraphicFramePr>
-        <p:xfrm>
-          <a:off x="502920" y="1691640"/>
-          <a:ext cx="5760720" cy="3931920"/>
-        </p:xfrm>
-        <a:graphic xmlns:a="http://schemas.openxmlformats.org/drawingml/2006/main">
-          <a:graphicData uri="http://schemas.openxmlformats.org/drawingml/2006/chart">
-            <c:chart xmlns:c="http://schemas.openxmlformats.org/drawingml/2006/chart" r:id="rId1"/>
-          </a:graphicData>
-        </a:graphic>
-      </p:graphicFrame>
-      <p:sp>
-        <p:nvSpPr>
-          <p:cNvPr id="5" name="Text 2"/>
-          <p:cNvSpPr/>
-          <p:nvPr/>
-        </p:nvSpPr>
-        <p:spPr>
-          <a:xfrm>
-            <a:off x="6903720" y="1737360"/>
-            <a:ext cx="4754880" cy="365760"/>
-          </a:xfrm>
-          <a:prstGeom prst="rect">
-            <a:avLst/>
-          </a:prstGeom>
-          <a:noFill/>
-          <a:ln/>
-        </p:spPr>
-        <p:txBody>
-          <a:bodyPr wrap="square" lIns="0" tIns="0" rIns="0" bIns="0" rtlCol="0" anchor="ctr"/>
-          <a:lstStyle/>
-          <a:p>
-            <a:pPr indent="0" marL="0">
-              <a:buNone/>
-            </a:pPr>
-            <a:r>
-              <a:rPr lang="en-US" sz="1800" b="1" dirty="0">
-                <a:solidFill>
-                  <a:srgbClr val="0B5E34"/>
+      <p:sp>
+        <p:nvSpPr>
+          <p:cNvPr id="4" name="Shape 2"/>
+          <p:cNvSpPr/>
+          <p:nvPr/>
+        </p:nvSpPr>
+        <p:spPr>
+          <a:xfrm>
+            <a:off x="4160520" y="2377440"/>
+            <a:ext cx="1920240" cy="1920240"/>
+          </a:xfrm>
+          <a:prstGeom prst="ellipse">
+            <a:avLst/>
+          </a:prstGeom>
+          <a:solidFill>
+            <a:srgbClr val="0B5E34"/>
+          </a:solidFill>
+          <a:ln/>
+          <a:effectLst>
+            <a:outerShdw sx="100000" sy="100000" kx="0" ky="0" algn="bl" rotWithShape="0" blurRad="101600" dist="38100" dir="5400000">
+              <a:srgbClr val="1B2B22">
+                <a:alpha val="20000"/>
+              </a:srgbClr>
+            </a:outerShdw>
+          </a:effectLst>
+        </p:spPr>
+      </p:sp>
+      <p:sp>
+        <p:nvSpPr>
+          <p:cNvPr id="5" name="Text 3"/>
+          <p:cNvSpPr/>
+          <p:nvPr/>
+        </p:nvSpPr>
+        <p:spPr>
+          <a:xfrm>
+            <a:off x="4160520" y="2880360"/>
+            <a:ext cx="1920240" cy="457200"/>
+          </a:xfrm>
+          <a:prstGeom prst="rect">
+            <a:avLst/>
+          </a:prstGeom>
+          <a:noFill/>
+          <a:ln/>
+        </p:spPr>
+        <p:txBody>
+          <a:bodyPr wrap="square" lIns="0" tIns="0" rIns="0" bIns="0" rtlCol="0" anchor="ctr"/>
+          <a:lstStyle/>
+          <a:p>
+            <a:pPr algn="ctr" indent="0" marL="0">
+              <a:buNone/>
+            </a:pPr>
+            <a:r>
+              <a:rPr lang="en-US" sz="2200" b="1" dirty="0">
+                <a:solidFill>
+                  <a:srgbClr val="FFFFFF"/>
                 </a:solidFill>
                 <a:latin typeface="Cambria" pitchFamily="34" charset="0"/>
                 <a:ea typeface="Cambria" pitchFamily="34" charset="-122"/>
                 <a:cs typeface="Cambria" pitchFamily="34" charset="-120"/>
               </a:rPr>
-              <a:t>90.6%</a:t>
-            </a:r>
-            <a:endParaRPr lang="en-US" sz="1800" dirty="0"/>
-          </a:p>
-        </p:txBody>
-      </p:sp>
-      <p:sp>
-        <p:nvSpPr>
-          <p:cNvPr id="6" name="Text 3"/>
-          <p:cNvSpPr/>
-          <p:nvPr/>
-        </p:nvSpPr>
-        <p:spPr>
-          <a:xfrm>
-            <a:off x="6903720" y="2103120"/>
-            <a:ext cx="4754880" cy="502920"/>
-          </a:xfrm>
-          <a:prstGeom prst="rect">
-            <a:avLst/>
-          </a:prstGeom>
-          <a:noFill/>
-          <a:ln/>
-        </p:spPr>
-        <p:txBody>
-          <a:bodyPr wrap="square" lIns="0" tIns="0" rIns="0" bIns="0" rtlCol="0" anchor="ctr"/>
-          <a:lstStyle/>
-          <a:p>
-            <a:pPr indent="0" marL="0">
-              <a:buNone/>
-            </a:pPr>
-            <a:r>
-              <a:rPr lang="en-US" sz="1150" dirty="0">
-                <a:solidFill>
-                  <a:srgbClr val="5E6E66"/>
+              <a:t>NCCC</a:t>
+            </a:r>
+            <a:endParaRPr lang="en-US" sz="2200" dirty="0"/>
+          </a:p>
+        </p:txBody>
+      </p:sp>
+      <p:sp>
+        <p:nvSpPr>
+          <p:cNvPr id="6" name="Text 4"/>
+          <p:cNvSpPr/>
+          <p:nvPr/>
+        </p:nvSpPr>
+        <p:spPr>
+          <a:xfrm>
+            <a:off x="4297680" y="3337560"/>
+            <a:ext cx="1645920" cy="822960"/>
+          </a:xfrm>
+          <a:prstGeom prst="rect">
+            <a:avLst/>
+          </a:prstGeom>
+          <a:noFill/>
+          <a:ln/>
+        </p:spPr>
+        <p:txBody>
+          <a:bodyPr wrap="square" lIns="0" tIns="0" rIns="0" bIns="0" rtlCol="0" anchor="ctr"/>
+          <a:lstStyle/>
+          <a:p>
+            <a:pPr algn="ctr" indent="0" marL="0">
+              <a:lnSpc>
+                <a:spcPts val="1200"/>
+              </a:lnSpc>
+              <a:buNone/>
+            </a:pPr>
+            <a:r>
+              <a:rPr lang="en-US" sz="1050" dirty="0">
+                <a:solidFill>
+                  <a:srgbClr val="D9EEE2"/>
                 </a:solidFill>
                 <a:latin typeface="Calibri" pitchFamily="34" charset="0"/>
                 <a:ea typeface="Calibri" pitchFamily="34" charset="-122"/>
                 <a:cs typeface="Calibri" pitchFamily="34" charset="-120"/>
               </a:rPr>
-              <a:t>workforce shortfall, per NITDA</a:t>
-            </a:r>
-            <a:endParaRPr lang="en-US" sz="1150" dirty="0"/>
-          </a:p>
-        </p:txBody>
-      </p:sp>
-      <p:sp>
-        <p:nvSpPr>
-          <p:cNvPr id="7" name="Text 4"/>
-          <p:cNvSpPr/>
-          <p:nvPr/>
-        </p:nvSpPr>
-        <p:spPr>
-          <a:xfrm>
-            <a:off x="6903720" y="2779776"/>
-            <a:ext cx="4754880" cy="365760"/>
-          </a:xfrm>
-          <a:prstGeom prst="rect">
-            <a:avLst/>
-          </a:prstGeom>
-          <a:noFill/>
-          <a:ln/>
-        </p:spPr>
-        <p:txBody>
-          <a:bodyPr wrap="square" lIns="0" tIns="0" rIns="0" bIns="0" rtlCol="0" anchor="ctr"/>
-          <a:lstStyle/>
-          <a:p>
-            <a:pPr indent="0" marL="0">
-              <a:buNone/>
-            </a:pPr>
-            <a:r>
-              <a:rPr lang="en-US" sz="1800" b="1" dirty="0">
-                <a:solidFill>
-                  <a:srgbClr val="0B5E34"/>
-                </a:solidFill>
-                <a:latin typeface="Cambria" pitchFamily="34" charset="0"/>
-                <a:ea typeface="Cambria" pitchFamily="34" charset="-122"/>
-                <a:cs typeface="Cambria" pitchFamily="34" charset="-120"/>
-              </a:rPr>
-              <a:t>1 : 8,000</a:t>
-            </a:r>
-            <a:endParaRPr lang="en-US" sz="1800" dirty="0"/>
-          </a:p>
-        </p:txBody>
-      </p:sp>
-      <p:sp>
-        <p:nvSpPr>
-          <p:cNvPr id="8" name="Text 5"/>
-          <p:cNvSpPr/>
-          <p:nvPr/>
-        </p:nvSpPr>
-        <p:spPr>
-          <a:xfrm>
-            <a:off x="6903720" y="3145536"/>
-            <a:ext cx="4754880" cy="502920"/>
-          </a:xfrm>
-          <a:prstGeom prst="rect">
-            <a:avLst/>
-          </a:prstGeom>
-          <a:noFill/>
-          <a:ln/>
-        </p:spPr>
-        <p:txBody>
-          <a:bodyPr wrap="square" lIns="0" tIns="0" rIns="0" bIns="0" rtlCol="0" anchor="ctr"/>
-          <a:lstStyle/>
-          <a:p>
-            <a:pPr indent="0" marL="0">
-              <a:buNone/>
-            </a:pPr>
-            <a:r>
-              <a:rPr lang="en-US" sz="1150" dirty="0">
-                <a:solidFill>
-                  <a:srgbClr val="5E6E66"/>
+              <a:t>National Cybersecurity</a:t>
+            </a:r>
+            <a:endParaRPr lang="en-US" sz="1050" dirty="0"/>
+          </a:p>
+          <a:p>
+            <a:pPr algn="ctr" indent="0" marL="0">
+              <a:lnSpc>
+                <a:spcPts val="1200"/>
+              </a:lnSpc>
+              <a:buNone/>
+            </a:pPr>
+            <a:r>
+              <a:rPr lang="en-US" sz="1050" dirty="0">
+                <a:solidFill>
+                  <a:srgbClr val="D9EEE2"/>
                 </a:solidFill>
                 <a:latin typeface="Calibri" pitchFamily="34" charset="0"/>
                 <a:ea typeface="Calibri" pitchFamily="34" charset="-122"/>
                 <a:cs typeface="Calibri" pitchFamily="34" charset="-120"/>
               </a:rPr>
-              <a:t>current expert-to-citizen ratio (benchmark is 1 : 800)</a:t>
-            </a:r>
-            <a:endParaRPr lang="en-US" sz="1150" dirty="0"/>
-          </a:p>
-        </p:txBody>
-      </p:sp>
+              <a:t>Coordination Centre</a:t>
+            </a:r>
+            <a:endParaRPr lang="en-US" sz="1050" dirty="0"/>
+          </a:p>
+        </p:txBody>
+      </p:sp>
+      <p:sp>
+        <p:nvSpPr>
+          <p:cNvPr id="7" name="Shape 5"/>
+          <p:cNvSpPr/>
+          <p:nvPr/>
+        </p:nvSpPr>
+        <p:spPr>
+          <a:xfrm>
+            <a:off x="1005840" y="1051560"/>
+            <a:ext cx="658368" cy="658368"/>
+          </a:xfrm>
+          <a:prstGeom prst="ellipse">
+            <a:avLst/>
+          </a:prstGeom>
+          <a:solidFill>
+            <a:srgbClr val="146B47"/>
+          </a:solidFill>
+          <a:ln/>
+        </p:spPr>
+      </p:sp>
+      <p:pic>
+        <p:nvPicPr>
+          <p:cNvPr id="8" name="Image 0" descr="preencoded.png">    </p:cNvPr>
+          <p:cNvPicPr>
+            <a:picLocks noChangeAspect="1"/>
+          </p:cNvPicPr>
+          <p:nvPr/>
+        </p:nvPicPr>
+        <p:blipFill>
+          <a:blip r:embed="rId1"/>
+          <a:stretch>
+            <a:fillRect/>
+          </a:stretch>
+        </p:blipFill>
+        <p:spPr>
+          <a:xfrm>
+            <a:off x="1163848" y="1209568"/>
+            <a:ext cx="342351" cy="342351"/>
+          </a:xfrm>
+          <a:prstGeom prst="rect">
+            <a:avLst/>
+          </a:prstGeom>
+        </p:spPr>
+      </p:pic>
       <p:sp>
         <p:nvSpPr>
           <p:cNvPr id="9" name="Text 6"/>
@@ -5727,71 +5857,35 @@
         </p:nvSpPr>
         <p:spPr>
           <a:xfrm>
-            <a:off x="6903720" y="3822192"/>
-            <a:ext cx="4754880" cy="365760"/>
-          </a:xfrm>
-          <a:prstGeom prst="rect">
-            <a:avLst/>
-          </a:prstGeom>
-          <a:noFill/>
-          <a:ln/>
-        </p:spPr>
-        <p:txBody>
-          <a:bodyPr wrap="square" lIns="0" tIns="0" rIns="0" bIns="0" rtlCol="0" anchor="ctr"/>
-          <a:lstStyle/>
-          <a:p>
-            <a:pPr indent="0" marL="0">
-              <a:buNone/>
-            </a:pPr>
-            <a:r>
-              <a:rPr lang="en-US" sz="1800" b="1" dirty="0">
-                <a:solidFill>
-                  <a:srgbClr val="0B5E34"/>
-                </a:solidFill>
-                <a:latin typeface="Cambria" pitchFamily="34" charset="0"/>
-                <a:ea typeface="Cambria" pitchFamily="34" charset="-122"/>
-                <a:cs typeface="Cambria" pitchFamily="34" charset="-120"/>
-              </a:rPr>
-              <a:t>3M by 2027</a:t>
-            </a:r>
-            <a:endParaRPr lang="en-US" sz="1800" dirty="0"/>
-          </a:p>
-        </p:txBody>
-      </p:sp>
-      <p:sp>
-        <p:nvSpPr>
-          <p:cNvPr id="10" name="Text 7"/>
-          <p:cNvSpPr/>
-          <p:nvPr/>
-        </p:nvSpPr>
-        <p:spPr>
-          <a:xfrm>
-            <a:off x="6903720" y="4187952"/>
-            <a:ext cx="4754880" cy="502920"/>
-          </a:xfrm>
-          <a:prstGeom prst="rect">
-            <a:avLst/>
-          </a:prstGeom>
-          <a:noFill/>
-          <a:ln/>
-        </p:spPr>
-        <p:txBody>
-          <a:bodyPr wrap="square" lIns="0" tIns="0" rIns="0" bIns="0" rtlCol="0" anchor="ctr"/>
-          <a:lstStyle/>
-          <a:p>
-            <a:pPr indent="0" marL="0">
-              <a:buNone/>
-            </a:pPr>
-            <a:r>
-              <a:rPr lang="en-US" sz="1150" dirty="0">
-                <a:solidFill>
-                  <a:srgbClr val="5E6E66"/>
+            <a:off x="502920" y="1764792"/>
+            <a:ext cx="1645920" cy="548640"/>
+          </a:xfrm>
+          <a:prstGeom prst="rect">
+            <a:avLst/>
+          </a:prstGeom>
+          <a:noFill/>
+          <a:ln/>
+        </p:spPr>
+        <p:txBody>
+          <a:bodyPr wrap="square" lIns="0" tIns="0" rIns="0" bIns="0" rtlCol="0" anchor="ctr"/>
+          <a:lstStyle/>
+          <a:p>
+            <a:pPr algn="ctr" indent="0" marL="0">
+              <a:lnSpc>
+                <a:spcPts val="1300"/>
+              </a:lnSpc>
+              <a:buNone/>
+            </a:pPr>
+            <a:r>
+              <a:rPr lang="en-US" sz="1150" b="1" dirty="0">
+                <a:solidFill>
+                  <a:srgbClr val="17231C"/>
                 </a:solidFill>
                 <a:latin typeface="Calibri" pitchFamily="34" charset="0"/>
                 <a:ea typeface="Calibri" pitchFamily="34" charset="-122"/>
                 <a:cs typeface="Calibri" pitchFamily="34" charset="-120"/>
               </a:rPr>
-              <a:t>government’s 3MTT programme target for trained digital professionals</a:t>
+              <a:t>NITDA</a:t>
             </a:r>
             <a:endParaRPr lang="en-US" sz="1150" dirty="0"/>
           </a:p>
@@ -5799,77 +5893,85 @@
       </p:sp>
       <p:sp>
         <p:nvSpPr>
-          <p:cNvPr id="11" name="Text 8"/>
-          <p:cNvSpPr/>
-          <p:nvPr/>
-        </p:nvSpPr>
-        <p:spPr>
-          <a:xfrm>
-            <a:off x="6903720" y="4864608"/>
-            <a:ext cx="4754880" cy="365760"/>
-          </a:xfrm>
-          <a:prstGeom prst="rect">
-            <a:avLst/>
-          </a:prstGeom>
-          <a:noFill/>
-          <a:ln/>
-        </p:spPr>
-        <p:txBody>
-          <a:bodyPr wrap="square" lIns="0" tIns="0" rIns="0" bIns="0" rtlCol="0" anchor="ctr"/>
-          <a:lstStyle/>
-          <a:p>
-            <a:pPr indent="0" marL="0">
-              <a:buNone/>
-            </a:pPr>
-            <a:r>
-              <a:rPr lang="en-US" sz="1800" b="1" dirty="0">
-                <a:solidFill>
-                  <a:srgbClr val="0B5E34"/>
-                </a:solidFill>
-                <a:latin typeface="Cambria" pitchFamily="34" charset="0"/>
-                <a:ea typeface="Cambria" pitchFamily="34" charset="-122"/>
-                <a:cs typeface="Cambria" pitchFamily="34" charset="-120"/>
-              </a:rPr>
-              <a:t>$254M → $415M</a:t>
-            </a:r>
-            <a:endParaRPr lang="en-US" sz="1800" dirty="0"/>
-          </a:p>
-        </p:txBody>
-      </p:sp>
-      <p:sp>
-        <p:nvSpPr>
-          <p:cNvPr id="12" name="Text 9"/>
-          <p:cNvSpPr/>
-          <p:nvPr/>
-        </p:nvSpPr>
-        <p:spPr>
-          <a:xfrm>
-            <a:off x="6903720" y="5230368"/>
-            <a:ext cx="4754880" cy="502920"/>
-          </a:xfrm>
-          <a:prstGeom prst="rect">
-            <a:avLst/>
-          </a:prstGeom>
-          <a:noFill/>
-          <a:ln/>
-        </p:spPr>
-        <p:txBody>
-          <a:bodyPr wrap="square" lIns="0" tIns="0" rIns="0" bIns="0" rtlCol="0" anchor="ctr"/>
-          <a:lstStyle/>
-          <a:p>
-            <a:pPr indent="0" marL="0">
-              <a:buNone/>
-            </a:pPr>
-            <a:r>
-              <a:rPr lang="en-US" sz="1150" dirty="0">
-                <a:solidFill>
-                  <a:srgbClr val="5E6E66"/>
+          <p:cNvPr id="10" name="Shape 7"/>
+          <p:cNvSpPr/>
+          <p:nvPr/>
+        </p:nvSpPr>
+        <p:spPr>
+          <a:xfrm>
+            <a:off x="7178040" y="1051560"/>
+            <a:ext cx="658368" cy="658368"/>
+          </a:xfrm>
+          <a:prstGeom prst="ellipse">
+            <a:avLst/>
+          </a:prstGeom>
+          <a:solidFill>
+            <a:srgbClr val="146B47"/>
+          </a:solidFill>
+          <a:ln/>
+        </p:spPr>
+      </p:sp>
+      <p:pic>
+        <p:nvPicPr>
+          <p:cNvPr id="11" name="Image 1" descr="preencoded.png">    </p:cNvPr>
+          <p:cNvPicPr>
+            <a:picLocks noChangeAspect="1"/>
+          </p:cNvPicPr>
+          <p:nvPr/>
+        </p:nvPicPr>
+        <p:blipFill>
+          <a:blip r:embed="rId2"/>
+          <a:stretch>
+            <a:fillRect/>
+          </a:stretch>
+        </p:blipFill>
+        <p:spPr>
+          <a:xfrm>
+            <a:off x="7336048" y="1209568"/>
+            <a:ext cx="342351" cy="342351"/>
+          </a:xfrm>
+          <a:prstGeom prst="rect">
+            <a:avLst/>
+          </a:prstGeom>
+        </p:spPr>
+      </p:pic>
+      <p:sp>
+        <p:nvSpPr>
+          <p:cNvPr id="12" name="Text 8"/>
+          <p:cNvSpPr/>
+          <p:nvPr/>
+        </p:nvSpPr>
+        <p:spPr>
+          <a:xfrm>
+            <a:off x="6675120" y="1764792"/>
+            <a:ext cx="1645920" cy="548640"/>
+          </a:xfrm>
+          <a:prstGeom prst="rect">
+            <a:avLst/>
+          </a:prstGeom>
+          <a:noFill/>
+          <a:ln/>
+        </p:spPr>
+        <p:txBody>
+          <a:bodyPr wrap="square" lIns="0" tIns="0" rIns="0" bIns="0" rtlCol="0" anchor="ctr"/>
+          <a:lstStyle/>
+          <a:p>
+            <a:pPr algn="ctr" indent="0" marL="0">
+              <a:lnSpc>
+                <a:spcPts val="1300"/>
+              </a:lnSpc>
+              <a:buNone/>
+            </a:pPr>
+            <a:r>
+              <a:rPr lang="en-US" sz="1150" b="1" dirty="0">
+                <a:solidFill>
+                  <a:srgbClr val="17231C"/>
                 </a:solidFill>
                 <a:latin typeface="Calibri" pitchFamily="34" charset="0"/>
                 <a:ea typeface="Calibri" pitchFamily="34" charset="-122"/>
                 <a:cs typeface="Calibri" pitchFamily="34" charset="-120"/>
               </a:rPr>
-              <a:t>Nigeria’s cybersecurity market, 2026–2031 (~10.3% CAGR)</a:t>
+              <a:t>ONSA</a:t>
             </a:r>
             <a:endParaRPr lang="en-US" sz="1150" dirty="0"/>
           </a:p>
@@ -5877,37 +5979,302 @@
       </p:sp>
       <p:sp>
         <p:nvSpPr>
-          <p:cNvPr id="13" name="Text 10"/>
-          <p:cNvSpPr/>
-          <p:nvPr/>
-        </p:nvSpPr>
-        <p:spPr>
-          <a:xfrm>
-            <a:off x="11368735" y="6446520"/>
-            <a:ext cx="457200" cy="274320"/>
-          </a:xfrm>
-          <a:prstGeom prst="rect">
-            <a:avLst/>
-          </a:prstGeom>
-          <a:noFill/>
-          <a:ln/>
-        </p:spPr>
-        <p:txBody>
-          <a:bodyPr wrap="square" lIns="0" tIns="0" rIns="0" bIns="0" rtlCol="0" anchor="ctr"/>
-          <a:lstStyle/>
-          <a:p>
-            <a:pPr algn="r" indent="0" marL="0">
-              <a:buNone/>
-            </a:pPr>
-            <a:r>
-              <a:rPr lang="en-US" sz="1000" dirty="0">
-                <a:solidFill>
-                  <a:srgbClr val="5E6E66"/>
+          <p:cNvPr id="13" name="Shape 9"/>
+          <p:cNvSpPr/>
+          <p:nvPr/>
+        </p:nvSpPr>
+        <p:spPr>
+          <a:xfrm>
+            <a:off x="1005840" y="4160520"/>
+            <a:ext cx="658368" cy="658368"/>
+          </a:xfrm>
+          <a:prstGeom prst="ellipse">
+            <a:avLst/>
+          </a:prstGeom>
+          <a:solidFill>
+            <a:srgbClr val="146B47"/>
+          </a:solidFill>
+          <a:ln/>
+        </p:spPr>
+      </p:sp>
+      <p:pic>
+        <p:nvPicPr>
+          <p:cNvPr id="14" name="Image 2" descr="preencoded.png">    </p:cNvPr>
+          <p:cNvPicPr>
+            <a:picLocks noChangeAspect="1"/>
+          </p:cNvPicPr>
+          <p:nvPr/>
+        </p:nvPicPr>
+        <p:blipFill>
+          <a:blip r:embed="rId3"/>
+          <a:stretch>
+            <a:fillRect/>
+          </a:stretch>
+        </p:blipFill>
+        <p:spPr>
+          <a:xfrm>
+            <a:off x="1163848" y="4318528"/>
+            <a:ext cx="342351" cy="342351"/>
+          </a:xfrm>
+          <a:prstGeom prst="rect">
+            <a:avLst/>
+          </a:prstGeom>
+        </p:spPr>
+      </p:pic>
+      <p:sp>
+        <p:nvSpPr>
+          <p:cNvPr id="15" name="Text 10"/>
+          <p:cNvSpPr/>
+          <p:nvPr/>
+        </p:nvSpPr>
+        <p:spPr>
+          <a:xfrm>
+            <a:off x="502920" y="4873752"/>
+            <a:ext cx="1645920" cy="548640"/>
+          </a:xfrm>
+          <a:prstGeom prst="rect">
+            <a:avLst/>
+          </a:prstGeom>
+          <a:noFill/>
+          <a:ln/>
+        </p:spPr>
+        <p:txBody>
+          <a:bodyPr wrap="square" lIns="0" tIns="0" rIns="0" bIns="0" rtlCol="0" anchor="ctr"/>
+          <a:lstStyle/>
+          <a:p>
+            <a:pPr algn="ctr" indent="0" marL="0">
+              <a:lnSpc>
+                <a:spcPts val="1300"/>
+              </a:lnSpc>
+              <a:buNone/>
+            </a:pPr>
+            <a:r>
+              <a:rPr lang="en-US" sz="1150" b="1" dirty="0">
+                <a:solidFill>
+                  <a:srgbClr val="17231C"/>
                 </a:solidFill>
                 <a:latin typeface="Calibri" pitchFamily="34" charset="0"/>
                 <a:ea typeface="Calibri" pitchFamily="34" charset="-122"/>
                 <a:cs typeface="Calibri" pitchFamily="34" charset="-120"/>
               </a:rPr>
+              <a:t>7 Thematic Areas</a:t>
+            </a:r>
+            <a:endParaRPr lang="en-US" sz="1150" dirty="0"/>
+          </a:p>
+          <a:p>
+            <a:pPr algn="ctr" indent="0" marL="0">
+              <a:lnSpc>
+                <a:spcPts val="1300"/>
+              </a:lnSpc>
+              <a:buNone/>
+            </a:pPr>
+            <a:r>
+              <a:rPr lang="en-US" sz="1150" b="1" dirty="0">
+                <a:solidFill>
+                  <a:srgbClr val="17231C"/>
+                </a:solidFill>
+                <a:latin typeface="Calibri" pitchFamily="34" charset="0"/>
+                <a:ea typeface="Calibri" pitchFamily="34" charset="-122"/>
+                <a:cs typeface="Calibri" pitchFamily="34" charset="-120"/>
+              </a:rPr>
+              <a:t>(Action Plan)</a:t>
+            </a:r>
+            <a:endParaRPr lang="en-US" sz="1150" dirty="0"/>
+          </a:p>
+        </p:txBody>
+      </p:sp>
+      <p:sp>
+        <p:nvSpPr>
+          <p:cNvPr id="16" name="Shape 11"/>
+          <p:cNvSpPr/>
+          <p:nvPr/>
+        </p:nvSpPr>
+        <p:spPr>
+          <a:xfrm>
+            <a:off x="7178040" y="4160520"/>
+            <a:ext cx="658368" cy="658368"/>
+          </a:xfrm>
+          <a:prstGeom prst="ellipse">
+            <a:avLst/>
+          </a:prstGeom>
+          <a:solidFill>
+            <a:srgbClr val="146B47"/>
+          </a:solidFill>
+          <a:ln/>
+        </p:spPr>
+      </p:sp>
+      <p:pic>
+        <p:nvPicPr>
+          <p:cNvPr id="17" name="Image 3" descr="preencoded.png">    </p:cNvPr>
+          <p:cNvPicPr>
+            <a:picLocks noChangeAspect="1"/>
+          </p:cNvPicPr>
+          <p:nvPr/>
+        </p:nvPicPr>
+        <p:blipFill>
+          <a:blip r:embed="rId4"/>
+          <a:stretch>
+            <a:fillRect/>
+          </a:stretch>
+        </p:blipFill>
+        <p:spPr>
+          <a:xfrm>
+            <a:off x="7336048" y="4318528"/>
+            <a:ext cx="342351" cy="342351"/>
+          </a:xfrm>
+          <a:prstGeom prst="rect">
+            <a:avLst/>
+          </a:prstGeom>
+        </p:spPr>
+      </p:pic>
+      <p:sp>
+        <p:nvSpPr>
+          <p:cNvPr id="18" name="Text 12"/>
+          <p:cNvSpPr/>
+          <p:nvPr/>
+        </p:nvSpPr>
+        <p:spPr>
+          <a:xfrm>
+            <a:off x="6675120" y="4873752"/>
+            <a:ext cx="1645920" cy="548640"/>
+          </a:xfrm>
+          <a:prstGeom prst="rect">
+            <a:avLst/>
+          </a:prstGeom>
+          <a:noFill/>
+          <a:ln/>
+        </p:spPr>
+        <p:txBody>
+          <a:bodyPr wrap="square" lIns="0" tIns="0" rIns="0" bIns="0" rtlCol="0" anchor="ctr"/>
+          <a:lstStyle/>
+          <a:p>
+            <a:pPr algn="ctr" indent="0" marL="0">
+              <a:lnSpc>
+                <a:spcPts val="1300"/>
+              </a:lnSpc>
+              <a:buNone/>
+            </a:pPr>
+            <a:r>
+              <a:rPr lang="en-US" sz="1150" b="1" dirty="0">
+                <a:solidFill>
+                  <a:srgbClr val="17231C"/>
+                </a:solidFill>
+                <a:latin typeface="Calibri" pitchFamily="34" charset="0"/>
+                <a:ea typeface="Calibri" pitchFamily="34" charset="-122"/>
+                <a:cs typeface="Calibri" pitchFamily="34" charset="-120"/>
+              </a:rPr>
+              <a:t>Multi-agency</a:t>
+            </a:r>
+            <a:endParaRPr lang="en-US" sz="1150" dirty="0"/>
+          </a:p>
+          <a:p>
+            <a:pPr algn="ctr" indent="0" marL="0">
+              <a:lnSpc>
+                <a:spcPts val="1300"/>
+              </a:lnSpc>
+              <a:buNone/>
+            </a:pPr>
+            <a:r>
+              <a:rPr lang="en-US" sz="1150" b="1" dirty="0">
+                <a:solidFill>
+                  <a:srgbClr val="17231C"/>
+                </a:solidFill>
+                <a:latin typeface="Calibri" pitchFamily="34" charset="0"/>
+                <a:ea typeface="Calibri" pitchFamily="34" charset="-122"/>
+                <a:cs typeface="Calibri" pitchFamily="34" charset="-120"/>
+              </a:rPr>
+              <a:t>response</a:t>
+            </a:r>
+            <a:endParaRPr lang="en-US" sz="1150" dirty="0"/>
+          </a:p>
+        </p:txBody>
+      </p:sp>
+      <p:sp>
+        <p:nvSpPr>
+          <p:cNvPr id="19" name="Text 13"/>
+          <p:cNvSpPr/>
+          <p:nvPr/>
+        </p:nvSpPr>
+        <p:spPr>
+          <a:xfrm>
+            <a:off x="502920" y="5806440"/>
+            <a:ext cx="11185855" cy="822960"/>
+          </a:xfrm>
+          <a:prstGeom prst="rect">
+            <a:avLst/>
+          </a:prstGeom>
+          <a:noFill/>
+          <a:ln/>
+        </p:spPr>
+        <p:txBody>
+          <a:bodyPr wrap="square" lIns="0" tIns="0" rIns="0" bIns="0" rtlCol="0" anchor="t"/>
+          <a:lstStyle/>
+          <a:p>
+            <a:pPr indent="0" marL="0">
+              <a:buNone/>
+            </a:pPr>
+            <a:r>
+              <a:rPr lang="en-US" sz="1300" b="1" dirty="0">
+                <a:solidFill>
+                  <a:srgbClr val="0B5E34"/>
+                </a:solidFill>
+                <a:latin typeface="Calibri" pitchFamily="34" charset="0"/>
+                <a:ea typeface="Calibri" pitchFamily="34" charset="-122"/>
+                <a:cs typeface="Calibri" pitchFamily="34" charset="-120"/>
+              </a:rPr>
+              <a:t>No single agency can secure Nigeria’s cyberspace alone. </a:t>
+            </a:r>
+            <a:pPr indent="0" marL="0">
+              <a:buNone/>
+            </a:pPr>
+            <a:r>
+              <a:rPr lang="en-US" sz="1300" dirty="0">
+                <a:solidFill>
+                  <a:srgbClr val="17231C"/>
+                </a:solidFill>
+                <a:latin typeface="Calibri" pitchFamily="34" charset="0"/>
+                <a:ea typeface="Calibri" pitchFamily="34" charset="-122"/>
+                <a:cs typeface="Calibri" pitchFamily="34" charset="-120"/>
+              </a:rPr>
+              <a:t>The NCCC was unveiled at the 2025 National Cybersecurity Conference to drive coordinated, multi-agency response — alongside a push to end the culture of silence around disclosing cyberattacks.</a:t>
+            </a:r>
+            <a:endParaRPr lang="en-US" sz="1300" dirty="0"/>
+          </a:p>
+        </p:txBody>
+      </p:sp>
+      <p:sp>
+        <p:nvSpPr>
+          <p:cNvPr id="20" name="Text 14"/>
+          <p:cNvSpPr/>
+          <p:nvPr/>
+        </p:nvSpPr>
+        <p:spPr>
+          <a:xfrm>
+            <a:off x="11368735" y="6446520"/>
+            <a:ext cx="457200" cy="274320"/>
+          </a:xfrm>
+          <a:prstGeom prst="rect">
+            <a:avLst/>
+          </a:prstGeom>
+          <a:noFill/>
+          <a:ln/>
+        </p:spPr>
+        <p:txBody>
+          <a:bodyPr wrap="square" lIns="0" tIns="0" rIns="0" bIns="0" rtlCol="0" anchor="ctr"/>
+          <a:lstStyle/>
+          <a:p>
+            <a:pPr algn="r" indent="0" marL="0">
+              <a:buNone/>
+            </a:pPr>
+            <a:r>
+              <a:rPr lang="en-US" sz="1000" dirty="0">
+                <a:solidFill>
+                  <a:srgbClr val="5E6E66"/>
+                </a:solidFill>
+                <a:latin typeface="Calibri" pitchFamily="34" charset="0"/>
+                <a:ea typeface="Calibri" pitchFamily="34" charset="-122"/>
+                <a:cs typeface="Calibri" pitchFamily="34" charset="-120"/>
+              </a:rPr>
               <a:t>13</a:t>
             </a:r>
             <a:endParaRPr lang="en-US" sz="1000" dirty="0"/>
@@ -5916,7 +6283,7 @@
       </p:sp>
       <p:sp>
         <p:nvSpPr>
-          <p:cNvPr id="14" name="Text 11"/>
+          <p:cNvPr id="21" name="Text 15"/>
           <p:cNvSpPr/>
           <p:nvPr/>
         </p:nvSpPr>
@@ -5967,7 +6334,7 @@
     <p:bg>
       <p:bgPr>
         <a:solidFill>
-          <a:srgbClr val="073821"/>
+          <a:srgbClr val="FFFFFF"/>
         </a:solidFill>
       </p:bgPr>
     </p:bg>
@@ -6012,13 +6379,13 @@
             <a:r>
               <a:rPr lang="en-US" sz="1250" b="1" spc="200" kern="0" dirty="0">
                 <a:solidFill>
-                  <a:srgbClr val="E8A93A"/>
+                  <a:srgbClr val="0B5E34"/>
                 </a:solidFill>
                 <a:latin typeface="Calibri" pitchFamily="34" charset="0"/>
                 <a:ea typeface="Calibri" pitchFamily="34" charset="-122"/>
                 <a:cs typeface="Calibri" pitchFamily="34" charset="-120"/>
               </a:rPr>
-              <a:t>SYNTHESIS</a:t>
+              <a:t>THE BINDING CONSTRAINT</a:t>
             </a:r>
             <a:endParaRPr lang="en-US" sz="1250" dirty="0"/>
           </a:p>
@@ -6051,72 +6418,68 @@
             <a:r>
               <a:rPr lang="en-US" sz="3000" b="1" dirty="0">
                 <a:solidFill>
-                  <a:srgbClr val="FFFFFF"/>
+                  <a:srgbClr val="17231C"/>
                 </a:solidFill>
                 <a:latin typeface="Cambria" pitchFamily="34" charset="0"/>
                 <a:ea typeface="Cambria" pitchFamily="34" charset="-122"/>
                 <a:cs typeface="Cambria" pitchFamily="34" charset="-120"/>
               </a:rPr>
-              <a:t>Key takeaways</a:t>
+              <a:t>The talent gap</a:t>
             </a:r>
             <a:endParaRPr lang="en-US" sz="3000" dirty="0"/>
           </a:p>
         </p:txBody>
       </p:sp>
-      <p:sp>
-        <p:nvSpPr>
-          <p:cNvPr id="4" name="Shape 2"/>
-          <p:cNvSpPr/>
-          <p:nvPr/>
-        </p:nvSpPr>
-        <p:spPr>
-          <a:xfrm>
-            <a:off x="502920" y="1764792"/>
-            <a:ext cx="457200" cy="457200"/>
-          </a:xfrm>
-          <a:prstGeom prst="ellipse">
-            <a:avLst/>
-          </a:prstGeom>
-          <a:solidFill>
-            <a:srgbClr val="E8A93A"/>
-          </a:solidFill>
-          <a:ln/>
-        </p:spPr>
-      </p:sp>
-      <p:sp>
-        <p:nvSpPr>
-          <p:cNvPr id="5" name="Text 3"/>
-          <p:cNvSpPr/>
-          <p:nvPr/>
-        </p:nvSpPr>
-        <p:spPr>
-          <a:xfrm>
-            <a:off x="502920" y="1764792"/>
-            <a:ext cx="457200" cy="457200"/>
-          </a:xfrm>
-          <a:prstGeom prst="rect">
-            <a:avLst/>
-          </a:prstGeom>
-          <a:noFill/>
-          <a:ln/>
-        </p:spPr>
-        <p:txBody>
-          <a:bodyPr wrap="square" lIns="0" tIns="0" rIns="0" bIns="0" rtlCol="0" anchor="ctr"/>
-          <a:lstStyle/>
-          <a:p>
-            <a:pPr algn="ctr" indent="0" marL="0">
+      <p:graphicFrame>
+        <p:nvGraphicFramePr>
+          <p:cNvPr id="4" name="Chart 0" descr=""/>
+          <p:cNvGraphicFramePr/>
+          <p:nvPr/>
+        </p:nvGraphicFramePr>
+        <p:xfrm>
+          <a:off x="502920" y="1691640"/>
+          <a:ext cx="5760720" cy="3931920"/>
+        </p:xfrm>
+        <a:graphic xmlns:a="http://schemas.openxmlformats.org/drawingml/2006/main">
+          <a:graphicData uri="http://schemas.openxmlformats.org/drawingml/2006/chart">
+            <c:chart xmlns:c="http://schemas.openxmlformats.org/drawingml/2006/chart" r:id="rId1"/>
+          </a:graphicData>
+        </a:graphic>
+      </p:graphicFrame>
+      <p:sp>
+        <p:nvSpPr>
+          <p:cNvPr id="5" name="Text 2"/>
+          <p:cNvSpPr/>
+          <p:nvPr/>
+        </p:nvSpPr>
+        <p:spPr>
+          <a:xfrm>
+            <a:off x="6903720" y="1737360"/>
+            <a:ext cx="4754880" cy="365760"/>
+          </a:xfrm>
+          <a:prstGeom prst="rect">
+            <a:avLst/>
+          </a:prstGeom>
+          <a:noFill/>
+          <a:ln/>
+        </p:spPr>
+        <p:txBody>
+          <a:bodyPr wrap="square" lIns="0" tIns="0" rIns="0" bIns="0" rtlCol="0" anchor="ctr"/>
+          <a:lstStyle/>
+          <a:p>
+            <a:pPr indent="0" marL="0">
               <a:buNone/>
             </a:pPr>
             <a:r>
               <a:rPr lang="en-US" sz="1800" b="1" dirty="0">
                 <a:solidFill>
-                  <a:srgbClr val="073821"/>
+                  <a:srgbClr val="0B5E34"/>
                 </a:solidFill>
                 <a:latin typeface="Cambria" pitchFamily="34" charset="0"/>
                 <a:ea typeface="Cambria" pitchFamily="34" charset="-122"/>
                 <a:cs typeface="Cambria" pitchFamily="34" charset="-120"/>
               </a:rPr>
-              <a:t>1</a:t>
+              <a:t>90.6%</a:t>
             </a:r>
             <a:endParaRPr lang="en-US" sz="1800" dirty="0"/>
           </a:p>
@@ -6124,14 +6487,14 @@
       </p:sp>
       <p:sp>
         <p:nvSpPr>
-          <p:cNvPr id="6" name="Text 4"/>
-          <p:cNvSpPr/>
-          <p:nvPr/>
-        </p:nvSpPr>
-        <p:spPr>
-          <a:xfrm>
-            <a:off x="1188720" y="1737360"/>
-            <a:ext cx="10500055" cy="749808"/>
+          <p:cNvPr id="6" name="Text 3"/>
+          <p:cNvSpPr/>
+          <p:nvPr/>
+        </p:nvSpPr>
+        <p:spPr>
+          <a:xfrm>
+            <a:off x="6903720" y="2103120"/>
+            <a:ext cx="4754880" cy="502920"/>
           </a:xfrm>
           <a:prstGeom prst="rect">
             <a:avLst/>
@@ -6147,74 +6510,54 @@
               <a:buNone/>
             </a:pPr>
             <a:r>
-              <a:rPr lang="en-US" sz="1500" dirty="0">
-                <a:solidFill>
-                  <a:srgbClr val="F0F6F2"/>
+              <a:rPr lang="en-US" sz="1150" dirty="0">
+                <a:solidFill>
+                  <a:srgbClr val="5E6E66"/>
                 </a:solidFill>
                 <a:latin typeface="Calibri" pitchFamily="34" charset="0"/>
                 <a:ea typeface="Calibri" pitchFamily="34" charset="-122"/>
                 <a:cs typeface="Calibri" pitchFamily="34" charset="-120"/>
               </a:rPr>
-              <a:t>Attacks are more frequent, more automated (AI-assisted), and increasingly identity-focused.</a:t>
-            </a:r>
-            <a:endParaRPr lang="en-US" sz="1500" dirty="0"/>
-          </a:p>
-        </p:txBody>
-      </p:sp>
-      <p:sp>
-        <p:nvSpPr>
-          <p:cNvPr id="7" name="Shape 5"/>
-          <p:cNvSpPr/>
-          <p:nvPr/>
-        </p:nvSpPr>
-        <p:spPr>
-          <a:xfrm>
-            <a:off x="502920" y="2606040"/>
-            <a:ext cx="457200" cy="457200"/>
-          </a:xfrm>
-          <a:prstGeom prst="ellipse">
-            <a:avLst/>
-          </a:prstGeom>
-          <a:solidFill>
-            <a:srgbClr val="E8A93A"/>
-          </a:solidFill>
-          <a:ln/>
-        </p:spPr>
-      </p:sp>
-      <p:sp>
-        <p:nvSpPr>
-          <p:cNvPr id="8" name="Text 6"/>
-          <p:cNvSpPr/>
-          <p:nvPr/>
-        </p:nvSpPr>
-        <p:spPr>
-          <a:xfrm>
-            <a:off x="502920" y="2606040"/>
-            <a:ext cx="457200" cy="457200"/>
-          </a:xfrm>
-          <a:prstGeom prst="rect">
-            <a:avLst/>
-          </a:prstGeom>
-          <a:noFill/>
-          <a:ln/>
-        </p:spPr>
-        <p:txBody>
-          <a:bodyPr wrap="square" lIns="0" tIns="0" rIns="0" bIns="0" rtlCol="0" anchor="ctr"/>
-          <a:lstStyle/>
-          <a:p>
-            <a:pPr algn="ctr" indent="0" marL="0">
+              <a:t>workforce shortfall, per NITDA</a:t>
+            </a:r>
+            <a:endParaRPr lang="en-US" sz="1150" dirty="0"/>
+          </a:p>
+        </p:txBody>
+      </p:sp>
+      <p:sp>
+        <p:nvSpPr>
+          <p:cNvPr id="7" name="Text 4"/>
+          <p:cNvSpPr/>
+          <p:nvPr/>
+        </p:nvSpPr>
+        <p:spPr>
+          <a:xfrm>
+            <a:off x="6903720" y="2779776"/>
+            <a:ext cx="4754880" cy="365760"/>
+          </a:xfrm>
+          <a:prstGeom prst="rect">
+            <a:avLst/>
+          </a:prstGeom>
+          <a:noFill/>
+          <a:ln/>
+        </p:spPr>
+        <p:txBody>
+          <a:bodyPr wrap="square" lIns="0" tIns="0" rIns="0" bIns="0" rtlCol="0" anchor="ctr"/>
+          <a:lstStyle/>
+          <a:p>
+            <a:pPr indent="0" marL="0">
               <a:buNone/>
             </a:pPr>
             <a:r>
               <a:rPr lang="en-US" sz="1800" b="1" dirty="0">
                 <a:solidFill>
-                  <a:srgbClr val="073821"/>
+                  <a:srgbClr val="0B5E34"/>
                 </a:solidFill>
                 <a:latin typeface="Cambria" pitchFamily="34" charset="0"/>
                 <a:ea typeface="Cambria" pitchFamily="34" charset="-122"/>
                 <a:cs typeface="Cambria" pitchFamily="34" charset="-120"/>
               </a:rPr>
-              <a:t>2</a:t>
+              <a:t>1 : 8,000</a:t>
             </a:r>
             <a:endParaRPr lang="en-US" sz="1800" dirty="0"/>
           </a:p>
@@ -6222,14 +6565,14 @@
       </p:sp>
       <p:sp>
         <p:nvSpPr>
-          <p:cNvPr id="9" name="Text 7"/>
-          <p:cNvSpPr/>
-          <p:nvPr/>
-        </p:nvSpPr>
-        <p:spPr>
-          <a:xfrm>
-            <a:off x="1188720" y="2578608"/>
-            <a:ext cx="10500055" cy="749808"/>
+          <p:cNvPr id="8" name="Text 5"/>
+          <p:cNvSpPr/>
+          <p:nvPr/>
+        </p:nvSpPr>
+        <p:spPr>
+          <a:xfrm>
+            <a:off x="6903720" y="3145536"/>
+            <a:ext cx="4754880" cy="502920"/>
           </a:xfrm>
           <a:prstGeom prst="rect">
             <a:avLst/>
@@ -6245,74 +6588,54 @@
               <a:buNone/>
             </a:pPr>
             <a:r>
-              <a:rPr lang="en-US" sz="1500" dirty="0">
-                <a:solidFill>
-                  <a:srgbClr val="F0F6F2"/>
+              <a:rPr lang="en-US" sz="1150" dirty="0">
+                <a:solidFill>
+                  <a:srgbClr val="5E6E66"/>
                 </a:solidFill>
                 <a:latin typeface="Calibri" pitchFamily="34" charset="0"/>
                 <a:ea typeface="Calibri" pitchFamily="34" charset="-122"/>
                 <a:cs typeface="Calibri" pitchFamily="34" charset="-120"/>
               </a:rPr>
-              <a:t>Regulation now has real teeth — NDPC fines and 72-hour reporting mean compliance is no longer optional.</a:t>
-            </a:r>
-            <a:endParaRPr lang="en-US" sz="1500" dirty="0"/>
-          </a:p>
-        </p:txBody>
-      </p:sp>
-      <p:sp>
-        <p:nvSpPr>
-          <p:cNvPr id="10" name="Shape 8"/>
-          <p:cNvSpPr/>
-          <p:nvPr/>
-        </p:nvSpPr>
-        <p:spPr>
-          <a:xfrm>
-            <a:off x="502920" y="3447288"/>
-            <a:ext cx="457200" cy="457200"/>
-          </a:xfrm>
-          <a:prstGeom prst="ellipse">
-            <a:avLst/>
-          </a:prstGeom>
-          <a:solidFill>
-            <a:srgbClr val="E8A93A"/>
-          </a:solidFill>
-          <a:ln/>
-        </p:spPr>
-      </p:sp>
-      <p:sp>
-        <p:nvSpPr>
-          <p:cNvPr id="11" name="Text 9"/>
-          <p:cNvSpPr/>
-          <p:nvPr/>
-        </p:nvSpPr>
-        <p:spPr>
-          <a:xfrm>
-            <a:off x="502920" y="3447288"/>
-            <a:ext cx="457200" cy="457200"/>
-          </a:xfrm>
-          <a:prstGeom prst="rect">
-            <a:avLst/>
-          </a:prstGeom>
-          <a:noFill/>
-          <a:ln/>
-        </p:spPr>
-        <p:txBody>
-          <a:bodyPr wrap="square" lIns="0" tIns="0" rIns="0" bIns="0" rtlCol="0" anchor="ctr"/>
-          <a:lstStyle/>
-          <a:p>
-            <a:pPr algn="ctr" indent="0" marL="0">
+              <a:t>current expert-to-citizen ratio (benchmark is 1 : 800)</a:t>
+            </a:r>
+            <a:endParaRPr lang="en-US" sz="1150" dirty="0"/>
+          </a:p>
+        </p:txBody>
+      </p:sp>
+      <p:sp>
+        <p:nvSpPr>
+          <p:cNvPr id="9" name="Text 6"/>
+          <p:cNvSpPr/>
+          <p:nvPr/>
+        </p:nvSpPr>
+        <p:spPr>
+          <a:xfrm>
+            <a:off x="6903720" y="3822192"/>
+            <a:ext cx="4754880" cy="365760"/>
+          </a:xfrm>
+          <a:prstGeom prst="rect">
+            <a:avLst/>
+          </a:prstGeom>
+          <a:noFill/>
+          <a:ln/>
+        </p:spPr>
+        <p:txBody>
+          <a:bodyPr wrap="square" lIns="0" tIns="0" rIns="0" bIns="0" rtlCol="0" anchor="ctr"/>
+          <a:lstStyle/>
+          <a:p>
+            <a:pPr indent="0" marL="0">
               <a:buNone/>
             </a:pPr>
             <a:r>
               <a:rPr lang="en-US" sz="1800" b="1" dirty="0">
                 <a:solidFill>
-                  <a:srgbClr val="073821"/>
+                  <a:srgbClr val="0B5E34"/>
                 </a:solidFill>
                 <a:latin typeface="Cambria" pitchFamily="34" charset="0"/>
                 <a:ea typeface="Cambria" pitchFamily="34" charset="-122"/>
                 <a:cs typeface="Cambria" pitchFamily="34" charset="-120"/>
               </a:rPr>
-              <a:t>3</a:t>
+              <a:t>3M by 2027</a:t>
             </a:r>
             <a:endParaRPr lang="en-US" sz="1800" dirty="0"/>
           </a:p>
@@ -6320,14 +6643,14 @@
       </p:sp>
       <p:sp>
         <p:nvSpPr>
-          <p:cNvPr id="12" name="Text 10"/>
-          <p:cNvSpPr/>
-          <p:nvPr/>
-        </p:nvSpPr>
-        <p:spPr>
-          <a:xfrm>
-            <a:off x="1188720" y="3419856"/>
-            <a:ext cx="10500055" cy="749808"/>
+          <p:cNvPr id="10" name="Text 7"/>
+          <p:cNvSpPr/>
+          <p:nvPr/>
+        </p:nvSpPr>
+        <p:spPr>
+          <a:xfrm>
+            <a:off x="6903720" y="4187952"/>
+            <a:ext cx="4754880" cy="502920"/>
           </a:xfrm>
           <a:prstGeom prst="rect">
             <a:avLst/>
@@ -6343,74 +6666,54 @@
               <a:buNone/>
             </a:pPr>
             <a:r>
-              <a:rPr lang="en-US" sz="1500" dirty="0">
-                <a:solidFill>
-                  <a:srgbClr val="F0F6F2"/>
+              <a:rPr lang="en-US" sz="1150" dirty="0">
+                <a:solidFill>
+                  <a:srgbClr val="5E6E66"/>
                 </a:solidFill>
                 <a:latin typeface="Calibri" pitchFamily="34" charset="0"/>
                 <a:ea typeface="Calibri" pitchFamily="34" charset="-122"/>
                 <a:cs typeface="Calibri" pitchFamily="34" charset="-120"/>
               </a:rPr>
-              <a:t>Critical infrastructure is a top target — a single vulnerability (like the CAC breach) can cascade nationally.</a:t>
-            </a:r>
-            <a:endParaRPr lang="en-US" sz="1500" dirty="0"/>
-          </a:p>
-        </p:txBody>
-      </p:sp>
-      <p:sp>
-        <p:nvSpPr>
-          <p:cNvPr id="13" name="Shape 11"/>
-          <p:cNvSpPr/>
-          <p:nvPr/>
-        </p:nvSpPr>
-        <p:spPr>
-          <a:xfrm>
-            <a:off x="502920" y="4288536"/>
-            <a:ext cx="457200" cy="457200"/>
-          </a:xfrm>
-          <a:prstGeom prst="ellipse">
-            <a:avLst/>
-          </a:prstGeom>
-          <a:solidFill>
-            <a:srgbClr val="E8A93A"/>
-          </a:solidFill>
-          <a:ln/>
-        </p:spPr>
-      </p:sp>
-      <p:sp>
-        <p:nvSpPr>
-          <p:cNvPr id="14" name="Text 12"/>
-          <p:cNvSpPr/>
-          <p:nvPr/>
-        </p:nvSpPr>
-        <p:spPr>
-          <a:xfrm>
-            <a:off x="502920" y="4288536"/>
-            <a:ext cx="457200" cy="457200"/>
-          </a:xfrm>
-          <a:prstGeom prst="rect">
-            <a:avLst/>
-          </a:prstGeom>
-          <a:noFill/>
-          <a:ln/>
-        </p:spPr>
-        <p:txBody>
-          <a:bodyPr wrap="square" lIns="0" tIns="0" rIns="0" bIns="0" rtlCol="0" anchor="ctr"/>
-          <a:lstStyle/>
-          <a:p>
-            <a:pPr algn="ctr" indent="0" marL="0">
+              <a:t>government’s 3MTT programme target for trained digital professionals</a:t>
+            </a:r>
+            <a:endParaRPr lang="en-US" sz="1150" dirty="0"/>
+          </a:p>
+        </p:txBody>
+      </p:sp>
+      <p:sp>
+        <p:nvSpPr>
+          <p:cNvPr id="11" name="Text 8"/>
+          <p:cNvSpPr/>
+          <p:nvPr/>
+        </p:nvSpPr>
+        <p:spPr>
+          <a:xfrm>
+            <a:off x="6903720" y="4864608"/>
+            <a:ext cx="4754880" cy="365760"/>
+          </a:xfrm>
+          <a:prstGeom prst="rect">
+            <a:avLst/>
+          </a:prstGeom>
+          <a:noFill/>
+          <a:ln/>
+        </p:spPr>
+        <p:txBody>
+          <a:bodyPr wrap="square" lIns="0" tIns="0" rIns="0" bIns="0" rtlCol="0" anchor="ctr"/>
+          <a:lstStyle/>
+          <a:p>
+            <a:pPr indent="0" marL="0">
               <a:buNone/>
             </a:pPr>
             <a:r>
               <a:rPr lang="en-US" sz="1800" b="1" dirty="0">
                 <a:solidFill>
-                  <a:srgbClr val="073821"/>
+                  <a:srgbClr val="0B5E34"/>
                 </a:solidFill>
                 <a:latin typeface="Cambria" pitchFamily="34" charset="0"/>
                 <a:ea typeface="Cambria" pitchFamily="34" charset="-122"/>
                 <a:cs typeface="Cambria" pitchFamily="34" charset="-120"/>
               </a:rPr>
-              <a:t>4</a:t>
+              <a:t>$254M → $415M</a:t>
             </a:r>
             <a:endParaRPr lang="en-US" sz="1800" dirty="0"/>
           </a:p>
@@ -6418,14 +6721,14 @@
       </p:sp>
       <p:sp>
         <p:nvSpPr>
-          <p:cNvPr id="15" name="Text 13"/>
-          <p:cNvSpPr/>
-          <p:nvPr/>
-        </p:nvSpPr>
-        <p:spPr>
-          <a:xfrm>
-            <a:off x="1188720" y="4261104"/>
-            <a:ext cx="10500055" cy="749808"/>
+          <p:cNvPr id="12" name="Text 9"/>
+          <p:cNvSpPr/>
+          <p:nvPr/>
+        </p:nvSpPr>
+        <p:spPr>
+          <a:xfrm>
+            <a:off x="6903720" y="5230368"/>
+            <a:ext cx="4754880" cy="502920"/>
           </a:xfrm>
           <a:prstGeom prst="rect">
             <a:avLst/>
@@ -6441,154 +6744,95 @@
               <a:buNone/>
             </a:pPr>
             <a:r>
-              <a:rPr lang="en-US" sz="1500" dirty="0">
-                <a:solidFill>
-                  <a:srgbClr val="F0F6F2"/>
+              <a:rPr lang="en-US" sz="1150" dirty="0">
+                <a:solidFill>
+                  <a:srgbClr val="5E6E66"/>
                 </a:solidFill>
                 <a:latin typeface="Calibri" pitchFamily="34" charset="0"/>
                 <a:ea typeface="Calibri" pitchFamily="34" charset="-122"/>
                 <a:cs typeface="Calibri" pitchFamily="34" charset="-120"/>
               </a:rPr>
-              <a:t>The talent shortage is the binding constraint — tooling and law can’t outrun a lack of skilled defenders.</a:t>
-            </a:r>
-            <a:endParaRPr lang="en-US" sz="1500" dirty="0"/>
-          </a:p>
-        </p:txBody>
-      </p:sp>
-      <p:sp>
-        <p:nvSpPr>
-          <p:cNvPr id="16" name="Shape 14"/>
-          <p:cNvSpPr/>
-          <p:nvPr/>
-        </p:nvSpPr>
-        <p:spPr>
-          <a:xfrm>
-            <a:off x="502920" y="5129784"/>
-            <a:ext cx="457200" cy="457200"/>
-          </a:xfrm>
-          <a:prstGeom prst="ellipse">
-            <a:avLst/>
-          </a:prstGeom>
-          <a:solidFill>
-            <a:srgbClr val="E8A93A"/>
-          </a:solidFill>
-          <a:ln/>
-        </p:spPr>
-      </p:sp>
-      <p:sp>
-        <p:nvSpPr>
-          <p:cNvPr id="17" name="Text 15"/>
-          <p:cNvSpPr/>
-          <p:nvPr/>
-        </p:nvSpPr>
-        <p:spPr>
-          <a:xfrm>
-            <a:off x="502920" y="5129784"/>
-            <a:ext cx="457200" cy="457200"/>
-          </a:xfrm>
-          <a:prstGeom prst="rect">
-            <a:avLst/>
-          </a:prstGeom>
-          <a:noFill/>
-          <a:ln/>
-        </p:spPr>
-        <p:txBody>
-          <a:bodyPr wrap="square" lIns="0" tIns="0" rIns="0" bIns="0" rtlCol="0" anchor="ctr"/>
-          <a:lstStyle/>
-          <a:p>
-            <a:pPr algn="ctr" indent="0" marL="0">
-              <a:buNone/>
-            </a:pPr>
-            <a:r>
-              <a:rPr lang="en-US" sz="1800" b="1" dirty="0">
-                <a:solidFill>
-                  <a:srgbClr val="073821"/>
-                </a:solidFill>
-                <a:latin typeface="Cambria" pitchFamily="34" charset="0"/>
-                <a:ea typeface="Cambria" pitchFamily="34" charset="-122"/>
-                <a:cs typeface="Cambria" pitchFamily="34" charset="-120"/>
-              </a:rPr>
-              <a:t>5</a:t>
-            </a:r>
-            <a:endParaRPr lang="en-US" sz="1800" dirty="0"/>
-          </a:p>
-        </p:txBody>
-      </p:sp>
-      <p:sp>
-        <p:nvSpPr>
-          <p:cNvPr id="18" name="Text 16"/>
-          <p:cNvSpPr/>
-          <p:nvPr/>
-        </p:nvSpPr>
-        <p:spPr>
-          <a:xfrm>
-            <a:off x="1188720" y="5102352"/>
-            <a:ext cx="10500055" cy="749808"/>
-          </a:xfrm>
-          <a:prstGeom prst="rect">
-            <a:avLst/>
-          </a:prstGeom>
-          <a:noFill/>
-          <a:ln/>
-        </p:spPr>
-        <p:txBody>
-          <a:bodyPr wrap="square" lIns="0" tIns="0" rIns="0" bIns="0" rtlCol="0" anchor="ctr"/>
-          <a:lstStyle/>
-          <a:p>
-            <a:pPr indent="0" marL="0">
-              <a:buNone/>
-            </a:pPr>
-            <a:r>
-              <a:rPr lang="en-US" sz="1500" dirty="0">
-                <a:solidFill>
-                  <a:srgbClr val="F0F6F2"/>
+              <a:t>Nigeria’s cybersecurity market, 2026–2031 (~10.3% CAGR)</a:t>
+            </a:r>
+            <a:endParaRPr lang="en-US" sz="1150" dirty="0"/>
+          </a:p>
+        </p:txBody>
+      </p:sp>
+      <p:sp>
+        <p:nvSpPr>
+          <p:cNvPr id="13" name="Text 10"/>
+          <p:cNvSpPr/>
+          <p:nvPr/>
+        </p:nvSpPr>
+        <p:spPr>
+          <a:xfrm>
+            <a:off x="11368735" y="6446520"/>
+            <a:ext cx="457200" cy="274320"/>
+          </a:xfrm>
+          <a:prstGeom prst="rect">
+            <a:avLst/>
+          </a:prstGeom>
+          <a:noFill/>
+          <a:ln/>
+        </p:spPr>
+        <p:txBody>
+          <a:bodyPr wrap="square" lIns="0" tIns="0" rIns="0" bIns="0" rtlCol="0" anchor="ctr"/>
+          <a:lstStyle/>
+          <a:p>
+            <a:pPr algn="r" indent="0" marL="0">
+              <a:buNone/>
+            </a:pPr>
+            <a:r>
+              <a:rPr lang="en-US" sz="1000" dirty="0">
+                <a:solidFill>
+                  <a:srgbClr val="5E6E66"/>
                 </a:solidFill>
                 <a:latin typeface="Calibri" pitchFamily="34" charset="0"/>
                 <a:ea typeface="Calibri" pitchFamily="34" charset="-122"/>
                 <a:cs typeface="Calibri" pitchFamily="34" charset="-120"/>
               </a:rPr>
-              <a:t>Zero-trust, identity-first defense, and cross-sector information sharing are the direction of travel.</a:t>
-            </a:r>
-            <a:endParaRPr lang="en-US" sz="1500" dirty="0"/>
-          </a:p>
-        </p:txBody>
-      </p:sp>
-      <p:sp>
-        <p:nvSpPr>
-          <p:cNvPr id="19" name="Text 17"/>
-          <p:cNvSpPr/>
-          <p:nvPr/>
-        </p:nvSpPr>
-        <p:spPr>
-          <a:xfrm>
-            <a:off x="11368735" y="6446520"/>
-            <a:ext cx="457200" cy="274320"/>
-          </a:xfrm>
-          <a:prstGeom prst="rect">
-            <a:avLst/>
-          </a:prstGeom>
-          <a:noFill/>
-          <a:ln/>
-        </p:spPr>
-        <p:txBody>
-          <a:bodyPr wrap="square" lIns="0" tIns="0" rIns="0" bIns="0" rtlCol="0" anchor="ctr"/>
-          <a:lstStyle/>
-          <a:p>
-            <a:pPr algn="r" indent="0" marL="0">
-              <a:buNone/>
-            </a:pPr>
-            <a:r>
-              <a:rPr lang="en-US" sz="1000" dirty="0">
-                <a:solidFill>
-                  <a:srgbClr val="BFD8C9"/>
+              <a:t>14</a:t>
+            </a:r>
+            <a:endParaRPr lang="en-US" sz="1000" dirty="0"/>
+          </a:p>
+        </p:txBody>
+      </p:sp>
+      <p:sp>
+        <p:nvSpPr>
+          <p:cNvPr id="14" name="Text 11"/>
+          <p:cNvSpPr/>
+          <p:nvPr/>
+        </p:nvSpPr>
+        <p:spPr>
+          <a:xfrm>
+            <a:off x="502920" y="6473952"/>
+            <a:ext cx="8412480" cy="274320"/>
+          </a:xfrm>
+          <a:prstGeom prst="rect">
+            <a:avLst/>
+          </a:prstGeom>
+          <a:noFill/>
+          <a:ln/>
+        </p:spPr>
+        <p:txBody>
+          <a:bodyPr wrap="square" lIns="0" tIns="0" rIns="0" bIns="0" rtlCol="0" anchor="ctr"/>
+          <a:lstStyle/>
+          <a:p>
+            <a:pPr indent="0" marL="0">
+              <a:buNone/>
+            </a:pPr>
+            <a:r>
+              <a:rPr lang="en-US" sz="800" i="1" dirty="0">
+                <a:solidFill>
+                  <a:srgbClr val="9AA7A0"/>
                 </a:solidFill>
                 <a:latin typeface="Calibri" pitchFamily="34" charset="0"/>
                 <a:ea typeface="Calibri" pitchFamily="34" charset="-122"/>
                 <a:cs typeface="Calibri" pitchFamily="34" charset="-120"/>
               </a:rPr>
-              <a:t>14</a:t>
-            </a:r>
-            <a:endParaRPr lang="en-US" sz="1000" dirty="0"/>
+              <a:t>Sources: Businessday NG, Vanguard, TechCabal, CBN, NDPC, NITDA/ONSA, UNODC, SC Media, ISC2/CompTIA (2025-2026 reporting)</a:t>
+            </a:r>
+            <a:endParaRPr lang="en-US" sz="800" dirty="0"/>
           </a:p>
         </p:txBody>
       </p:sp>
@@ -6626,6 +6870,645 @@
       </p:grpSpPr>
       <p:sp>
         <p:nvSpPr>
+          <p:cNvPr id="2" name="Text 0"/>
+          <p:cNvSpPr/>
+          <p:nvPr/>
+        </p:nvSpPr>
+        <p:spPr>
+          <a:xfrm>
+            <a:off x="502920" y="384048"/>
+            <a:ext cx="11185855" cy="292608"/>
+          </a:xfrm>
+          <a:prstGeom prst="rect">
+            <a:avLst/>
+          </a:prstGeom>
+          <a:noFill/>
+          <a:ln/>
+        </p:spPr>
+        <p:txBody>
+          <a:bodyPr wrap="square" lIns="0" tIns="0" rIns="0" bIns="0" rtlCol="0" anchor="ctr"/>
+          <a:lstStyle/>
+          <a:p>
+            <a:pPr indent="0" marL="0">
+              <a:buNone/>
+            </a:pPr>
+            <a:r>
+              <a:rPr lang="en-US" sz="1250" b="1" spc="200" kern="0" dirty="0">
+                <a:solidFill>
+                  <a:srgbClr val="E8A93A"/>
+                </a:solidFill>
+                <a:latin typeface="Calibri" pitchFamily="34" charset="0"/>
+                <a:ea typeface="Calibri" pitchFamily="34" charset="-122"/>
+                <a:cs typeface="Calibri" pitchFamily="34" charset="-120"/>
+              </a:rPr>
+              <a:t>SYNTHESIS</a:t>
+            </a:r>
+            <a:endParaRPr lang="en-US" sz="1250" dirty="0"/>
+          </a:p>
+        </p:txBody>
+      </p:sp>
+      <p:sp>
+        <p:nvSpPr>
+          <p:cNvPr id="3" name="Text 1"/>
+          <p:cNvSpPr/>
+          <p:nvPr/>
+        </p:nvSpPr>
+        <p:spPr>
+          <a:xfrm>
+            <a:off x="502920" y="658368"/>
+            <a:ext cx="11185855" cy="640080"/>
+          </a:xfrm>
+          <a:prstGeom prst="rect">
+            <a:avLst/>
+          </a:prstGeom>
+          <a:noFill/>
+          <a:ln/>
+        </p:spPr>
+        <p:txBody>
+          <a:bodyPr wrap="square" lIns="0" tIns="0" rIns="0" bIns="0" rtlCol="0" anchor="ctr"/>
+          <a:lstStyle/>
+          <a:p>
+            <a:pPr indent="0" marL="0">
+              <a:buNone/>
+            </a:pPr>
+            <a:r>
+              <a:rPr lang="en-US" sz="3000" b="1" dirty="0">
+                <a:solidFill>
+                  <a:srgbClr val="FFFFFF"/>
+                </a:solidFill>
+                <a:latin typeface="Cambria" pitchFamily="34" charset="0"/>
+                <a:ea typeface="Cambria" pitchFamily="34" charset="-122"/>
+                <a:cs typeface="Cambria" pitchFamily="34" charset="-120"/>
+              </a:rPr>
+              <a:t>Key takeaways</a:t>
+            </a:r>
+            <a:endParaRPr lang="en-US" sz="3000" dirty="0"/>
+          </a:p>
+        </p:txBody>
+      </p:sp>
+      <p:sp>
+        <p:nvSpPr>
+          <p:cNvPr id="4" name="Shape 2"/>
+          <p:cNvSpPr/>
+          <p:nvPr/>
+        </p:nvSpPr>
+        <p:spPr>
+          <a:xfrm>
+            <a:off x="502920" y="1764792"/>
+            <a:ext cx="457200" cy="457200"/>
+          </a:xfrm>
+          <a:prstGeom prst="ellipse">
+            <a:avLst/>
+          </a:prstGeom>
+          <a:solidFill>
+            <a:srgbClr val="E8A93A"/>
+          </a:solidFill>
+          <a:ln/>
+        </p:spPr>
+      </p:sp>
+      <p:sp>
+        <p:nvSpPr>
+          <p:cNvPr id="5" name="Text 3"/>
+          <p:cNvSpPr/>
+          <p:nvPr/>
+        </p:nvSpPr>
+        <p:spPr>
+          <a:xfrm>
+            <a:off x="502920" y="1764792"/>
+            <a:ext cx="457200" cy="457200"/>
+          </a:xfrm>
+          <a:prstGeom prst="rect">
+            <a:avLst/>
+          </a:prstGeom>
+          <a:noFill/>
+          <a:ln/>
+        </p:spPr>
+        <p:txBody>
+          <a:bodyPr wrap="square" lIns="0" tIns="0" rIns="0" bIns="0" rtlCol="0" anchor="ctr"/>
+          <a:lstStyle/>
+          <a:p>
+            <a:pPr algn="ctr" indent="0" marL="0">
+              <a:buNone/>
+            </a:pPr>
+            <a:r>
+              <a:rPr lang="en-US" sz="1800" b="1" dirty="0">
+                <a:solidFill>
+                  <a:srgbClr val="073821"/>
+                </a:solidFill>
+                <a:latin typeface="Cambria" pitchFamily="34" charset="0"/>
+                <a:ea typeface="Cambria" pitchFamily="34" charset="-122"/>
+                <a:cs typeface="Cambria" pitchFamily="34" charset="-120"/>
+              </a:rPr>
+              <a:t>1</a:t>
+            </a:r>
+            <a:endParaRPr lang="en-US" sz="1800" dirty="0"/>
+          </a:p>
+        </p:txBody>
+      </p:sp>
+      <p:sp>
+        <p:nvSpPr>
+          <p:cNvPr id="6" name="Text 4"/>
+          <p:cNvSpPr/>
+          <p:nvPr/>
+        </p:nvSpPr>
+        <p:spPr>
+          <a:xfrm>
+            <a:off x="1188720" y="1737360"/>
+            <a:ext cx="10500055" cy="749808"/>
+          </a:xfrm>
+          <a:prstGeom prst="rect">
+            <a:avLst/>
+          </a:prstGeom>
+          <a:noFill/>
+          <a:ln/>
+        </p:spPr>
+        <p:txBody>
+          <a:bodyPr wrap="square" lIns="0" tIns="0" rIns="0" bIns="0" rtlCol="0" anchor="ctr"/>
+          <a:lstStyle/>
+          <a:p>
+            <a:pPr indent="0" marL="0">
+              <a:buNone/>
+            </a:pPr>
+            <a:r>
+              <a:rPr lang="en-US" sz="1500" dirty="0">
+                <a:solidFill>
+                  <a:srgbClr val="F0F6F2"/>
+                </a:solidFill>
+                <a:latin typeface="Calibri" pitchFamily="34" charset="0"/>
+                <a:ea typeface="Calibri" pitchFamily="34" charset="-122"/>
+                <a:cs typeface="Calibri" pitchFamily="34" charset="-120"/>
+              </a:rPr>
+              <a:t>Attacks are more frequent, more automated (AI-assisted), and increasingly identity-focused.</a:t>
+            </a:r>
+            <a:endParaRPr lang="en-US" sz="1500" dirty="0"/>
+          </a:p>
+        </p:txBody>
+      </p:sp>
+      <p:sp>
+        <p:nvSpPr>
+          <p:cNvPr id="7" name="Shape 5"/>
+          <p:cNvSpPr/>
+          <p:nvPr/>
+        </p:nvSpPr>
+        <p:spPr>
+          <a:xfrm>
+            <a:off x="502920" y="2606040"/>
+            <a:ext cx="457200" cy="457200"/>
+          </a:xfrm>
+          <a:prstGeom prst="ellipse">
+            <a:avLst/>
+          </a:prstGeom>
+          <a:solidFill>
+            <a:srgbClr val="E8A93A"/>
+          </a:solidFill>
+          <a:ln/>
+        </p:spPr>
+      </p:sp>
+      <p:sp>
+        <p:nvSpPr>
+          <p:cNvPr id="8" name="Text 6"/>
+          <p:cNvSpPr/>
+          <p:nvPr/>
+        </p:nvSpPr>
+        <p:spPr>
+          <a:xfrm>
+            <a:off x="502920" y="2606040"/>
+            <a:ext cx="457200" cy="457200"/>
+          </a:xfrm>
+          <a:prstGeom prst="rect">
+            <a:avLst/>
+          </a:prstGeom>
+          <a:noFill/>
+          <a:ln/>
+        </p:spPr>
+        <p:txBody>
+          <a:bodyPr wrap="square" lIns="0" tIns="0" rIns="0" bIns="0" rtlCol="0" anchor="ctr"/>
+          <a:lstStyle/>
+          <a:p>
+            <a:pPr algn="ctr" indent="0" marL="0">
+              <a:buNone/>
+            </a:pPr>
+            <a:r>
+              <a:rPr lang="en-US" sz="1800" b="1" dirty="0">
+                <a:solidFill>
+                  <a:srgbClr val="073821"/>
+                </a:solidFill>
+                <a:latin typeface="Cambria" pitchFamily="34" charset="0"/>
+                <a:ea typeface="Cambria" pitchFamily="34" charset="-122"/>
+                <a:cs typeface="Cambria" pitchFamily="34" charset="-120"/>
+              </a:rPr>
+              <a:t>2</a:t>
+            </a:r>
+            <a:endParaRPr lang="en-US" sz="1800" dirty="0"/>
+          </a:p>
+        </p:txBody>
+      </p:sp>
+      <p:sp>
+        <p:nvSpPr>
+          <p:cNvPr id="9" name="Text 7"/>
+          <p:cNvSpPr/>
+          <p:nvPr/>
+        </p:nvSpPr>
+        <p:spPr>
+          <a:xfrm>
+            <a:off x="1188720" y="2578608"/>
+            <a:ext cx="10500055" cy="749808"/>
+          </a:xfrm>
+          <a:prstGeom prst="rect">
+            <a:avLst/>
+          </a:prstGeom>
+          <a:noFill/>
+          <a:ln/>
+        </p:spPr>
+        <p:txBody>
+          <a:bodyPr wrap="square" lIns="0" tIns="0" rIns="0" bIns="0" rtlCol="0" anchor="ctr"/>
+          <a:lstStyle/>
+          <a:p>
+            <a:pPr indent="0" marL="0">
+              <a:buNone/>
+            </a:pPr>
+            <a:r>
+              <a:rPr lang="en-US" sz="1500" dirty="0">
+                <a:solidFill>
+                  <a:srgbClr val="F0F6F2"/>
+                </a:solidFill>
+                <a:latin typeface="Calibri" pitchFamily="34" charset="0"/>
+                <a:ea typeface="Calibri" pitchFamily="34" charset="-122"/>
+                <a:cs typeface="Calibri" pitchFamily="34" charset="-120"/>
+              </a:rPr>
+              <a:t>Regulation now has real teeth — NDPC fines and 72-hour reporting mean compliance is no longer optional.</a:t>
+            </a:r>
+            <a:endParaRPr lang="en-US" sz="1500" dirty="0"/>
+          </a:p>
+        </p:txBody>
+      </p:sp>
+      <p:sp>
+        <p:nvSpPr>
+          <p:cNvPr id="10" name="Shape 8"/>
+          <p:cNvSpPr/>
+          <p:nvPr/>
+        </p:nvSpPr>
+        <p:spPr>
+          <a:xfrm>
+            <a:off x="502920" y="3447288"/>
+            <a:ext cx="457200" cy="457200"/>
+          </a:xfrm>
+          <a:prstGeom prst="ellipse">
+            <a:avLst/>
+          </a:prstGeom>
+          <a:solidFill>
+            <a:srgbClr val="E8A93A"/>
+          </a:solidFill>
+          <a:ln/>
+        </p:spPr>
+      </p:sp>
+      <p:sp>
+        <p:nvSpPr>
+          <p:cNvPr id="11" name="Text 9"/>
+          <p:cNvSpPr/>
+          <p:nvPr/>
+        </p:nvSpPr>
+        <p:spPr>
+          <a:xfrm>
+            <a:off x="502920" y="3447288"/>
+            <a:ext cx="457200" cy="457200"/>
+          </a:xfrm>
+          <a:prstGeom prst="rect">
+            <a:avLst/>
+          </a:prstGeom>
+          <a:noFill/>
+          <a:ln/>
+        </p:spPr>
+        <p:txBody>
+          <a:bodyPr wrap="square" lIns="0" tIns="0" rIns="0" bIns="0" rtlCol="0" anchor="ctr"/>
+          <a:lstStyle/>
+          <a:p>
+            <a:pPr algn="ctr" indent="0" marL="0">
+              <a:buNone/>
+            </a:pPr>
+            <a:r>
+              <a:rPr lang="en-US" sz="1800" b="1" dirty="0">
+                <a:solidFill>
+                  <a:srgbClr val="073821"/>
+                </a:solidFill>
+                <a:latin typeface="Cambria" pitchFamily="34" charset="0"/>
+                <a:ea typeface="Cambria" pitchFamily="34" charset="-122"/>
+                <a:cs typeface="Cambria" pitchFamily="34" charset="-120"/>
+              </a:rPr>
+              <a:t>3</a:t>
+            </a:r>
+            <a:endParaRPr lang="en-US" sz="1800" dirty="0"/>
+          </a:p>
+        </p:txBody>
+      </p:sp>
+      <p:sp>
+        <p:nvSpPr>
+          <p:cNvPr id="12" name="Text 10"/>
+          <p:cNvSpPr/>
+          <p:nvPr/>
+        </p:nvSpPr>
+        <p:spPr>
+          <a:xfrm>
+            <a:off x="1188720" y="3419856"/>
+            <a:ext cx="10500055" cy="749808"/>
+          </a:xfrm>
+          <a:prstGeom prst="rect">
+            <a:avLst/>
+          </a:prstGeom>
+          <a:noFill/>
+          <a:ln/>
+        </p:spPr>
+        <p:txBody>
+          <a:bodyPr wrap="square" lIns="0" tIns="0" rIns="0" bIns="0" rtlCol="0" anchor="ctr"/>
+          <a:lstStyle/>
+          <a:p>
+            <a:pPr indent="0" marL="0">
+              <a:buNone/>
+            </a:pPr>
+            <a:r>
+              <a:rPr lang="en-US" sz="1500" dirty="0">
+                <a:solidFill>
+                  <a:srgbClr val="F0F6F2"/>
+                </a:solidFill>
+                <a:latin typeface="Calibri" pitchFamily="34" charset="0"/>
+                <a:ea typeface="Calibri" pitchFamily="34" charset="-122"/>
+                <a:cs typeface="Calibri" pitchFamily="34" charset="-120"/>
+              </a:rPr>
+              <a:t>Critical infrastructure is a top target — a single vulnerability (like the CAC breach) can cascade nationally.</a:t>
+            </a:r>
+            <a:endParaRPr lang="en-US" sz="1500" dirty="0"/>
+          </a:p>
+        </p:txBody>
+      </p:sp>
+      <p:sp>
+        <p:nvSpPr>
+          <p:cNvPr id="13" name="Shape 11"/>
+          <p:cNvSpPr/>
+          <p:nvPr/>
+        </p:nvSpPr>
+        <p:spPr>
+          <a:xfrm>
+            <a:off x="502920" y="4288536"/>
+            <a:ext cx="457200" cy="457200"/>
+          </a:xfrm>
+          <a:prstGeom prst="ellipse">
+            <a:avLst/>
+          </a:prstGeom>
+          <a:solidFill>
+            <a:srgbClr val="E8A93A"/>
+          </a:solidFill>
+          <a:ln/>
+        </p:spPr>
+      </p:sp>
+      <p:sp>
+        <p:nvSpPr>
+          <p:cNvPr id="14" name="Text 12"/>
+          <p:cNvSpPr/>
+          <p:nvPr/>
+        </p:nvSpPr>
+        <p:spPr>
+          <a:xfrm>
+            <a:off x="502920" y="4288536"/>
+            <a:ext cx="457200" cy="457200"/>
+          </a:xfrm>
+          <a:prstGeom prst="rect">
+            <a:avLst/>
+          </a:prstGeom>
+          <a:noFill/>
+          <a:ln/>
+        </p:spPr>
+        <p:txBody>
+          <a:bodyPr wrap="square" lIns="0" tIns="0" rIns="0" bIns="0" rtlCol="0" anchor="ctr"/>
+          <a:lstStyle/>
+          <a:p>
+            <a:pPr algn="ctr" indent="0" marL="0">
+              <a:buNone/>
+            </a:pPr>
+            <a:r>
+              <a:rPr lang="en-US" sz="1800" b="1" dirty="0">
+                <a:solidFill>
+                  <a:srgbClr val="073821"/>
+                </a:solidFill>
+                <a:latin typeface="Cambria" pitchFamily="34" charset="0"/>
+                <a:ea typeface="Cambria" pitchFamily="34" charset="-122"/>
+                <a:cs typeface="Cambria" pitchFamily="34" charset="-120"/>
+              </a:rPr>
+              <a:t>4</a:t>
+            </a:r>
+            <a:endParaRPr lang="en-US" sz="1800" dirty="0"/>
+          </a:p>
+        </p:txBody>
+      </p:sp>
+      <p:sp>
+        <p:nvSpPr>
+          <p:cNvPr id="15" name="Text 13"/>
+          <p:cNvSpPr/>
+          <p:nvPr/>
+        </p:nvSpPr>
+        <p:spPr>
+          <a:xfrm>
+            <a:off x="1188720" y="4261104"/>
+            <a:ext cx="10500055" cy="749808"/>
+          </a:xfrm>
+          <a:prstGeom prst="rect">
+            <a:avLst/>
+          </a:prstGeom>
+          <a:noFill/>
+          <a:ln/>
+        </p:spPr>
+        <p:txBody>
+          <a:bodyPr wrap="square" lIns="0" tIns="0" rIns="0" bIns="0" rtlCol="0" anchor="ctr"/>
+          <a:lstStyle/>
+          <a:p>
+            <a:pPr indent="0" marL="0">
+              <a:buNone/>
+            </a:pPr>
+            <a:r>
+              <a:rPr lang="en-US" sz="1500" dirty="0">
+                <a:solidFill>
+                  <a:srgbClr val="F0F6F2"/>
+                </a:solidFill>
+                <a:latin typeface="Calibri" pitchFamily="34" charset="0"/>
+                <a:ea typeface="Calibri" pitchFamily="34" charset="-122"/>
+                <a:cs typeface="Calibri" pitchFamily="34" charset="-120"/>
+              </a:rPr>
+              <a:t>The talent shortage is the binding constraint — tooling and law can’t outrun a lack of skilled defenders.</a:t>
+            </a:r>
+            <a:endParaRPr lang="en-US" sz="1500" dirty="0"/>
+          </a:p>
+        </p:txBody>
+      </p:sp>
+      <p:sp>
+        <p:nvSpPr>
+          <p:cNvPr id="16" name="Shape 14"/>
+          <p:cNvSpPr/>
+          <p:nvPr/>
+        </p:nvSpPr>
+        <p:spPr>
+          <a:xfrm>
+            <a:off x="502920" y="5129784"/>
+            <a:ext cx="457200" cy="457200"/>
+          </a:xfrm>
+          <a:prstGeom prst="ellipse">
+            <a:avLst/>
+          </a:prstGeom>
+          <a:solidFill>
+            <a:srgbClr val="E8A93A"/>
+          </a:solidFill>
+          <a:ln/>
+        </p:spPr>
+      </p:sp>
+      <p:sp>
+        <p:nvSpPr>
+          <p:cNvPr id="17" name="Text 15"/>
+          <p:cNvSpPr/>
+          <p:nvPr/>
+        </p:nvSpPr>
+        <p:spPr>
+          <a:xfrm>
+            <a:off x="502920" y="5129784"/>
+            <a:ext cx="457200" cy="457200"/>
+          </a:xfrm>
+          <a:prstGeom prst="rect">
+            <a:avLst/>
+          </a:prstGeom>
+          <a:noFill/>
+          <a:ln/>
+        </p:spPr>
+        <p:txBody>
+          <a:bodyPr wrap="square" lIns="0" tIns="0" rIns="0" bIns="0" rtlCol="0" anchor="ctr"/>
+          <a:lstStyle/>
+          <a:p>
+            <a:pPr algn="ctr" indent="0" marL="0">
+              <a:buNone/>
+            </a:pPr>
+            <a:r>
+              <a:rPr lang="en-US" sz="1800" b="1" dirty="0">
+                <a:solidFill>
+                  <a:srgbClr val="073821"/>
+                </a:solidFill>
+                <a:latin typeface="Cambria" pitchFamily="34" charset="0"/>
+                <a:ea typeface="Cambria" pitchFamily="34" charset="-122"/>
+                <a:cs typeface="Cambria" pitchFamily="34" charset="-120"/>
+              </a:rPr>
+              <a:t>5</a:t>
+            </a:r>
+            <a:endParaRPr lang="en-US" sz="1800" dirty="0"/>
+          </a:p>
+        </p:txBody>
+      </p:sp>
+      <p:sp>
+        <p:nvSpPr>
+          <p:cNvPr id="18" name="Text 16"/>
+          <p:cNvSpPr/>
+          <p:nvPr/>
+        </p:nvSpPr>
+        <p:spPr>
+          <a:xfrm>
+            <a:off x="1188720" y="5102352"/>
+            <a:ext cx="10500055" cy="749808"/>
+          </a:xfrm>
+          <a:prstGeom prst="rect">
+            <a:avLst/>
+          </a:prstGeom>
+          <a:noFill/>
+          <a:ln/>
+        </p:spPr>
+        <p:txBody>
+          <a:bodyPr wrap="square" lIns="0" tIns="0" rIns="0" bIns="0" rtlCol="0" anchor="ctr"/>
+          <a:lstStyle/>
+          <a:p>
+            <a:pPr indent="0" marL="0">
+              <a:buNone/>
+            </a:pPr>
+            <a:r>
+              <a:rPr lang="en-US" sz="1500" dirty="0">
+                <a:solidFill>
+                  <a:srgbClr val="F0F6F2"/>
+                </a:solidFill>
+                <a:latin typeface="Calibri" pitchFamily="34" charset="0"/>
+                <a:ea typeface="Calibri" pitchFamily="34" charset="-122"/>
+                <a:cs typeface="Calibri" pitchFamily="34" charset="-120"/>
+              </a:rPr>
+              <a:t>Zero-trust, identity-first defense, and cross-sector information sharing are the direction of travel.</a:t>
+            </a:r>
+            <a:endParaRPr lang="en-US" sz="1500" dirty="0"/>
+          </a:p>
+        </p:txBody>
+      </p:sp>
+      <p:sp>
+        <p:nvSpPr>
+          <p:cNvPr id="19" name="Text 17"/>
+          <p:cNvSpPr/>
+          <p:nvPr/>
+        </p:nvSpPr>
+        <p:spPr>
+          <a:xfrm>
+            <a:off x="11368735" y="6446520"/>
+            <a:ext cx="457200" cy="274320"/>
+          </a:xfrm>
+          <a:prstGeom prst="rect">
+            <a:avLst/>
+          </a:prstGeom>
+          <a:noFill/>
+          <a:ln/>
+        </p:spPr>
+        <p:txBody>
+          <a:bodyPr wrap="square" lIns="0" tIns="0" rIns="0" bIns="0" rtlCol="0" anchor="ctr"/>
+          <a:lstStyle/>
+          <a:p>
+            <a:pPr algn="r" indent="0" marL="0">
+              <a:buNone/>
+            </a:pPr>
+            <a:r>
+              <a:rPr lang="en-US" sz="1000" dirty="0">
+                <a:solidFill>
+                  <a:srgbClr val="BFD8C9"/>
+                </a:solidFill>
+                <a:latin typeface="Calibri" pitchFamily="34" charset="0"/>
+                <a:ea typeface="Calibri" pitchFamily="34" charset="-122"/>
+                <a:cs typeface="Calibri" pitchFamily="34" charset="-120"/>
+              </a:rPr>
+              <a:t>15</a:t>
+            </a:r>
+            <a:endParaRPr lang="en-US" sz="1000" dirty="0"/>
+          </a:p>
+        </p:txBody>
+      </p:sp>
+    </p:spTree>
+  </p:cSld>
+  <p:clrMapOvr>
+    <a:masterClrMapping/>
+  </p:clrMapOvr>
+</p:sld>
+</file>
+
+<file path=ppt/slides/slide16.xml><?xml version="1.0" encoding="utf-8"?>
+<p:sld xmlns:a="http://schemas.openxmlformats.org/drawingml/2006/main" xmlns:r="http://schemas.openxmlformats.org/officeDocument/2006/relationships" xmlns:p="http://schemas.openxmlformats.org/presentationml/2006/main">
+  <p:cSld name="Slide 16">
+    <p:bg>
+      <p:bgPr>
+        <a:solidFill>
+          <a:srgbClr val="073821"/>
+        </a:solidFill>
+      </p:bgPr>
+    </p:bg>
+    <p:spTree>
+      <p:nvGrpSpPr>
+        <p:cNvPr id="1" name=""/>
+        <p:cNvGrpSpPr/>
+        <p:nvPr/>
+      </p:nvGrpSpPr>
+      <p:grpSpPr>
+        <a:xfrm>
+          <a:off x="0" y="0"/>
+          <a:ext cx="0" cy="0"/>
+          <a:chOff x="0" y="0"/>
+          <a:chExt cx="0" cy="0"/>
+        </a:xfrm>
+      </p:grpSpPr>
+      <p:sp>
+        <p:nvSpPr>
           <p:cNvPr id="2" name="Shape 0"/>
           <p:cNvSpPr/>
           <p:nvPr/>
@@ -7158,7 +8041,7 @@
                 <a:ea typeface="Calibri" pitchFamily="34" charset="-122"/>
                 <a:cs typeface="Calibri" pitchFamily="34" charset="-120"/>
               </a:rPr>
-              <a:t>15</a:t>
+              <a:t>16</a:t>
             </a:r>
             <a:endParaRPr lang="en-US" sz="1000" dirty="0"/>
           </a:p>
@@ -7512,7 +8395,7 @@
                 <a:ea typeface="Calibri" pitchFamily="34" charset="-122"/>
                 <a:cs typeface="Calibri" pitchFamily="34" charset="-120"/>
               </a:rPr>
-              <a:t>Who’s being targeted, and how</a:t>
+              <a:t>AI: the double-edged sword</a:t>
             </a:r>
             <a:endParaRPr lang="en-US" sz="1500" dirty="0"/>
           </a:p>
@@ -7634,7 +8517,7 @@
                 <a:ea typeface="Calibri" pitchFamily="34" charset="-122"/>
                 <a:cs typeface="Calibri" pitchFamily="34" charset="-120"/>
               </a:rPr>
-              <a:t>Case study: the CAC / ByteToBreach breach</a:t>
+              <a:t>Who’s being targeted, and how</a:t>
             </a:r>
             <a:endParaRPr lang="en-US" sz="1500" dirty="0"/>
           </a:p>
@@ -7756,7 +8639,7 @@
                 <a:ea typeface="Calibri" pitchFamily="34" charset="-122"/>
                 <a:cs typeface="Calibri" pitchFamily="34" charset="-120"/>
               </a:rPr>
-              <a:t>Nigeria’s regulatory response</a:t>
+              <a:t>Case study: the CAC / ByteToBreach breach</a:t>
             </a:r>
             <a:endParaRPr lang="en-US" sz="1500" dirty="0"/>
           </a:p>
@@ -7878,7 +8761,7 @@
                 <a:ea typeface="Calibri" pitchFamily="34" charset="-122"/>
                 <a:cs typeface="Calibri" pitchFamily="34" charset="-120"/>
               </a:rPr>
-              <a:t>The talent gap</a:t>
+              <a:t>Nigeria’s regulatory response</a:t>
             </a:r>
             <a:endParaRPr lang="en-US" sz="1500" dirty="0"/>
           </a:p>
@@ -8000,7 +8883,7 @@
                 <a:ea typeface="Calibri" pitchFamily="34" charset="-122"/>
                 <a:cs typeface="Calibri" pitchFamily="34" charset="-120"/>
               </a:rPr>
-              <a:t>Key takeaways</a:t>
+              <a:t>The talent gap</a:t>
             </a:r>
             <a:endParaRPr lang="en-US" sz="1500" dirty="0"/>
           </a:p>
@@ -8122,6 +9005,128 @@
                 <a:ea typeface="Calibri" pitchFamily="34" charset="-122"/>
                 <a:cs typeface="Calibri" pitchFamily="34" charset="-120"/>
               </a:rPr>
+              <a:t>Key takeaways</a:t>
+            </a:r>
+            <a:endParaRPr lang="en-US" sz="1500" dirty="0"/>
+          </a:p>
+        </p:txBody>
+      </p:sp>
+      <p:sp>
+        <p:nvSpPr>
+          <p:cNvPr id="32" name="Shape 23"/>
+          <p:cNvSpPr/>
+          <p:nvPr/>
+        </p:nvSpPr>
+        <p:spPr>
+          <a:xfrm>
+            <a:off x="6309360" y="3575304"/>
+            <a:ext cx="457200" cy="457200"/>
+          </a:xfrm>
+          <a:prstGeom prst="ellipse">
+            <a:avLst/>
+          </a:prstGeom>
+          <a:solidFill>
+            <a:srgbClr val="146B47"/>
+          </a:solidFill>
+          <a:ln/>
+        </p:spPr>
+      </p:sp>
+      <p:pic>
+        <p:nvPicPr>
+          <p:cNvPr id="33" name="Image 7" descr="preencoded.png">    </p:cNvPr>
+          <p:cNvPicPr>
+            <a:picLocks noChangeAspect="1"/>
+          </p:cNvPicPr>
+          <p:nvPr/>
+        </p:nvPicPr>
+        <p:blipFill>
+          <a:blip r:embed="rId8"/>
+          <a:stretch>
+            <a:fillRect/>
+          </a:stretch>
+        </p:blipFill>
+        <p:spPr>
+          <a:xfrm>
+            <a:off x="6419088" y="3685032"/>
+            <a:ext cx="237744" cy="237744"/>
+          </a:xfrm>
+          <a:prstGeom prst="rect">
+            <a:avLst/>
+          </a:prstGeom>
+        </p:spPr>
+      </p:pic>
+      <p:sp>
+        <p:nvSpPr>
+          <p:cNvPr id="34" name="Text 24"/>
+          <p:cNvSpPr/>
+          <p:nvPr/>
+        </p:nvSpPr>
+        <p:spPr>
+          <a:xfrm>
+            <a:off x="6839712" y="3520440"/>
+            <a:ext cx="457200" cy="365760"/>
+          </a:xfrm>
+          <a:prstGeom prst="rect">
+            <a:avLst/>
+          </a:prstGeom>
+          <a:noFill/>
+          <a:ln/>
+        </p:spPr>
+        <p:txBody>
+          <a:bodyPr wrap="square" lIns="0" tIns="0" rIns="0" bIns="0" rtlCol="0" anchor="ctr"/>
+          <a:lstStyle/>
+          <a:p>
+            <a:pPr indent="0" marL="0">
+              <a:buNone/>
+            </a:pPr>
+            <a:r>
+              <a:rPr lang="en-US" sz="1400" b="1" dirty="0">
+                <a:solidFill>
+                  <a:srgbClr val="E8A93A"/>
+                </a:solidFill>
+                <a:latin typeface="Cambria" pitchFamily="34" charset="0"/>
+                <a:ea typeface="Cambria" pitchFamily="34" charset="-122"/>
+                <a:cs typeface="Cambria" pitchFamily="34" charset="-120"/>
+              </a:rPr>
+              <a:t>08</a:t>
+            </a:r>
+            <a:endParaRPr lang="en-US" sz="1400" dirty="0"/>
+          </a:p>
+        </p:txBody>
+      </p:sp>
+      <p:sp>
+        <p:nvSpPr>
+          <p:cNvPr id="35" name="Text 25"/>
+          <p:cNvSpPr/>
+          <p:nvPr/>
+        </p:nvSpPr>
+        <p:spPr>
+          <a:xfrm>
+            <a:off x="7223760" y="3593592"/>
+            <a:ext cx="4434840" cy="457200"/>
+          </a:xfrm>
+          <a:prstGeom prst="rect">
+            <a:avLst/>
+          </a:prstGeom>
+          <a:noFill/>
+          <a:ln/>
+        </p:spPr>
+        <p:txBody>
+          <a:bodyPr wrap="square" lIns="0" tIns="0" rIns="0" bIns="0" rtlCol="0" anchor="ctr"/>
+          <a:lstStyle/>
+          <a:p>
+            <a:pPr indent="0" marL="0">
+              <a:buNone/>
+            </a:pPr>
+            <a:r>
+              <a:rPr lang="en-US" sz="1500" dirty="0">
+                <a:solidFill>
+                  <a:srgbClr val="17231C"/>
+                </a:solidFill>
+                <a:latin typeface="Calibri" pitchFamily="34" charset="0"/>
+                <a:ea typeface="Calibri" pitchFamily="34" charset="-122"/>
+                <a:cs typeface="Calibri" pitchFamily="34" charset="-120"/>
+              </a:rPr>
               <a:t>Q&amp;A — 15 minutes</a:t>
             </a:r>
             <a:endParaRPr lang="en-US" sz="1500" dirty="0"/>
@@ -8130,7 +9135,7 @@
       </p:sp>
       <p:sp>
         <p:nvSpPr>
-          <p:cNvPr id="32" name="Text 23"/>
+          <p:cNvPr id="36" name="Text 26"/>
           <p:cNvSpPr/>
           <p:nvPr/>
         </p:nvSpPr>
@@ -10978,6 +11983,884 @@
     <p:bg>
       <p:bgPr>
         <a:solidFill>
+          <a:srgbClr val="FFFFFF"/>
+        </a:solidFill>
+      </p:bgPr>
+    </p:bg>
+    <p:spTree>
+      <p:nvGrpSpPr>
+        <p:cNvPr id="1" name=""/>
+        <p:cNvGrpSpPr/>
+        <p:nvPr/>
+      </p:nvGrpSpPr>
+      <p:grpSpPr>
+        <a:xfrm>
+          <a:off x="0" y="0"/>
+          <a:ext cx="0" cy="0"/>
+          <a:chOff x="0" y="0"/>
+          <a:chExt cx="0" cy="0"/>
+        </a:xfrm>
+      </p:grpSpPr>
+      <p:sp>
+        <p:nvSpPr>
+          <p:cNvPr id="2" name="Text 0"/>
+          <p:cNvSpPr/>
+          <p:nvPr/>
+        </p:nvSpPr>
+        <p:spPr>
+          <a:xfrm>
+            <a:off x="502920" y="384048"/>
+            <a:ext cx="11185855" cy="292608"/>
+          </a:xfrm>
+          <a:prstGeom prst="rect">
+            <a:avLst/>
+          </a:prstGeom>
+          <a:noFill/>
+          <a:ln/>
+        </p:spPr>
+        <p:txBody>
+          <a:bodyPr wrap="square" lIns="0" tIns="0" rIns="0" bIns="0" rtlCol="0" anchor="ctr"/>
+          <a:lstStyle/>
+          <a:p>
+            <a:pPr indent="0" marL="0">
+              <a:buNone/>
+            </a:pPr>
+            <a:r>
+              <a:rPr lang="en-US" sz="1250" b="1" spc="200" kern="0" dirty="0">
+                <a:solidFill>
+                  <a:srgbClr val="0B5E34"/>
+                </a:solidFill>
+                <a:latin typeface="Calibri" pitchFamily="34" charset="0"/>
+                <a:ea typeface="Calibri" pitchFamily="34" charset="-122"/>
+                <a:cs typeface="Calibri" pitchFamily="34" charset="-120"/>
+              </a:rPr>
+              <a:t>EMERGING TREND</a:t>
+            </a:r>
+            <a:endParaRPr lang="en-US" sz="1250" dirty="0"/>
+          </a:p>
+        </p:txBody>
+      </p:sp>
+      <p:sp>
+        <p:nvSpPr>
+          <p:cNvPr id="3" name="Text 1"/>
+          <p:cNvSpPr/>
+          <p:nvPr/>
+        </p:nvSpPr>
+        <p:spPr>
+          <a:xfrm>
+            <a:off x="502920" y="658368"/>
+            <a:ext cx="11185855" cy="640080"/>
+          </a:xfrm>
+          <a:prstGeom prst="rect">
+            <a:avLst/>
+          </a:prstGeom>
+          <a:noFill/>
+          <a:ln/>
+        </p:spPr>
+        <p:txBody>
+          <a:bodyPr wrap="square" lIns="0" tIns="0" rIns="0" bIns="0" rtlCol="0" anchor="ctr"/>
+          <a:lstStyle/>
+          <a:p>
+            <a:pPr indent="0" marL="0">
+              <a:buNone/>
+            </a:pPr>
+            <a:r>
+              <a:rPr lang="en-US" sz="3000" b="1" dirty="0">
+                <a:solidFill>
+                  <a:srgbClr val="17231C"/>
+                </a:solidFill>
+                <a:latin typeface="Cambria" pitchFamily="34" charset="0"/>
+                <a:ea typeface="Cambria" pitchFamily="34" charset="-122"/>
+                <a:cs typeface="Cambria" pitchFamily="34" charset="-120"/>
+              </a:rPr>
+              <a:t>AI: the double-edged sword</a:t>
+            </a:r>
+            <a:endParaRPr lang="en-US" sz="3000" dirty="0"/>
+          </a:p>
+        </p:txBody>
+      </p:sp>
+      <p:sp>
+        <p:nvSpPr>
+          <p:cNvPr id="4" name="Shape 2"/>
+          <p:cNvSpPr/>
+          <p:nvPr/>
+        </p:nvSpPr>
+        <p:spPr>
+          <a:xfrm>
+            <a:off x="502920" y="1691640"/>
+            <a:ext cx="3456432" cy="3977640"/>
+          </a:xfrm>
+          <a:prstGeom prst="roundRect">
+            <a:avLst>
+              <a:gd name="adj" fmla="val 2646"/>
+            </a:avLst>
+          </a:prstGeom>
+          <a:solidFill>
+            <a:srgbClr val="F1F5F2"/>
+          </a:solidFill>
+          <a:ln/>
+          <a:effectLst>
+            <a:outerShdw sx="100000" sy="100000" kx="0" ky="0" algn="bl" rotWithShape="0" blurRad="76200" dist="25400" dir="5400000">
+              <a:srgbClr val="1B2B22">
+                <a:alpha val="14000"/>
+              </a:srgbClr>
+            </a:outerShdw>
+          </a:effectLst>
+        </p:spPr>
+      </p:sp>
+      <p:sp>
+        <p:nvSpPr>
+          <p:cNvPr id="5" name="Shape 3"/>
+          <p:cNvSpPr/>
+          <p:nvPr/>
+        </p:nvSpPr>
+        <p:spPr>
+          <a:xfrm>
+            <a:off x="740664" y="1929384"/>
+            <a:ext cx="566928" cy="566928"/>
+          </a:xfrm>
+          <a:prstGeom prst="ellipse">
+            <a:avLst/>
+          </a:prstGeom>
+          <a:solidFill>
+            <a:srgbClr val="E8A93A"/>
+          </a:solidFill>
+          <a:ln/>
+        </p:spPr>
+      </p:sp>
+      <p:pic>
+        <p:nvPicPr>
+          <p:cNvPr id="6" name="Image 0" descr="preencoded.png">    </p:cNvPr>
+          <p:cNvPicPr>
+            <a:picLocks noChangeAspect="1"/>
+          </p:cNvPicPr>
+          <p:nvPr/>
+        </p:nvPicPr>
+        <p:blipFill>
+          <a:blip r:embed="rId1"/>
+          <a:stretch>
+            <a:fillRect/>
+          </a:stretch>
+        </p:blipFill>
+        <p:spPr>
+          <a:xfrm>
+            <a:off x="876727" y="2065447"/>
+            <a:ext cx="294803" cy="294803"/>
+          </a:xfrm>
+          <a:prstGeom prst="rect">
+            <a:avLst/>
+          </a:prstGeom>
+        </p:spPr>
+      </p:pic>
+      <p:sp>
+        <p:nvSpPr>
+          <p:cNvPr id="7" name="Text 4"/>
+          <p:cNvSpPr/>
+          <p:nvPr/>
+        </p:nvSpPr>
+        <p:spPr>
+          <a:xfrm>
+            <a:off x="1435608" y="1929384"/>
+            <a:ext cx="2359152" cy="566928"/>
+          </a:xfrm>
+          <a:prstGeom prst="rect">
+            <a:avLst/>
+          </a:prstGeom>
+          <a:noFill/>
+          <a:ln/>
+        </p:spPr>
+        <p:txBody>
+          <a:bodyPr wrap="square" lIns="0" tIns="0" rIns="0" bIns="0" rtlCol="0" anchor="ctr"/>
+          <a:lstStyle/>
+          <a:p>
+            <a:pPr indent="0" marL="0">
+              <a:buNone/>
+            </a:pPr>
+            <a:r>
+              <a:rPr lang="en-US" sz="1800" b="1" dirty="0">
+                <a:solidFill>
+                  <a:srgbClr val="17231C"/>
+                </a:solidFill>
+                <a:latin typeface="Cambria" pitchFamily="34" charset="0"/>
+                <a:ea typeface="Cambria" pitchFamily="34" charset="-122"/>
+                <a:cs typeface="Cambria" pitchFamily="34" charset="-120"/>
+              </a:rPr>
+              <a:t>Attack</a:t>
+            </a:r>
+            <a:endParaRPr lang="en-US" sz="1800" dirty="0"/>
+          </a:p>
+        </p:txBody>
+      </p:sp>
+      <p:sp>
+        <p:nvSpPr>
+          <p:cNvPr id="8" name="Text 5"/>
+          <p:cNvSpPr/>
+          <p:nvPr/>
+        </p:nvSpPr>
+        <p:spPr>
+          <a:xfrm>
+            <a:off x="740664" y="2743200"/>
+            <a:ext cx="2999232" cy="2743200"/>
+          </a:xfrm>
+          <a:prstGeom prst="rect">
+            <a:avLst/>
+          </a:prstGeom>
+          <a:noFill/>
+          <a:ln/>
+        </p:spPr>
+        <p:txBody>
+          <a:bodyPr wrap="square" lIns="0" tIns="0" rIns="0" bIns="0" rtlCol="0" anchor="t"/>
+          <a:lstStyle/>
+          <a:p>
+            <a:pPr marL="228600" indent="-228600">
+              <a:lnSpc>
+                <a:spcPts val="1472"/>
+              </a:lnSpc>
+              <a:spcAft>
+                <a:spcPts val="1200"/>
+              </a:spcAft>
+              <a:buSzPct val="100000"/>
+              <a:buChar char="▪"/>
+            </a:pPr>
+            <a:r>
+              <a:rPr lang="en-US" sz="1150" dirty="0">
+                <a:solidFill>
+                  <a:srgbClr val="17231C"/>
+                </a:solidFill>
+                <a:latin typeface="Calibri" pitchFamily="34" charset="0"/>
+                <a:ea typeface="Calibri" pitchFamily="34" charset="-122"/>
+                <a:cs typeface="Calibri" pitchFamily="34" charset="-120"/>
+              </a:rPr>
+              <a:t>Deepfake video beats KYC liveness checks at onboarding</a:t>
+            </a:r>
+            <a:endParaRPr lang="en-US" sz="1150" dirty="0"/>
+          </a:p>
+          <a:p>
+            <a:pPr marL="228600" indent="-228600">
+              <a:lnSpc>
+                <a:spcPts val="1472"/>
+              </a:lnSpc>
+              <a:spcAft>
+                <a:spcPts val="1200"/>
+              </a:spcAft>
+              <a:buSzPct val="100000"/>
+              <a:buChar char="▪"/>
+            </a:pPr>
+            <a:r>
+              <a:rPr lang="en-US" sz="1150" dirty="0">
+                <a:solidFill>
+                  <a:srgbClr val="17231C"/>
+                </a:solidFill>
+                <a:latin typeface="Calibri" pitchFamily="34" charset="0"/>
+                <a:ea typeface="Calibri" pitchFamily="34" charset="-122"/>
+                <a:cs typeface="Calibri" pitchFamily="34" charset="-120"/>
+              </a:rPr>
+              <a:t>AI-cloned voices impersonate bank staff (3 sec of audio → 85% match)</a:t>
+            </a:r>
+            <a:endParaRPr lang="en-US" sz="1150" dirty="0"/>
+          </a:p>
+          <a:p>
+            <a:pPr marL="228600" indent="-228600">
+              <a:lnSpc>
+                <a:spcPts val="1472"/>
+              </a:lnSpc>
+              <a:spcAft>
+                <a:spcPts val="1200"/>
+              </a:spcAft>
+              <a:buSzPct val="100000"/>
+              <a:buChar char="▪"/>
+            </a:pPr>
+            <a:r>
+              <a:rPr lang="en-US" sz="1150" dirty="0">
+                <a:solidFill>
+                  <a:srgbClr val="17231C"/>
+                </a:solidFill>
+                <a:latin typeface="Calibri" pitchFamily="34" charset="0"/>
+                <a:ea typeface="Calibri" pitchFamily="34" charset="-122"/>
+                <a:cs typeface="Calibri" pitchFamily="34" charset="-120"/>
+              </a:rPr>
+              <a:t>Generative AI builds synthetic identities from stolen data</a:t>
+            </a:r>
+            <a:endParaRPr lang="en-US" sz="1150" dirty="0"/>
+          </a:p>
+          <a:p>
+            <a:pPr marL="228600" indent="-228600">
+              <a:lnSpc>
+                <a:spcPts val="1472"/>
+              </a:lnSpc>
+              <a:spcAft>
+                <a:spcPts val="1200"/>
+              </a:spcAft>
+              <a:buSzPct val="100000"/>
+              <a:buChar char="▪"/>
+            </a:pPr>
+            <a:r>
+              <a:rPr lang="en-US" sz="1150" dirty="0">
+                <a:solidFill>
+                  <a:srgbClr val="17231C"/>
+                </a:solidFill>
+                <a:latin typeface="Calibri" pitchFamily="34" charset="0"/>
+                <a:ea typeface="Calibri" pitchFamily="34" charset="-122"/>
+                <a:cs typeface="Calibri" pitchFamily="34" charset="-120"/>
+              </a:rPr>
+              <a:t>Deepfake incidents in Africa up 7x, Q2→Q4 2024</a:t>
+            </a:r>
+            <a:endParaRPr lang="en-US" sz="1150" dirty="0"/>
+          </a:p>
+        </p:txBody>
+      </p:sp>
+      <p:sp>
+        <p:nvSpPr>
+          <p:cNvPr id="9" name="Shape 6"/>
+          <p:cNvSpPr/>
+          <p:nvPr/>
+        </p:nvSpPr>
+        <p:spPr>
+          <a:xfrm>
+            <a:off x="4325112" y="1691640"/>
+            <a:ext cx="3456432" cy="3977640"/>
+          </a:xfrm>
+          <a:prstGeom prst="roundRect">
+            <a:avLst>
+              <a:gd name="adj" fmla="val 2646"/>
+            </a:avLst>
+          </a:prstGeom>
+          <a:solidFill>
+            <a:srgbClr val="F1F5F2"/>
+          </a:solidFill>
+          <a:ln/>
+          <a:effectLst>
+            <a:outerShdw sx="100000" sy="100000" kx="0" ky="0" algn="bl" rotWithShape="0" blurRad="76200" dist="25400" dir="5400000">
+              <a:srgbClr val="1B2B22">
+                <a:alpha val="14000"/>
+              </a:srgbClr>
+            </a:outerShdw>
+          </a:effectLst>
+        </p:spPr>
+      </p:sp>
+      <p:sp>
+        <p:nvSpPr>
+          <p:cNvPr id="10" name="Shape 7"/>
+          <p:cNvSpPr/>
+          <p:nvPr/>
+        </p:nvSpPr>
+        <p:spPr>
+          <a:xfrm>
+            <a:off x="4562856" y="1929384"/>
+            <a:ext cx="566928" cy="566928"/>
+          </a:xfrm>
+          <a:prstGeom prst="ellipse">
+            <a:avLst/>
+          </a:prstGeom>
+          <a:solidFill>
+            <a:srgbClr val="0B5E34"/>
+          </a:solidFill>
+          <a:ln/>
+        </p:spPr>
+      </p:sp>
+      <p:pic>
+        <p:nvPicPr>
+          <p:cNvPr id="11" name="Image 1" descr="preencoded.png">    </p:cNvPr>
+          <p:cNvPicPr>
+            <a:picLocks noChangeAspect="1"/>
+          </p:cNvPicPr>
+          <p:nvPr/>
+        </p:nvPicPr>
+        <p:blipFill>
+          <a:blip r:embed="rId2"/>
+          <a:stretch>
+            <a:fillRect/>
+          </a:stretch>
+        </p:blipFill>
+        <p:spPr>
+          <a:xfrm>
+            <a:off x="4698919" y="2065447"/>
+            <a:ext cx="294803" cy="294803"/>
+          </a:xfrm>
+          <a:prstGeom prst="rect">
+            <a:avLst/>
+          </a:prstGeom>
+        </p:spPr>
+      </p:pic>
+      <p:sp>
+        <p:nvSpPr>
+          <p:cNvPr id="12" name="Text 8"/>
+          <p:cNvSpPr/>
+          <p:nvPr/>
+        </p:nvSpPr>
+        <p:spPr>
+          <a:xfrm>
+            <a:off x="5257800" y="1929384"/>
+            <a:ext cx="2359152" cy="566928"/>
+          </a:xfrm>
+          <a:prstGeom prst="rect">
+            <a:avLst/>
+          </a:prstGeom>
+          <a:noFill/>
+          <a:ln/>
+        </p:spPr>
+        <p:txBody>
+          <a:bodyPr wrap="square" lIns="0" tIns="0" rIns="0" bIns="0" rtlCol="0" anchor="ctr"/>
+          <a:lstStyle/>
+          <a:p>
+            <a:pPr indent="0" marL="0">
+              <a:buNone/>
+            </a:pPr>
+            <a:r>
+              <a:rPr lang="en-US" sz="1800" b="1" dirty="0">
+                <a:solidFill>
+                  <a:srgbClr val="17231C"/>
+                </a:solidFill>
+                <a:latin typeface="Cambria" pitchFamily="34" charset="0"/>
+                <a:ea typeface="Cambria" pitchFamily="34" charset="-122"/>
+                <a:cs typeface="Cambria" pitchFamily="34" charset="-120"/>
+              </a:rPr>
+              <a:t>Defense</a:t>
+            </a:r>
+            <a:endParaRPr lang="en-US" sz="1800" dirty="0"/>
+          </a:p>
+        </p:txBody>
+      </p:sp>
+      <p:sp>
+        <p:nvSpPr>
+          <p:cNvPr id="13" name="Text 9"/>
+          <p:cNvSpPr/>
+          <p:nvPr/>
+        </p:nvSpPr>
+        <p:spPr>
+          <a:xfrm>
+            <a:off x="4562856" y="2743200"/>
+            <a:ext cx="2999232" cy="2743200"/>
+          </a:xfrm>
+          <a:prstGeom prst="rect">
+            <a:avLst/>
+          </a:prstGeom>
+          <a:noFill/>
+          <a:ln/>
+        </p:spPr>
+        <p:txBody>
+          <a:bodyPr wrap="square" lIns="0" tIns="0" rIns="0" bIns="0" rtlCol="0" anchor="t"/>
+          <a:lstStyle/>
+          <a:p>
+            <a:pPr marL="228600" indent="-228600">
+              <a:lnSpc>
+                <a:spcPts val="1472"/>
+              </a:lnSpc>
+              <a:spcAft>
+                <a:spcPts val="1200"/>
+              </a:spcAft>
+              <a:buSzPct val="100000"/>
+              <a:buChar char="▪"/>
+            </a:pPr>
+            <a:r>
+              <a:rPr lang="en-US" sz="1150" dirty="0">
+                <a:solidFill>
+                  <a:srgbClr val="17231C"/>
+                </a:solidFill>
+                <a:latin typeface="Calibri" pitchFamily="34" charset="0"/>
+                <a:ea typeface="Calibri" pitchFamily="34" charset="-122"/>
+                <a:cs typeface="Calibri" pitchFamily="34" charset="-120"/>
+              </a:rPr>
+              <a:t>87.5% of Nigerian fintechs now run AI for fraud detection</a:t>
+            </a:r>
+            <a:endParaRPr lang="en-US" sz="1150" dirty="0"/>
+          </a:p>
+          <a:p>
+            <a:pPr marL="228600" indent="-228600">
+              <a:lnSpc>
+                <a:spcPts val="1472"/>
+              </a:lnSpc>
+              <a:spcAft>
+                <a:spcPts val="1200"/>
+              </a:spcAft>
+              <a:buSzPct val="100000"/>
+              <a:buChar char="▪"/>
+            </a:pPr>
+            <a:r>
+              <a:rPr lang="en-US" sz="1150" dirty="0">
+                <a:solidFill>
+                  <a:srgbClr val="17231C"/>
+                </a:solidFill>
+                <a:latin typeface="Calibri" pitchFamily="34" charset="0"/>
+                <a:ea typeface="Calibri" pitchFamily="34" charset="-122"/>
+                <a:cs typeface="Calibri" pitchFamily="34" charset="-120"/>
+              </a:rPr>
+              <a:t>CBN mandates AI-powered transaction monitoring within 2 years</a:t>
+            </a:r>
+            <a:endParaRPr lang="en-US" sz="1150" dirty="0"/>
+          </a:p>
+          <a:p>
+            <a:pPr marL="228600" indent="-228600">
+              <a:lnSpc>
+                <a:spcPts val="1472"/>
+              </a:lnSpc>
+              <a:spcAft>
+                <a:spcPts val="1200"/>
+              </a:spcAft>
+              <a:buSzPct val="100000"/>
+              <a:buChar char="▪"/>
+            </a:pPr>
+            <a:r>
+              <a:rPr lang="en-US" sz="1150" dirty="0">
+                <a:solidFill>
+                  <a:srgbClr val="17231C"/>
+                </a:solidFill>
+                <a:latin typeface="Calibri" pitchFamily="34" charset="0"/>
+                <a:ea typeface="Calibri" pitchFamily="34" charset="-122"/>
+                <a:cs typeface="Calibri" pitchFamily="34" charset="-120"/>
+              </a:rPr>
+              <a:t>Target: cut fraud losses 70% by 2028</a:t>
+            </a:r>
+            <a:endParaRPr lang="en-US" sz="1150" dirty="0"/>
+          </a:p>
+          <a:p>
+            <a:pPr marL="228600" indent="-228600">
+              <a:lnSpc>
+                <a:spcPts val="1472"/>
+              </a:lnSpc>
+              <a:spcAft>
+                <a:spcPts val="1200"/>
+              </a:spcAft>
+              <a:buSzPct val="100000"/>
+              <a:buChar char="▪"/>
+            </a:pPr>
+            <a:r>
+              <a:rPr lang="en-US" sz="1150" dirty="0">
+                <a:solidFill>
+                  <a:srgbClr val="17231C"/>
+                </a:solidFill>
+                <a:latin typeface="Calibri" pitchFamily="34" charset="0"/>
+                <a:ea typeface="Calibri" pitchFamily="34" charset="-122"/>
+                <a:cs typeface="Calibri" pitchFamily="34" charset="-120"/>
+              </a:rPr>
+              <a:t>Reality check: reported false-negative rates as high as ~90%</a:t>
+            </a:r>
+            <a:endParaRPr lang="en-US" sz="1150" dirty="0"/>
+          </a:p>
+        </p:txBody>
+      </p:sp>
+      <p:sp>
+        <p:nvSpPr>
+          <p:cNvPr id="14" name="Shape 10"/>
+          <p:cNvSpPr/>
+          <p:nvPr/>
+        </p:nvSpPr>
+        <p:spPr>
+          <a:xfrm>
+            <a:off x="8147304" y="1691640"/>
+            <a:ext cx="3456432" cy="3977640"/>
+          </a:xfrm>
+          <a:prstGeom prst="roundRect">
+            <a:avLst>
+              <a:gd name="adj" fmla="val 2646"/>
+            </a:avLst>
+          </a:prstGeom>
+          <a:solidFill>
+            <a:srgbClr val="F1F5F2"/>
+          </a:solidFill>
+          <a:ln/>
+          <a:effectLst>
+            <a:outerShdw sx="100000" sy="100000" kx="0" ky="0" algn="bl" rotWithShape="0" blurRad="76200" dist="25400" dir="5400000">
+              <a:srgbClr val="1B2B22">
+                <a:alpha val="14000"/>
+              </a:srgbClr>
+            </a:outerShdw>
+          </a:effectLst>
+        </p:spPr>
+      </p:sp>
+      <p:sp>
+        <p:nvSpPr>
+          <p:cNvPr id="15" name="Shape 11"/>
+          <p:cNvSpPr/>
+          <p:nvPr/>
+        </p:nvSpPr>
+        <p:spPr>
+          <a:xfrm>
+            <a:off x="8385048" y="1929384"/>
+            <a:ext cx="566928" cy="566928"/>
+          </a:xfrm>
+          <a:prstGeom prst="ellipse">
+            <a:avLst/>
+          </a:prstGeom>
+          <a:solidFill>
+            <a:srgbClr val="146B47"/>
+          </a:solidFill>
+          <a:ln/>
+        </p:spPr>
+      </p:sp>
+      <p:pic>
+        <p:nvPicPr>
+          <p:cNvPr id="16" name="Image 2" descr="preencoded.png">    </p:cNvPr>
+          <p:cNvPicPr>
+            <a:picLocks noChangeAspect="1"/>
+          </p:cNvPicPr>
+          <p:nvPr/>
+        </p:nvPicPr>
+        <p:blipFill>
+          <a:blip r:embed="rId3"/>
+          <a:stretch>
+            <a:fillRect/>
+          </a:stretch>
+        </p:blipFill>
+        <p:spPr>
+          <a:xfrm>
+            <a:off x="8521111" y="2065447"/>
+            <a:ext cx="294803" cy="294803"/>
+          </a:xfrm>
+          <a:prstGeom prst="rect">
+            <a:avLst/>
+          </a:prstGeom>
+        </p:spPr>
+      </p:pic>
+      <p:sp>
+        <p:nvSpPr>
+          <p:cNvPr id="17" name="Text 12"/>
+          <p:cNvSpPr/>
+          <p:nvPr/>
+        </p:nvSpPr>
+        <p:spPr>
+          <a:xfrm>
+            <a:off x="9079992" y="1929384"/>
+            <a:ext cx="2359152" cy="566928"/>
+          </a:xfrm>
+          <a:prstGeom prst="rect">
+            <a:avLst/>
+          </a:prstGeom>
+          <a:noFill/>
+          <a:ln/>
+        </p:spPr>
+        <p:txBody>
+          <a:bodyPr wrap="square" lIns="0" tIns="0" rIns="0" bIns="0" rtlCol="0" anchor="ctr"/>
+          <a:lstStyle/>
+          <a:p>
+            <a:pPr indent="0" marL="0">
+              <a:buNone/>
+            </a:pPr>
+            <a:r>
+              <a:rPr lang="en-US" sz="1800" b="1" dirty="0">
+                <a:solidFill>
+                  <a:srgbClr val="17231C"/>
+                </a:solidFill>
+                <a:latin typeface="Cambria" pitchFamily="34" charset="0"/>
+                <a:ea typeface="Cambria" pitchFamily="34" charset="-122"/>
+                <a:cs typeface="Cambria" pitchFamily="34" charset="-120"/>
+              </a:rPr>
+              <a:t>Governance</a:t>
+            </a:r>
+            <a:endParaRPr lang="en-US" sz="1800" dirty="0"/>
+          </a:p>
+        </p:txBody>
+      </p:sp>
+      <p:sp>
+        <p:nvSpPr>
+          <p:cNvPr id="18" name="Text 13"/>
+          <p:cNvSpPr/>
+          <p:nvPr/>
+        </p:nvSpPr>
+        <p:spPr>
+          <a:xfrm>
+            <a:off x="8385048" y="2743200"/>
+            <a:ext cx="2999232" cy="2743200"/>
+          </a:xfrm>
+          <a:prstGeom prst="rect">
+            <a:avLst/>
+          </a:prstGeom>
+          <a:noFill/>
+          <a:ln/>
+        </p:spPr>
+        <p:txBody>
+          <a:bodyPr wrap="square" lIns="0" tIns="0" rIns="0" bIns="0" rtlCol="0" anchor="t"/>
+          <a:lstStyle/>
+          <a:p>
+            <a:pPr marL="228600" indent="-228600">
+              <a:lnSpc>
+                <a:spcPts val="1472"/>
+              </a:lnSpc>
+              <a:spcAft>
+                <a:spcPts val="1200"/>
+              </a:spcAft>
+              <a:buSzPct val="100000"/>
+              <a:buChar char="▪"/>
+            </a:pPr>
+            <a:r>
+              <a:rPr lang="en-US" sz="1150" dirty="0">
+                <a:solidFill>
+                  <a:srgbClr val="17231C"/>
+                </a:solidFill>
+                <a:latin typeface="Calibri" pitchFamily="34" charset="0"/>
+                <a:ea typeface="Calibri" pitchFamily="34" charset="-122"/>
+                <a:cs typeface="Calibri" pitchFamily="34" charset="-120"/>
+              </a:rPr>
+              <a:t>National AI Strategy (NAIS) published Sept 2025 — 5-year plan</a:t>
+            </a:r>
+            <a:endParaRPr lang="en-US" sz="1150" dirty="0"/>
+          </a:p>
+          <a:p>
+            <a:pPr marL="228600" indent="-228600">
+              <a:lnSpc>
+                <a:spcPts val="1472"/>
+              </a:lnSpc>
+              <a:spcAft>
+                <a:spcPts val="1200"/>
+              </a:spcAft>
+              <a:buSzPct val="100000"/>
+              <a:buChar char="▪"/>
+            </a:pPr>
+            <a:r>
+              <a:rPr lang="en-US" sz="1150" dirty="0">
+                <a:solidFill>
+                  <a:srgbClr val="17231C"/>
+                </a:solidFill>
+                <a:latin typeface="Calibri" pitchFamily="34" charset="0"/>
+                <a:ea typeface="Calibri" pitchFamily="34" charset="-122"/>
+                <a:cs typeface="Calibri" pitchFamily="34" charset="-120"/>
+              </a:rPr>
+              <a:t>New National AI Trust: 10 experts + 2 ministers</a:t>
+            </a:r>
+            <a:endParaRPr lang="en-US" sz="1150" dirty="0"/>
+          </a:p>
+          <a:p>
+            <a:pPr marL="228600" indent="-228600">
+              <a:lnSpc>
+                <a:spcPts val="1472"/>
+              </a:lnSpc>
+              <a:spcAft>
+                <a:spcPts val="1200"/>
+              </a:spcAft>
+              <a:buSzPct val="100000"/>
+              <a:buChar char="▪"/>
+            </a:pPr>
+            <a:r>
+              <a:rPr lang="en-US" sz="1150" dirty="0">
+                <a:solidFill>
+                  <a:srgbClr val="17231C"/>
+                </a:solidFill>
+                <a:latin typeface="Calibri" pitchFamily="34" charset="0"/>
+                <a:ea typeface="Calibri" pitchFamily="34" charset="-122"/>
+                <a:cs typeface="Calibri" pitchFamily="34" charset="-120"/>
+              </a:rPr>
+              <a:t>NCAIR + research grants fund homegrown AI startups</a:t>
+            </a:r>
+            <a:endParaRPr lang="en-US" sz="1150" dirty="0"/>
+          </a:p>
+          <a:p>
+            <a:pPr marL="228600" indent="-228600">
+              <a:lnSpc>
+                <a:spcPts val="1472"/>
+              </a:lnSpc>
+              <a:spcAft>
+                <a:spcPts val="1200"/>
+              </a:spcAft>
+              <a:buSzPct val="100000"/>
+              <a:buChar char="▪"/>
+            </a:pPr>
+            <a:r>
+              <a:rPr lang="en-US" sz="1150" dirty="0">
+                <a:solidFill>
+                  <a:srgbClr val="17231C"/>
+                </a:solidFill>
+                <a:latin typeface="Calibri" pitchFamily="34" charset="0"/>
+                <a:ea typeface="Calibri" pitchFamily="34" charset="-122"/>
+                <a:cs typeface="Calibri" pitchFamily="34" charset="-120"/>
+              </a:rPr>
+              <a:t>Same generative tools, both sides of the fight</a:t>
+            </a:r>
+            <a:endParaRPr lang="en-US" sz="1150" dirty="0"/>
+          </a:p>
+        </p:txBody>
+      </p:sp>
+      <p:sp>
+        <p:nvSpPr>
+          <p:cNvPr id="19" name="Text 14"/>
+          <p:cNvSpPr/>
+          <p:nvPr/>
+        </p:nvSpPr>
+        <p:spPr>
+          <a:xfrm>
+            <a:off x="502920" y="5797296"/>
+            <a:ext cx="11185855" cy="365760"/>
+          </a:xfrm>
+          <a:prstGeom prst="rect">
+            <a:avLst/>
+          </a:prstGeom>
+          <a:noFill/>
+          <a:ln/>
+        </p:spPr>
+        <p:txBody>
+          <a:bodyPr wrap="square" lIns="0" tIns="0" rIns="0" bIns="0" rtlCol="0" anchor="ctr"/>
+          <a:lstStyle/>
+          <a:p>
+            <a:pPr indent="0" marL="0">
+              <a:buNone/>
+            </a:pPr>
+            <a:r>
+              <a:rPr lang="en-US" sz="1250" b="1" i="1" dirty="0">
+                <a:solidFill>
+                  <a:srgbClr val="0B5E34"/>
+                </a:solidFill>
+                <a:latin typeface="Calibri" pitchFamily="34" charset="0"/>
+                <a:ea typeface="Calibri" pitchFamily="34" charset="-122"/>
+                <a:cs typeface="Calibri" pitchFamily="34" charset="-120"/>
+              </a:rPr>
+              <a:t>AI-driven phishing and impersonation are projected to intensify ~70% in 2026 — the fastest-moving trend in this briefing.</a:t>
+            </a:r>
+            <a:endParaRPr lang="en-US" sz="1250" dirty="0"/>
+          </a:p>
+        </p:txBody>
+      </p:sp>
+      <p:sp>
+        <p:nvSpPr>
+          <p:cNvPr id="20" name="Text 15"/>
+          <p:cNvSpPr/>
+          <p:nvPr/>
+        </p:nvSpPr>
+        <p:spPr>
+          <a:xfrm>
+            <a:off x="11368735" y="6446520"/>
+            <a:ext cx="457200" cy="274320"/>
+          </a:xfrm>
+          <a:prstGeom prst="rect">
+            <a:avLst/>
+          </a:prstGeom>
+          <a:noFill/>
+          <a:ln/>
+        </p:spPr>
+        <p:txBody>
+          <a:bodyPr wrap="square" lIns="0" tIns="0" rIns="0" bIns="0" rtlCol="0" anchor="ctr"/>
+          <a:lstStyle/>
+          <a:p>
+            <a:pPr algn="r" indent="0" marL="0">
+              <a:buNone/>
+            </a:pPr>
+            <a:r>
+              <a:rPr lang="en-US" sz="1000" dirty="0">
+                <a:solidFill>
+                  <a:srgbClr val="5E6E66"/>
+                </a:solidFill>
+                <a:latin typeface="Calibri" pitchFamily="34" charset="0"/>
+                <a:ea typeface="Calibri" pitchFamily="34" charset="-122"/>
+                <a:cs typeface="Calibri" pitchFamily="34" charset="-120"/>
+              </a:rPr>
+              <a:t>08</a:t>
+            </a:r>
+            <a:endParaRPr lang="en-US" sz="1000" dirty="0"/>
+          </a:p>
+        </p:txBody>
+      </p:sp>
+    </p:spTree>
+  </p:cSld>
+  <p:clrMapOvr>
+    <a:masterClrMapping/>
+  </p:clrMapOvr>
+</p:sld>
+</file>
+
+<file path=ppt/slides/slide9.xml><?xml version="1.0" encoding="utf-8"?>
+<p:sld xmlns:a="http://schemas.openxmlformats.org/drawingml/2006/main" xmlns:r="http://schemas.openxmlformats.org/officeDocument/2006/relationships" xmlns:p="http://schemas.openxmlformats.org/presentationml/2006/main">
+  <p:cSld name="Slide 9">
+    <p:bg>
+      <p:bgPr>
+        <a:solidFill>
           <a:srgbClr val="073821"/>
         </a:solidFill>
       </p:bgPr>
@@ -11535,798 +13418,6 @@
               <a:rPr lang="en-US" sz="1000" dirty="0">
                 <a:solidFill>
                   <a:srgbClr val="BFD8C9"/>
-                </a:solidFill>
-                <a:latin typeface="Calibri" pitchFamily="34" charset="0"/>
-                <a:ea typeface="Calibri" pitchFamily="34" charset="-122"/>
-                <a:cs typeface="Calibri" pitchFamily="34" charset="-120"/>
-              </a:rPr>
-              <a:t>08</a:t>
-            </a:r>
-            <a:endParaRPr lang="en-US" sz="1000" dirty="0"/>
-          </a:p>
-        </p:txBody>
-      </p:sp>
-    </p:spTree>
-  </p:cSld>
-  <p:clrMapOvr>
-    <a:masterClrMapping/>
-  </p:clrMapOvr>
-</p:sld>
-</file>
-
-<file path=ppt/slides/slide9.xml><?xml version="1.0" encoding="utf-8"?>
-<p:sld xmlns:a="http://schemas.openxmlformats.org/drawingml/2006/main" xmlns:r="http://schemas.openxmlformats.org/officeDocument/2006/relationships" xmlns:p="http://schemas.openxmlformats.org/presentationml/2006/main">
-  <p:cSld name="Slide 9">
-    <p:bg>
-      <p:bgPr>
-        <a:solidFill>
-          <a:srgbClr val="FFFFFF"/>
-        </a:solidFill>
-      </p:bgPr>
-    </p:bg>
-    <p:spTree>
-      <p:nvGrpSpPr>
-        <p:cNvPr id="1" name=""/>
-        <p:cNvGrpSpPr/>
-        <p:nvPr/>
-      </p:nvGrpSpPr>
-      <p:grpSpPr>
-        <a:xfrm>
-          <a:off x="0" y="0"/>
-          <a:ext cx="0" cy="0"/>
-          <a:chOff x="0" y="0"/>
-          <a:chExt cx="0" cy="0"/>
-        </a:xfrm>
-      </p:grpSpPr>
-      <p:sp>
-        <p:nvSpPr>
-          <p:cNvPr id="2" name="Text 0"/>
-          <p:cNvSpPr/>
-          <p:nvPr/>
-        </p:nvSpPr>
-        <p:spPr>
-          <a:xfrm>
-            <a:off x="502920" y="384048"/>
-            <a:ext cx="11185855" cy="292608"/>
-          </a:xfrm>
-          <a:prstGeom prst="rect">
-            <a:avLst/>
-          </a:prstGeom>
-          <a:noFill/>
-          <a:ln/>
-        </p:spPr>
-        <p:txBody>
-          <a:bodyPr wrap="square" lIns="0" tIns="0" rIns="0" bIns="0" rtlCol="0" anchor="ctr"/>
-          <a:lstStyle/>
-          <a:p>
-            <a:pPr indent="0" marL="0">
-              <a:buNone/>
-            </a:pPr>
-            <a:r>
-              <a:rPr lang="en-US" sz="1250" b="1" spc="200" kern="0" dirty="0">
-                <a:solidFill>
-                  <a:srgbClr val="0B5E34"/>
-                </a:solidFill>
-                <a:latin typeface="Calibri" pitchFamily="34" charset="0"/>
-                <a:ea typeface="Calibri" pitchFamily="34" charset="-122"/>
-                <a:cs typeface="Calibri" pitchFamily="34" charset="-120"/>
-              </a:rPr>
-              <a:t>ATTACK SURFACE</a:t>
-            </a:r>
-            <a:endParaRPr lang="en-US" sz="1250" dirty="0"/>
-          </a:p>
-        </p:txBody>
-      </p:sp>
-      <p:sp>
-        <p:nvSpPr>
-          <p:cNvPr id="3" name="Text 1"/>
-          <p:cNvSpPr/>
-          <p:nvPr/>
-        </p:nvSpPr>
-        <p:spPr>
-          <a:xfrm>
-            <a:off x="502920" y="658368"/>
-            <a:ext cx="11185855" cy="640080"/>
-          </a:xfrm>
-          <a:prstGeom prst="rect">
-            <a:avLst/>
-          </a:prstGeom>
-          <a:noFill/>
-          <a:ln/>
-        </p:spPr>
-        <p:txBody>
-          <a:bodyPr wrap="square" lIns="0" tIns="0" rIns="0" bIns="0" rtlCol="0" anchor="ctr"/>
-          <a:lstStyle/>
-          <a:p>
-            <a:pPr indent="0" marL="0">
-              <a:buNone/>
-            </a:pPr>
-            <a:r>
-              <a:rPr lang="en-US" sz="3000" b="1" dirty="0">
-                <a:solidFill>
-                  <a:srgbClr val="17231C"/>
-                </a:solidFill>
-                <a:latin typeface="Cambria" pitchFamily="34" charset="0"/>
-                <a:ea typeface="Cambria" pitchFamily="34" charset="-122"/>
-                <a:cs typeface="Cambria" pitchFamily="34" charset="-120"/>
-              </a:rPr>
-              <a:t>Who’s in the crosshairs</a:t>
-            </a:r>
-            <a:endParaRPr lang="en-US" sz="3000" dirty="0"/>
-          </a:p>
-        </p:txBody>
-      </p:sp>
-      <p:sp>
-        <p:nvSpPr>
-          <p:cNvPr id="4" name="Shape 2"/>
-          <p:cNvSpPr/>
-          <p:nvPr/>
-        </p:nvSpPr>
-        <p:spPr>
-          <a:xfrm>
-            <a:off x="502920" y="1645920"/>
-            <a:ext cx="5349240" cy="1691640"/>
-          </a:xfrm>
-          <a:prstGeom prst="roundRect">
-            <a:avLst>
-              <a:gd name="adj" fmla="val 5405"/>
-            </a:avLst>
-          </a:prstGeom>
-          <a:solidFill>
-            <a:srgbClr val="F1F5F2"/>
-          </a:solidFill>
-          <a:ln/>
-          <a:effectLst>
-            <a:outerShdw sx="100000" sy="100000" kx="0" ky="0" algn="bl" rotWithShape="0" blurRad="76200" dist="25400" dir="5400000">
-              <a:srgbClr val="1B2B22">
-                <a:alpha val="14000"/>
-              </a:srgbClr>
-            </a:outerShdw>
-          </a:effectLst>
-        </p:spPr>
-      </p:sp>
-      <p:sp>
-        <p:nvSpPr>
-          <p:cNvPr id="5" name="Shape 3"/>
-          <p:cNvSpPr/>
-          <p:nvPr/>
-        </p:nvSpPr>
-        <p:spPr>
-          <a:xfrm>
-            <a:off x="758952" y="1901952"/>
-            <a:ext cx="621792" cy="621792"/>
-          </a:xfrm>
-          <a:prstGeom prst="ellipse">
-            <a:avLst/>
-          </a:prstGeom>
-          <a:solidFill>
-            <a:srgbClr val="0B5E34"/>
-          </a:solidFill>
-          <a:ln/>
-        </p:spPr>
-      </p:sp>
-      <p:pic>
-        <p:nvPicPr>
-          <p:cNvPr id="6" name="Image 0" descr="preencoded.png">    </p:cNvPr>
-          <p:cNvPicPr>
-            <a:picLocks noChangeAspect="1"/>
-          </p:cNvPicPr>
-          <p:nvPr/>
-        </p:nvPicPr>
-        <p:blipFill>
-          <a:blip r:embed="rId1"/>
-          <a:stretch>
-            <a:fillRect/>
-          </a:stretch>
-        </p:blipFill>
-        <p:spPr>
-          <a:xfrm>
-            <a:off x="908182" y="2051182"/>
-            <a:ext cx="323332" cy="323332"/>
-          </a:xfrm>
-          <a:prstGeom prst="rect">
-            <a:avLst/>
-          </a:prstGeom>
-        </p:spPr>
-      </p:pic>
-      <p:sp>
-        <p:nvSpPr>
-          <p:cNvPr id="7" name="Text 4"/>
-          <p:cNvSpPr/>
-          <p:nvPr/>
-        </p:nvSpPr>
-        <p:spPr>
-          <a:xfrm>
-            <a:off x="1554480" y="1901952"/>
-            <a:ext cx="4069080" cy="457200"/>
-          </a:xfrm>
-          <a:prstGeom prst="rect">
-            <a:avLst/>
-          </a:prstGeom>
-          <a:noFill/>
-          <a:ln/>
-        </p:spPr>
-        <p:txBody>
-          <a:bodyPr wrap="square" lIns="0" tIns="0" rIns="0" bIns="0" rtlCol="0" anchor="ctr"/>
-          <a:lstStyle/>
-          <a:p>
-            <a:pPr indent="0" marL="0">
-              <a:buNone/>
-            </a:pPr>
-            <a:r>
-              <a:rPr lang="en-US" sz="1650" b="1" dirty="0">
-                <a:solidFill>
-                  <a:srgbClr val="17231C"/>
-                </a:solidFill>
-                <a:latin typeface="Cambria" pitchFamily="34" charset="0"/>
-                <a:ea typeface="Cambria" pitchFamily="34" charset="-122"/>
-                <a:cs typeface="Cambria" pitchFamily="34" charset="-120"/>
-              </a:rPr>
-              <a:t>Banking &amp; Fintech</a:t>
-            </a:r>
-            <a:endParaRPr lang="en-US" sz="1650" dirty="0"/>
-          </a:p>
-        </p:txBody>
-      </p:sp>
-      <p:sp>
-        <p:nvSpPr>
-          <p:cNvPr id="8" name="Text 5"/>
-          <p:cNvSpPr/>
-          <p:nvPr/>
-        </p:nvSpPr>
-        <p:spPr>
-          <a:xfrm>
-            <a:off x="1554480" y="2377440"/>
-            <a:ext cx="4069080" cy="777240"/>
-          </a:xfrm>
-          <a:prstGeom prst="rect">
-            <a:avLst/>
-          </a:prstGeom>
-          <a:noFill/>
-          <a:ln/>
-        </p:spPr>
-        <p:txBody>
-          <a:bodyPr wrap="square" lIns="0" tIns="0" rIns="0" bIns="0" rtlCol="0" anchor="t"/>
-          <a:lstStyle/>
-          <a:p>
-            <a:pPr indent="0" marL="0">
-              <a:buNone/>
-            </a:pPr>
-            <a:r>
-              <a:rPr lang="en-US" sz="1250" dirty="0">
-                <a:solidFill>
-                  <a:srgbClr val="5E6E66"/>
-                </a:solidFill>
-                <a:latin typeface="Calibri" pitchFamily="34" charset="0"/>
-                <a:ea typeface="Calibri" pitchFamily="34" charset="-122"/>
-                <a:cs typeface="Calibri" pitchFamily="34" charset="-120"/>
-              </a:rPr>
-              <a:t>Ransomware, credential theft, payment fraud</a:t>
-            </a:r>
-            <a:endParaRPr lang="en-US" sz="1250" dirty="0"/>
-          </a:p>
-        </p:txBody>
-      </p:sp>
-      <p:sp>
-        <p:nvSpPr>
-          <p:cNvPr id="9" name="Shape 6"/>
-          <p:cNvSpPr/>
-          <p:nvPr/>
-        </p:nvSpPr>
-        <p:spPr>
-          <a:xfrm>
-            <a:off x="6309360" y="1645920"/>
-            <a:ext cx="5349240" cy="1691640"/>
-          </a:xfrm>
-          <a:prstGeom prst="roundRect">
-            <a:avLst>
-              <a:gd name="adj" fmla="val 5405"/>
-            </a:avLst>
-          </a:prstGeom>
-          <a:solidFill>
-            <a:srgbClr val="F1F5F2"/>
-          </a:solidFill>
-          <a:ln/>
-          <a:effectLst>
-            <a:outerShdw sx="100000" sy="100000" kx="0" ky="0" algn="bl" rotWithShape="0" blurRad="76200" dist="25400" dir="5400000">
-              <a:srgbClr val="1B2B22">
-                <a:alpha val="14000"/>
-              </a:srgbClr>
-            </a:outerShdw>
-          </a:effectLst>
-        </p:spPr>
-      </p:sp>
-      <p:sp>
-        <p:nvSpPr>
-          <p:cNvPr id="10" name="Shape 7"/>
-          <p:cNvSpPr/>
-          <p:nvPr/>
-        </p:nvSpPr>
-        <p:spPr>
-          <a:xfrm>
-            <a:off x="6565392" y="1901952"/>
-            <a:ext cx="621792" cy="621792"/>
-          </a:xfrm>
-          <a:prstGeom prst="ellipse">
-            <a:avLst/>
-          </a:prstGeom>
-          <a:solidFill>
-            <a:srgbClr val="146B47"/>
-          </a:solidFill>
-          <a:ln/>
-        </p:spPr>
-      </p:sp>
-      <p:pic>
-        <p:nvPicPr>
-          <p:cNvPr id="11" name="Image 1" descr="preencoded.png">    </p:cNvPr>
-          <p:cNvPicPr>
-            <a:picLocks noChangeAspect="1"/>
-          </p:cNvPicPr>
-          <p:nvPr/>
-        </p:nvPicPr>
-        <p:blipFill>
-          <a:blip r:embed="rId2"/>
-          <a:stretch>
-            <a:fillRect/>
-          </a:stretch>
-        </p:blipFill>
-        <p:spPr>
-          <a:xfrm>
-            <a:off x="6714622" y="2051182"/>
-            <a:ext cx="323332" cy="323332"/>
-          </a:xfrm>
-          <a:prstGeom prst="rect">
-            <a:avLst/>
-          </a:prstGeom>
-        </p:spPr>
-      </p:pic>
-      <p:sp>
-        <p:nvSpPr>
-          <p:cNvPr id="12" name="Text 8"/>
-          <p:cNvSpPr/>
-          <p:nvPr/>
-        </p:nvSpPr>
-        <p:spPr>
-          <a:xfrm>
-            <a:off x="7360920" y="1901952"/>
-            <a:ext cx="4069080" cy="457200"/>
-          </a:xfrm>
-          <a:prstGeom prst="rect">
-            <a:avLst/>
-          </a:prstGeom>
-          <a:noFill/>
-          <a:ln/>
-        </p:spPr>
-        <p:txBody>
-          <a:bodyPr wrap="square" lIns="0" tIns="0" rIns="0" bIns="0" rtlCol="0" anchor="ctr"/>
-          <a:lstStyle/>
-          <a:p>
-            <a:pPr indent="0" marL="0">
-              <a:buNone/>
-            </a:pPr>
-            <a:r>
-              <a:rPr lang="en-US" sz="1650" b="1" dirty="0">
-                <a:solidFill>
-                  <a:srgbClr val="17231C"/>
-                </a:solidFill>
-                <a:latin typeface="Cambria" pitchFamily="34" charset="0"/>
-                <a:ea typeface="Cambria" pitchFamily="34" charset="-122"/>
-                <a:cs typeface="Cambria" pitchFamily="34" charset="-120"/>
-              </a:rPr>
-              <a:t>Government</a:t>
-            </a:r>
-            <a:endParaRPr lang="en-US" sz="1650" dirty="0"/>
-          </a:p>
-        </p:txBody>
-      </p:sp>
-      <p:sp>
-        <p:nvSpPr>
-          <p:cNvPr id="13" name="Text 9"/>
-          <p:cNvSpPr/>
-          <p:nvPr/>
-        </p:nvSpPr>
-        <p:spPr>
-          <a:xfrm>
-            <a:off x="7360920" y="2377440"/>
-            <a:ext cx="4069080" cy="777240"/>
-          </a:xfrm>
-          <a:prstGeom prst="rect">
-            <a:avLst/>
-          </a:prstGeom>
-          <a:noFill/>
-          <a:ln/>
-        </p:spPr>
-        <p:txBody>
-          <a:bodyPr wrap="square" lIns="0" tIns="0" rIns="0" bIns="0" rtlCol="0" anchor="t"/>
-          <a:lstStyle/>
-          <a:p>
-            <a:pPr indent="0" marL="0">
-              <a:buNone/>
-            </a:pPr>
-            <a:r>
-              <a:rPr lang="en-US" sz="1250" dirty="0">
-                <a:solidFill>
-                  <a:srgbClr val="5E6E66"/>
-                </a:solidFill>
-                <a:latin typeface="Calibri" pitchFamily="34" charset="0"/>
-                <a:ea typeface="Calibri" pitchFamily="34" charset="-122"/>
-                <a:cs typeface="Calibri" pitchFamily="34" charset="-120"/>
-              </a:rPr>
-              <a:t>Registries, election-related systems (e.g. CAC)</a:t>
-            </a:r>
-            <a:endParaRPr lang="en-US" sz="1250" dirty="0"/>
-          </a:p>
-        </p:txBody>
-      </p:sp>
-      <p:sp>
-        <p:nvSpPr>
-          <p:cNvPr id="14" name="Shape 10"/>
-          <p:cNvSpPr/>
-          <p:nvPr/>
-        </p:nvSpPr>
-        <p:spPr>
-          <a:xfrm>
-            <a:off x="502920" y="3657600"/>
-            <a:ext cx="5349240" cy="1691640"/>
-          </a:xfrm>
-          <a:prstGeom prst="roundRect">
-            <a:avLst>
-              <a:gd name="adj" fmla="val 5405"/>
-            </a:avLst>
-          </a:prstGeom>
-          <a:solidFill>
-            <a:srgbClr val="F1F5F2"/>
-          </a:solidFill>
-          <a:ln/>
-          <a:effectLst>
-            <a:outerShdw sx="100000" sy="100000" kx="0" ky="0" algn="bl" rotWithShape="0" blurRad="76200" dist="25400" dir="5400000">
-              <a:srgbClr val="1B2B22">
-                <a:alpha val="14000"/>
-              </a:srgbClr>
-            </a:outerShdw>
-          </a:effectLst>
-        </p:spPr>
-      </p:sp>
-      <p:sp>
-        <p:nvSpPr>
-          <p:cNvPr id="15" name="Shape 11"/>
-          <p:cNvSpPr/>
-          <p:nvPr/>
-        </p:nvSpPr>
-        <p:spPr>
-          <a:xfrm>
-            <a:off x="758952" y="3913632"/>
-            <a:ext cx="621792" cy="621792"/>
-          </a:xfrm>
-          <a:prstGeom prst="ellipse">
-            <a:avLst/>
-          </a:prstGeom>
-          <a:solidFill>
-            <a:srgbClr val="0B5E34"/>
-          </a:solidFill>
-          <a:ln/>
-        </p:spPr>
-      </p:sp>
-      <p:pic>
-        <p:nvPicPr>
-          <p:cNvPr id="16" name="Image 2" descr="preencoded.png">    </p:cNvPr>
-          <p:cNvPicPr>
-            <a:picLocks noChangeAspect="1"/>
-          </p:cNvPicPr>
-          <p:nvPr/>
-        </p:nvPicPr>
-        <p:blipFill>
-          <a:blip r:embed="rId3"/>
-          <a:stretch>
-            <a:fillRect/>
-          </a:stretch>
-        </p:blipFill>
-        <p:spPr>
-          <a:xfrm>
-            <a:off x="908182" y="4062862"/>
-            <a:ext cx="323332" cy="323332"/>
-          </a:xfrm>
-          <a:prstGeom prst="rect">
-            <a:avLst/>
-          </a:prstGeom>
-        </p:spPr>
-      </p:pic>
-      <p:sp>
-        <p:nvSpPr>
-          <p:cNvPr id="17" name="Text 12"/>
-          <p:cNvSpPr/>
-          <p:nvPr/>
-        </p:nvSpPr>
-        <p:spPr>
-          <a:xfrm>
-            <a:off x="1554480" y="3913632"/>
-            <a:ext cx="4069080" cy="457200"/>
-          </a:xfrm>
-          <a:prstGeom prst="rect">
-            <a:avLst/>
-          </a:prstGeom>
-          <a:noFill/>
-          <a:ln/>
-        </p:spPr>
-        <p:txBody>
-          <a:bodyPr wrap="square" lIns="0" tIns="0" rIns="0" bIns="0" rtlCol="0" anchor="ctr"/>
-          <a:lstStyle/>
-          <a:p>
-            <a:pPr indent="0" marL="0">
-              <a:buNone/>
-            </a:pPr>
-            <a:r>
-              <a:rPr lang="en-US" sz="1650" b="1" dirty="0">
-                <a:solidFill>
-                  <a:srgbClr val="17231C"/>
-                </a:solidFill>
-                <a:latin typeface="Cambria" pitchFamily="34" charset="0"/>
-                <a:ea typeface="Cambria" pitchFamily="34" charset="-122"/>
-                <a:cs typeface="Cambria" pitchFamily="34" charset="-120"/>
-              </a:rPr>
-              <a:t>Telecom</a:t>
-            </a:r>
-            <a:endParaRPr lang="en-US" sz="1650" dirty="0"/>
-          </a:p>
-        </p:txBody>
-      </p:sp>
-      <p:sp>
-        <p:nvSpPr>
-          <p:cNvPr id="18" name="Text 13"/>
-          <p:cNvSpPr/>
-          <p:nvPr/>
-        </p:nvSpPr>
-        <p:spPr>
-          <a:xfrm>
-            <a:off x="1554480" y="4389120"/>
-            <a:ext cx="4069080" cy="777240"/>
-          </a:xfrm>
-          <a:prstGeom prst="rect">
-            <a:avLst/>
-          </a:prstGeom>
-          <a:noFill/>
-          <a:ln/>
-        </p:spPr>
-        <p:txBody>
-          <a:bodyPr wrap="square" lIns="0" tIns="0" rIns="0" bIns="0" rtlCol="0" anchor="t"/>
-          <a:lstStyle/>
-          <a:p>
-            <a:pPr indent="0" marL="0">
-              <a:buNone/>
-            </a:pPr>
-            <a:r>
-              <a:rPr lang="en-US" sz="1250" dirty="0">
-                <a:solidFill>
-                  <a:srgbClr val="5E6E66"/>
-                </a:solidFill>
-                <a:latin typeface="Calibri" pitchFamily="34" charset="0"/>
-                <a:ea typeface="Calibri" pitchFamily="34" charset="-122"/>
-                <a:cs typeface="Calibri" pitchFamily="34" charset="-120"/>
-              </a:rPr>
-              <a:t>Subscriber data, SIM-swap-enabled fraud</a:t>
-            </a:r>
-            <a:endParaRPr lang="en-US" sz="1250" dirty="0"/>
-          </a:p>
-        </p:txBody>
-      </p:sp>
-      <p:sp>
-        <p:nvSpPr>
-          <p:cNvPr id="19" name="Shape 14"/>
-          <p:cNvSpPr/>
-          <p:nvPr/>
-        </p:nvSpPr>
-        <p:spPr>
-          <a:xfrm>
-            <a:off x="6309360" y="3657600"/>
-            <a:ext cx="5349240" cy="1691640"/>
-          </a:xfrm>
-          <a:prstGeom prst="roundRect">
-            <a:avLst>
-              <a:gd name="adj" fmla="val 5405"/>
-            </a:avLst>
-          </a:prstGeom>
-          <a:solidFill>
-            <a:srgbClr val="F1F5F2"/>
-          </a:solidFill>
-          <a:ln/>
-          <a:effectLst>
-            <a:outerShdw sx="100000" sy="100000" kx="0" ky="0" algn="bl" rotWithShape="0" blurRad="76200" dist="25400" dir="5400000">
-              <a:srgbClr val="1B2B22">
-                <a:alpha val="14000"/>
-              </a:srgbClr>
-            </a:outerShdw>
-          </a:effectLst>
-        </p:spPr>
-      </p:sp>
-      <p:sp>
-        <p:nvSpPr>
-          <p:cNvPr id="20" name="Shape 15"/>
-          <p:cNvSpPr/>
-          <p:nvPr/>
-        </p:nvSpPr>
-        <p:spPr>
-          <a:xfrm>
-            <a:off x="6565392" y="3913632"/>
-            <a:ext cx="621792" cy="621792"/>
-          </a:xfrm>
-          <a:prstGeom prst="ellipse">
-            <a:avLst/>
-          </a:prstGeom>
-          <a:solidFill>
-            <a:srgbClr val="146B47"/>
-          </a:solidFill>
-          <a:ln/>
-        </p:spPr>
-      </p:sp>
-      <p:pic>
-        <p:nvPicPr>
-          <p:cNvPr id="21" name="Image 3" descr="preencoded.png">    </p:cNvPr>
-          <p:cNvPicPr>
-            <a:picLocks noChangeAspect="1"/>
-          </p:cNvPicPr>
-          <p:nvPr/>
-        </p:nvPicPr>
-        <p:blipFill>
-          <a:blip r:embed="rId4"/>
-          <a:stretch>
-            <a:fillRect/>
-          </a:stretch>
-        </p:blipFill>
-        <p:spPr>
-          <a:xfrm>
-            <a:off x="6714622" y="4062862"/>
-            <a:ext cx="323332" cy="323332"/>
-          </a:xfrm>
-          <a:prstGeom prst="rect">
-            <a:avLst/>
-          </a:prstGeom>
-        </p:spPr>
-      </p:pic>
-      <p:sp>
-        <p:nvSpPr>
-          <p:cNvPr id="22" name="Text 16"/>
-          <p:cNvSpPr/>
-          <p:nvPr/>
-        </p:nvSpPr>
-        <p:spPr>
-          <a:xfrm>
-            <a:off x="7360920" y="3913632"/>
-            <a:ext cx="4069080" cy="457200"/>
-          </a:xfrm>
-          <a:prstGeom prst="rect">
-            <a:avLst/>
-          </a:prstGeom>
-          <a:noFill/>
-          <a:ln/>
-        </p:spPr>
-        <p:txBody>
-          <a:bodyPr wrap="square" lIns="0" tIns="0" rIns="0" bIns="0" rtlCol="0" anchor="ctr"/>
-          <a:lstStyle/>
-          <a:p>
-            <a:pPr indent="0" marL="0">
-              <a:buNone/>
-            </a:pPr>
-            <a:r>
-              <a:rPr lang="en-US" sz="1650" b="1" dirty="0">
-                <a:solidFill>
-                  <a:srgbClr val="17231C"/>
-                </a:solidFill>
-                <a:latin typeface="Cambria" pitchFamily="34" charset="0"/>
-                <a:ea typeface="Cambria" pitchFamily="34" charset="-122"/>
-                <a:cs typeface="Cambria" pitchFamily="34" charset="-120"/>
-              </a:rPr>
-              <a:t>Healthcare</a:t>
-            </a:r>
-            <a:endParaRPr lang="en-US" sz="1650" dirty="0"/>
-          </a:p>
-        </p:txBody>
-      </p:sp>
-      <p:sp>
-        <p:nvSpPr>
-          <p:cNvPr id="23" name="Text 17"/>
-          <p:cNvSpPr/>
-          <p:nvPr/>
-        </p:nvSpPr>
-        <p:spPr>
-          <a:xfrm>
-            <a:off x="7360920" y="4389120"/>
-            <a:ext cx="4069080" cy="777240"/>
-          </a:xfrm>
-          <a:prstGeom prst="rect">
-            <a:avLst/>
-          </a:prstGeom>
-          <a:noFill/>
-          <a:ln/>
-        </p:spPr>
-        <p:txBody>
-          <a:bodyPr wrap="square" lIns="0" tIns="0" rIns="0" bIns="0" rtlCol="0" anchor="t"/>
-          <a:lstStyle/>
-          <a:p>
-            <a:pPr indent="0" marL="0">
-              <a:buNone/>
-            </a:pPr>
-            <a:r>
-              <a:rPr lang="en-US" sz="1250" dirty="0">
-                <a:solidFill>
-                  <a:srgbClr val="5E6E66"/>
-                </a:solidFill>
-                <a:latin typeface="Calibri" pitchFamily="34" charset="0"/>
-                <a:ea typeface="Calibri" pitchFamily="34" charset="-122"/>
-                <a:cs typeface="Calibri" pitchFamily="34" charset="-120"/>
-              </a:rPr>
-              <a:t>Patient data theft, system disruption</a:t>
-            </a:r>
-            <a:endParaRPr lang="en-US" sz="1250" dirty="0"/>
-          </a:p>
-        </p:txBody>
-      </p:sp>
-      <p:sp>
-        <p:nvSpPr>
-          <p:cNvPr id="24" name="Text 18"/>
-          <p:cNvSpPr/>
-          <p:nvPr/>
-        </p:nvSpPr>
-        <p:spPr>
-          <a:xfrm>
-            <a:off x="502920" y="5715000"/>
-            <a:ext cx="11185855" cy="365760"/>
-          </a:xfrm>
-          <a:prstGeom prst="rect">
-            <a:avLst/>
-          </a:prstGeom>
-          <a:noFill/>
-          <a:ln/>
-        </p:spPr>
-        <p:txBody>
-          <a:bodyPr wrap="square" lIns="0" tIns="0" rIns="0" bIns="0" rtlCol="0" anchor="ctr"/>
-          <a:lstStyle/>
-          <a:p>
-            <a:pPr indent="0" marL="0">
-              <a:buNone/>
-            </a:pPr>
-            <a:r>
-              <a:rPr lang="en-US" sz="1300" b="1" i="1" dirty="0">
-                <a:solidFill>
-                  <a:srgbClr val="0B5E34"/>
-                </a:solidFill>
-                <a:latin typeface="Calibri" pitchFamily="34" charset="0"/>
-                <a:ea typeface="Calibri" pitchFamily="34" charset="-122"/>
-                <a:cs typeface="Calibri" pitchFamily="34" charset="-120"/>
-              </a:rPr>
-              <a:t>Common thread: attacks are increasingly organized, targeted, and identity-driven — not opportunistic.</a:t>
-            </a:r>
-            <a:endParaRPr lang="en-US" sz="1300" dirty="0"/>
-          </a:p>
-        </p:txBody>
-      </p:sp>
-      <p:sp>
-        <p:nvSpPr>
-          <p:cNvPr id="25" name="Text 19"/>
-          <p:cNvSpPr/>
-          <p:nvPr/>
-        </p:nvSpPr>
-        <p:spPr>
-          <a:xfrm>
-            <a:off x="11368735" y="6446520"/>
-            <a:ext cx="457200" cy="274320"/>
-          </a:xfrm>
-          <a:prstGeom prst="rect">
-            <a:avLst/>
-          </a:prstGeom>
-          <a:noFill/>
-          <a:ln/>
-        </p:spPr>
-        <p:txBody>
-          <a:bodyPr wrap="square" lIns="0" tIns="0" rIns="0" bIns="0" rtlCol="0" anchor="ctr"/>
-          <a:lstStyle/>
-          <a:p>
-            <a:pPr algn="r" indent="0" marL="0">
-              <a:buNone/>
-            </a:pPr>
-            <a:r>
-              <a:rPr lang="en-US" sz="1000" dirty="0">
-                <a:solidFill>
-                  <a:srgbClr val="5E6E66"/>
                 </a:solidFill>
                 <a:latin typeface="Calibri" pitchFamily="34" charset="0"/>
                 <a:ea typeface="Calibri" pitchFamily="34" charset="-122"/>

--- a/Cybersecurity_Trends_in_Nigeria.pptx
+++ b/Cybersecurity_Trends_in_Nigeria.pptx
@@ -1582,7 +1582,7 @@
           <a:p>
             <a:r>
               <a:rPr lang="en-US" dirty="0"/>
-              <a:t>Signed February 2024, this amendment updates Nigeria's original 2015 cybercrime law. Four provisions matter most for organizations: first, a mandatory 72-hour window to report any attack or intrusion to the National CERT. Second, service providers now must retain traffic and subscriber data for two years. Third - and this is the controversial one - security agencies gained expanded power to intercept communications without a court order in urgent situations, which has drawn civil-liberties criticism. Fourth, new offences around cyberstalking and disinformation, plus a cybersecurity levy that adds to the cost of doing business. Net effect: compliance obligations just got a lot more concrete. (~55 sec)</a:t>
+              <a:t>Signed February 2024, this amendment updates Nigeria's original 2015 cybercrime law. Four provisions matter most for organizations: first, a mandatory 72-hour window to report any attack or intrusion to the National CERT. Second, service providers now must retain traffic and subscriber data for two years. Third - and this is the controversial one - security agencies gained expanded power to intercept communications without a court order in urgent situations, which has drawn civil-liberties criticism. On top of that, the CBN now requires every regulated bank to submit a cybersecurity implementation roadmap by June 10, 2026 - and most Nigerian banks still don't have a CISO to write one. Net effect: compliance obligations just got a lot more concrete, on multiple fronts at once. (~60 sec)</a:t>
             </a:r>
             <a:endParaRPr lang="en-US" dirty="0"/>
           </a:p>
@@ -1846,7 +1846,7 @@
           <a:p>
             <a:r>
               <a:rPr lang="en-US" dirty="0"/>
-              <a:t>Five takeaways to carry out of this room. One: attacks are more frequent, more automated with AI, and increasingly about stealing identity rather than just disrupting systems. Two: regulation has real teeth now - NDPC fines and the 72-hour reporting rule mean compliance is a genuine operational requirement, not paperwork. Three: critical infrastructure is the top target, and the CAC breach shows how one vulnerability can cascade across an entire economy. Four: the talent shortage is the binding constraint underneath all of this - you can't buy your way out of a people problem. Five: the direction of travel for defense is zero-trust, identity-first security, and real information sharing across sectors. That's the briefing - happy to open it up. (~60 sec)</a:t>
+              <a:t>Five takeaways to carry out of this room. One: attacks are more frequent, more automated with AI, and increasingly about stealing identity rather than just disrupting systems. Two: regulation has real teeth now - NDPC fines, the 72-hour reporting rule, and the CBN's June 2026 deadline mean compliance is a genuine operational requirement, not paperwork. Three: critical infrastructure is the top target, and the CAC breach shows how one vulnerability can cascade across an entire economy. Four: the talent shortage is the binding constraint underneath all of this - you can't buy your way out of a people problem. Five: the direction of travel for defense is zero-trust, identity-first security, and real information sharing across sectors. Close on the bridge line - this is the moment to connect the material back to why you're in this interview. Say it, then pause and open the floor. (~65 sec)</a:t>
             </a:r>
             <a:endParaRPr lang="en-US" dirty="0"/>
           </a:p>
@@ -5444,7 +5444,7 @@
                 <a:ea typeface="Calibri" pitchFamily="34" charset="-122"/>
                 <a:cs typeface="Calibri" pitchFamily="34" charset="-120"/>
               </a:rPr>
-              <a:t>New offences &amp; levy</a:t>
+              <a:t>CBN cyber-framework deadline</a:t>
             </a:r>
             <a:endParaRPr lang="en-US" sz="1400" dirty="0"/>
           </a:p>
@@ -5483,7 +5483,7 @@
                 <a:ea typeface="Calibri" pitchFamily="34" charset="-122"/>
                 <a:cs typeface="Calibri" pitchFamily="34" charset="-120"/>
               </a:rPr>
-              <a:t>New cyberstalking / disinformation offences, plus a cybersecurity levy that raises compliance costs</a:t>
+              <a:t>Every regulated bank must submit an implementation roadmap by June 10, 2026 — most still lack a CISO to write one</a:t>
             </a:r>
             <a:endParaRPr lang="en-US" sz="1200" dirty="0"/>
           </a:p>
@@ -6954,8 +6954,8 @@
         </p:nvSpPr>
         <p:spPr>
           <a:xfrm>
-            <a:off x="502920" y="1764792"/>
-            <a:ext cx="457200" cy="457200"/>
+            <a:off x="502920" y="1709928"/>
+            <a:ext cx="402336" cy="402336"/>
           </a:xfrm>
           <a:prstGeom prst="ellipse">
             <a:avLst/>
@@ -6974,8 +6974,8 @@
         </p:nvSpPr>
         <p:spPr>
           <a:xfrm>
-            <a:off x="502920" y="1764792"/>
-            <a:ext cx="457200" cy="457200"/>
+            <a:off x="502920" y="1709928"/>
+            <a:ext cx="402336" cy="402336"/>
           </a:xfrm>
           <a:prstGeom prst="rect">
             <a:avLst/>
@@ -6991,7 +6991,7 @@
               <a:buNone/>
             </a:pPr>
             <a:r>
-              <a:rPr lang="en-US" sz="1800" b="1" dirty="0">
+              <a:rPr lang="en-US" sz="1600" b="1" dirty="0">
                 <a:solidFill>
                   <a:srgbClr val="073821"/>
                 </a:solidFill>
@@ -7001,7 +7001,7 @@
               </a:rPr>
               <a:t>1</a:t>
             </a:r>
-            <a:endParaRPr lang="en-US" sz="1800" dirty="0"/>
+            <a:endParaRPr lang="en-US" sz="1600" dirty="0"/>
           </a:p>
         </p:txBody>
       </p:sp>
@@ -7013,8 +7013,8 @@
         </p:nvSpPr>
         <p:spPr>
           <a:xfrm>
-            <a:off x="1188720" y="1737360"/>
-            <a:ext cx="10500055" cy="749808"/>
+            <a:off x="1124712" y="1691640"/>
+            <a:ext cx="10564063" cy="694944"/>
           </a:xfrm>
           <a:prstGeom prst="rect">
             <a:avLst/>
@@ -7030,7 +7030,7 @@
               <a:buNone/>
             </a:pPr>
             <a:r>
-              <a:rPr lang="en-US" sz="1500" dirty="0">
+              <a:rPr lang="en-US" sz="1350" dirty="0">
                 <a:solidFill>
                   <a:srgbClr val="F0F6F2"/>
                 </a:solidFill>
@@ -7040,7 +7040,7 @@
               </a:rPr>
               <a:t>Attacks are more frequent, more automated (AI-assisted), and increasingly identity-focused.</a:t>
             </a:r>
-            <a:endParaRPr lang="en-US" sz="1500" dirty="0"/>
+            <a:endParaRPr lang="en-US" sz="1350" dirty="0"/>
           </a:p>
         </p:txBody>
       </p:sp>
@@ -7052,8 +7052,8 @@
         </p:nvSpPr>
         <p:spPr>
           <a:xfrm>
-            <a:off x="502920" y="2606040"/>
-            <a:ext cx="457200" cy="457200"/>
+            <a:off x="502920" y="2459736"/>
+            <a:ext cx="402336" cy="402336"/>
           </a:xfrm>
           <a:prstGeom prst="ellipse">
             <a:avLst/>
@@ -7072,8 +7072,8 @@
         </p:nvSpPr>
         <p:spPr>
           <a:xfrm>
-            <a:off x="502920" y="2606040"/>
-            <a:ext cx="457200" cy="457200"/>
+            <a:off x="502920" y="2459736"/>
+            <a:ext cx="402336" cy="402336"/>
           </a:xfrm>
           <a:prstGeom prst="rect">
             <a:avLst/>
@@ -7089,7 +7089,7 @@
               <a:buNone/>
             </a:pPr>
             <a:r>
-              <a:rPr lang="en-US" sz="1800" b="1" dirty="0">
+              <a:rPr lang="en-US" sz="1600" b="1" dirty="0">
                 <a:solidFill>
                   <a:srgbClr val="073821"/>
                 </a:solidFill>
@@ -7099,7 +7099,7 @@
               </a:rPr>
               <a:t>2</a:t>
             </a:r>
-            <a:endParaRPr lang="en-US" sz="1800" dirty="0"/>
+            <a:endParaRPr lang="en-US" sz="1600" dirty="0"/>
           </a:p>
         </p:txBody>
       </p:sp>
@@ -7111,8 +7111,8 @@
         </p:nvSpPr>
         <p:spPr>
           <a:xfrm>
-            <a:off x="1188720" y="2578608"/>
-            <a:ext cx="10500055" cy="749808"/>
+            <a:off x="1124712" y="2441448"/>
+            <a:ext cx="10564063" cy="694944"/>
           </a:xfrm>
           <a:prstGeom prst="rect">
             <a:avLst/>
@@ -7128,7 +7128,7 @@
               <a:buNone/>
             </a:pPr>
             <a:r>
-              <a:rPr lang="en-US" sz="1500" dirty="0">
+              <a:rPr lang="en-US" sz="1350" dirty="0">
                 <a:solidFill>
                   <a:srgbClr val="F0F6F2"/>
                 </a:solidFill>
@@ -7138,7 +7138,7 @@
               </a:rPr>
               <a:t>Regulation now has real teeth — NDPC fines and 72-hour reporting mean compliance is no longer optional.</a:t>
             </a:r>
-            <a:endParaRPr lang="en-US" sz="1500" dirty="0"/>
+            <a:endParaRPr lang="en-US" sz="1350" dirty="0"/>
           </a:p>
         </p:txBody>
       </p:sp>
@@ -7150,8 +7150,8 @@
         </p:nvSpPr>
         <p:spPr>
           <a:xfrm>
-            <a:off x="502920" y="3447288"/>
-            <a:ext cx="457200" cy="457200"/>
+            <a:off x="502920" y="3209544"/>
+            <a:ext cx="402336" cy="402336"/>
           </a:xfrm>
           <a:prstGeom prst="ellipse">
             <a:avLst/>
@@ -7170,8 +7170,8 @@
         </p:nvSpPr>
         <p:spPr>
           <a:xfrm>
-            <a:off x="502920" y="3447288"/>
-            <a:ext cx="457200" cy="457200"/>
+            <a:off x="502920" y="3209544"/>
+            <a:ext cx="402336" cy="402336"/>
           </a:xfrm>
           <a:prstGeom prst="rect">
             <a:avLst/>
@@ -7187,7 +7187,7 @@
               <a:buNone/>
             </a:pPr>
             <a:r>
-              <a:rPr lang="en-US" sz="1800" b="1" dirty="0">
+              <a:rPr lang="en-US" sz="1600" b="1" dirty="0">
                 <a:solidFill>
                   <a:srgbClr val="073821"/>
                 </a:solidFill>
@@ -7197,7 +7197,7 @@
               </a:rPr>
               <a:t>3</a:t>
             </a:r>
-            <a:endParaRPr lang="en-US" sz="1800" dirty="0"/>
+            <a:endParaRPr lang="en-US" sz="1600" dirty="0"/>
           </a:p>
         </p:txBody>
       </p:sp>
@@ -7209,8 +7209,8 @@
         </p:nvSpPr>
         <p:spPr>
           <a:xfrm>
-            <a:off x="1188720" y="3419856"/>
-            <a:ext cx="10500055" cy="749808"/>
+            <a:off x="1124712" y="3191256"/>
+            <a:ext cx="10564063" cy="694944"/>
           </a:xfrm>
           <a:prstGeom prst="rect">
             <a:avLst/>
@@ -7226,7 +7226,7 @@
               <a:buNone/>
             </a:pPr>
             <a:r>
-              <a:rPr lang="en-US" sz="1500" dirty="0">
+              <a:rPr lang="en-US" sz="1350" dirty="0">
                 <a:solidFill>
                   <a:srgbClr val="F0F6F2"/>
                 </a:solidFill>
@@ -7236,7 +7236,7 @@
               </a:rPr>
               <a:t>Critical infrastructure is a top target — a single vulnerability (like the CAC breach) can cascade nationally.</a:t>
             </a:r>
-            <a:endParaRPr lang="en-US" sz="1500" dirty="0"/>
+            <a:endParaRPr lang="en-US" sz="1350" dirty="0"/>
           </a:p>
         </p:txBody>
       </p:sp>
@@ -7248,8 +7248,8 @@
         </p:nvSpPr>
         <p:spPr>
           <a:xfrm>
-            <a:off x="502920" y="4288536"/>
-            <a:ext cx="457200" cy="457200"/>
+            <a:off x="502920" y="3959352"/>
+            <a:ext cx="402336" cy="402336"/>
           </a:xfrm>
           <a:prstGeom prst="ellipse">
             <a:avLst/>
@@ -7268,8 +7268,8 @@
         </p:nvSpPr>
         <p:spPr>
           <a:xfrm>
-            <a:off x="502920" y="4288536"/>
-            <a:ext cx="457200" cy="457200"/>
+            <a:off x="502920" y="3959352"/>
+            <a:ext cx="402336" cy="402336"/>
           </a:xfrm>
           <a:prstGeom prst="rect">
             <a:avLst/>
@@ -7285,7 +7285,7 @@
               <a:buNone/>
             </a:pPr>
             <a:r>
-              <a:rPr lang="en-US" sz="1800" b="1" dirty="0">
+              <a:rPr lang="en-US" sz="1600" b="1" dirty="0">
                 <a:solidFill>
                   <a:srgbClr val="073821"/>
                 </a:solidFill>
@@ -7295,7 +7295,7 @@
               </a:rPr>
               <a:t>4</a:t>
             </a:r>
-            <a:endParaRPr lang="en-US" sz="1800" dirty="0"/>
+            <a:endParaRPr lang="en-US" sz="1600" dirty="0"/>
           </a:p>
         </p:txBody>
       </p:sp>
@@ -7307,8 +7307,8 @@
         </p:nvSpPr>
         <p:spPr>
           <a:xfrm>
-            <a:off x="1188720" y="4261104"/>
-            <a:ext cx="10500055" cy="749808"/>
+            <a:off x="1124712" y="3941064"/>
+            <a:ext cx="10564063" cy="694944"/>
           </a:xfrm>
           <a:prstGeom prst="rect">
             <a:avLst/>
@@ -7324,7 +7324,7 @@
               <a:buNone/>
             </a:pPr>
             <a:r>
-              <a:rPr lang="en-US" sz="1500" dirty="0">
+              <a:rPr lang="en-US" sz="1350" dirty="0">
                 <a:solidFill>
                   <a:srgbClr val="F0F6F2"/>
                 </a:solidFill>
@@ -7334,7 +7334,7 @@
               </a:rPr>
               <a:t>The talent shortage is the binding constraint — tooling and law can’t outrun a lack of skilled defenders.</a:t>
             </a:r>
-            <a:endParaRPr lang="en-US" sz="1500" dirty="0"/>
+            <a:endParaRPr lang="en-US" sz="1350" dirty="0"/>
           </a:p>
         </p:txBody>
       </p:sp>
@@ -7346,8 +7346,8 @@
         </p:nvSpPr>
         <p:spPr>
           <a:xfrm>
-            <a:off x="502920" y="5129784"/>
-            <a:ext cx="457200" cy="457200"/>
+            <a:off x="502920" y="4709160"/>
+            <a:ext cx="402336" cy="402336"/>
           </a:xfrm>
           <a:prstGeom prst="ellipse">
             <a:avLst/>
@@ -7366,8 +7366,8 @@
         </p:nvSpPr>
         <p:spPr>
           <a:xfrm>
-            <a:off x="502920" y="5129784"/>
-            <a:ext cx="457200" cy="457200"/>
+            <a:off x="502920" y="4709160"/>
+            <a:ext cx="402336" cy="402336"/>
           </a:xfrm>
           <a:prstGeom prst="rect">
             <a:avLst/>
@@ -7383,7 +7383,7 @@
               <a:buNone/>
             </a:pPr>
             <a:r>
-              <a:rPr lang="en-US" sz="1800" b="1" dirty="0">
+              <a:rPr lang="en-US" sz="1600" b="1" dirty="0">
                 <a:solidFill>
                   <a:srgbClr val="073821"/>
                 </a:solidFill>
@@ -7393,7 +7393,7 @@
               </a:rPr>
               <a:t>5</a:t>
             </a:r>
-            <a:endParaRPr lang="en-US" sz="1800" dirty="0"/>
+            <a:endParaRPr lang="en-US" sz="1600" dirty="0"/>
           </a:p>
         </p:txBody>
       </p:sp>
@@ -7405,8 +7405,8 @@
         </p:nvSpPr>
         <p:spPr>
           <a:xfrm>
-            <a:off x="1188720" y="5102352"/>
-            <a:ext cx="10500055" cy="749808"/>
+            <a:off x="1124712" y="4690872"/>
+            <a:ext cx="10564063" cy="694944"/>
           </a:xfrm>
           <a:prstGeom prst="rect">
             <a:avLst/>
@@ -7422,7 +7422,7 @@
               <a:buNone/>
             </a:pPr>
             <a:r>
-              <a:rPr lang="en-US" sz="1500" dirty="0">
+              <a:rPr lang="en-US" sz="1350" dirty="0">
                 <a:solidFill>
                   <a:srgbClr val="F0F6F2"/>
                 </a:solidFill>
@@ -7432,13 +7432,88 @@
               </a:rPr>
               <a:t>Zero-trust, identity-first defense, and cross-sector information sharing are the direction of travel.</a:t>
             </a:r>
-            <a:endParaRPr lang="en-US" sz="1500" dirty="0"/>
-          </a:p>
-        </p:txBody>
-      </p:sp>
-      <p:sp>
-        <p:nvSpPr>
-          <p:cNvPr id="19" name="Text 17"/>
+            <a:endParaRPr lang="en-US" sz="1350" dirty="0"/>
+          </a:p>
+        </p:txBody>
+      </p:sp>
+      <p:sp>
+        <p:nvSpPr>
+          <p:cNvPr id="19" name="Shape 17"/>
+          <p:cNvSpPr/>
+          <p:nvPr/>
+        </p:nvSpPr>
+        <p:spPr>
+          <a:xfrm>
+            <a:off x="502920" y="5568696"/>
+            <a:ext cx="11185855" cy="777240"/>
+          </a:xfrm>
+          <a:prstGeom prst="roundRect">
+            <a:avLst>
+              <a:gd name="adj" fmla="val 9412"/>
+            </a:avLst>
+          </a:prstGeom>
+          <a:solidFill>
+            <a:srgbClr val="0B5E34"/>
+          </a:solidFill>
+          <a:ln/>
+        </p:spPr>
+      </p:sp>
+      <p:sp>
+        <p:nvSpPr>
+          <p:cNvPr id="20" name="Text 18"/>
+          <p:cNvSpPr/>
+          <p:nvPr/>
+        </p:nvSpPr>
+        <p:spPr>
+          <a:xfrm>
+            <a:off x="777240" y="5568696"/>
+            <a:ext cx="10637215" cy="777240"/>
+          </a:xfrm>
+          <a:prstGeom prst="rect">
+            <a:avLst/>
+          </a:prstGeom>
+          <a:noFill/>
+          <a:ln/>
+        </p:spPr>
+        <p:txBody>
+          <a:bodyPr wrap="square" lIns="0" tIns="0" rIns="0" bIns="0" rtlCol="0" anchor="ctr"/>
+          <a:lstStyle/>
+          <a:p>
+            <a:pPr indent="0" marL="0">
+              <a:buNone/>
+            </a:pPr>
+            <a:r>
+              <a:rPr lang="en-US" sz="1450" i="1" dirty="0">
+                <a:solidFill>
+                  <a:srgbClr val="FFFFFF"/>
+                </a:solidFill>
+                <a:latin typeface="Cambria" pitchFamily="34" charset="0"/>
+                <a:ea typeface="Cambria" pitchFamily="34" charset="-122"/>
+                <a:cs typeface="Cambria" pitchFamily="34" charset="-120"/>
+              </a:rPr>
+              <a:t>“Understanding this landscape isn’t academic for me — it’s the market I want to help Sophos defend.” </a:t>
+            </a:r>
+            <a:pPr indent="0" marL="0">
+              <a:buNone/>
+            </a:pPr>
+            <a:r>
+              <a:rPr lang="en-US" sz="1450" b="1" dirty="0">
+                <a:solidFill>
+                  <a:srgbClr val="E8A93A"/>
+                </a:solidFill>
+                <a:latin typeface="Cambria" pitchFamily="34" charset="0"/>
+                <a:ea typeface="Cambria" pitchFamily="34" charset="-122"/>
+                <a:cs typeface="Cambria" pitchFamily="34" charset="-120"/>
+              </a:rPr>
+              <a:t>— Kelechi</a:t>
+            </a:r>
+            <a:endParaRPr lang="en-US" sz="1450" dirty="0"/>
+          </a:p>
+        </p:txBody>
+      </p:sp>
+      <p:sp>
+        <p:nvSpPr>
+          <p:cNvPr id="21" name="Text 19"/>
           <p:cNvSpPr/>
           <p:nvPr/>
         </p:nvSpPr>
@@ -12777,7 +12852,7 @@
         </p:nvSpPr>
         <p:spPr>
           <a:xfrm>
-            <a:off x="502920" y="5797296"/>
+            <a:off x="502920" y="5779008"/>
             <a:ext cx="11185855" cy="365760"/>
           </a:xfrm>
           <a:prstGeom prst="rect">
@@ -12802,7 +12877,21 @@
                 <a:ea typeface="Calibri" pitchFamily="34" charset="-122"/>
                 <a:cs typeface="Calibri" pitchFamily="34" charset="-120"/>
               </a:rPr>
-              <a:t>AI-driven phishing and impersonation are projected to intensify ~70% in 2026 — the fastest-moving trend in this briefing.</a:t>
+              <a:t>“AI-driven attacks on the financial sector surged 150% last year.” </a:t>
+            </a:r>
+            <a:pPr indent="0" marL="0">
+              <a:buNone/>
+            </a:pPr>
+            <a:r>
+              <a:rPr lang="en-US" sz="1250" dirty="0">
+                <a:solidFill>
+                  <a:srgbClr val="5E6E66"/>
+                </a:solidFill>
+                <a:latin typeface="Calibri" pitchFamily="34" charset="0"/>
+                <a:ea typeface="Calibri" pitchFamily="34" charset="-122"/>
+                <a:cs typeface="Calibri" pitchFamily="34" charset="-120"/>
+              </a:rPr>
+              <a:t>— Lanre Ogungbe, CEO, Prembly</a:t>
             </a:r>
             <a:endParaRPr lang="en-US" sz="1250" dirty="0"/>
           </a:p>
@@ -13305,7 +13394,7 @@
         <p:spPr>
           <a:xfrm>
             <a:off x="502920" y="3703320"/>
-            <a:ext cx="11185855" cy="2011680"/>
+            <a:ext cx="6400800" cy="2286000"/>
           </a:xfrm>
           <a:prstGeom prst="rect">
             <a:avLst/>
@@ -13319,16 +13408,16 @@
           <a:p>
             <a:pPr marL="228600" indent="-228600">
               <a:lnSpc>
-                <a:spcPts val="1664"/>
+                <a:spcPts val="1600"/>
               </a:lnSpc>
               <a:spcAft>
-                <a:spcPts val="900"/>
+                <a:spcPts val="1000"/>
               </a:spcAft>
               <a:buSzPct val="100000"/>
               <a:buChar char="▪"/>
             </a:pPr>
             <a:r>
-              <a:rPr lang="en-US" sz="1300" dirty="0">
+              <a:rPr lang="en-US" sz="1250" dirty="0">
                 <a:solidFill>
                   <a:srgbClr val="E9F2EC"/>
                 </a:solidFill>
@@ -13338,21 +13427,21 @@
               </a:rPr>
               <a:t>Banks, courts, and the EFCC all rely on CAC records for due diligence and fraud investigation — the breach undermines national anti-money-laundering reforms.</a:t>
             </a:r>
-            <a:endParaRPr lang="en-US" sz="1300" dirty="0"/>
+            <a:endParaRPr lang="en-US" sz="1250" dirty="0"/>
           </a:p>
           <a:p>
             <a:pPr marL="228600" indent="-228600">
               <a:lnSpc>
-                <a:spcPts val="1664"/>
+                <a:spcPts val="1600"/>
               </a:lnSpc>
               <a:spcAft>
-                <a:spcPts val="900"/>
+                <a:spcPts val="1000"/>
               </a:spcAft>
               <a:buSzPct val="100000"/>
               <a:buChar char="▪"/>
             </a:pPr>
             <a:r>
-              <a:rPr lang="en-US" sz="1300" dirty="0">
+              <a:rPr lang="en-US" sz="1250" dirty="0">
                 <a:solidFill>
                   <a:srgbClr val="E9F2EC"/>
                 </a:solidFill>
@@ -13362,21 +13451,21 @@
               </a:rPr>
               <a:t>CAC shut down its company-registration portal to contain the damage; the NDPC opened a full investigation.</a:t>
             </a:r>
-            <a:endParaRPr lang="en-US" sz="1300" dirty="0"/>
+            <a:endParaRPr lang="en-US" sz="1250" dirty="0"/>
           </a:p>
           <a:p>
             <a:pPr marL="228600" indent="-228600">
               <a:lnSpc>
-                <a:spcPts val="1664"/>
+                <a:spcPts val="1600"/>
               </a:lnSpc>
               <a:spcAft>
-                <a:spcPts val="900"/>
+                <a:spcPts val="1000"/>
               </a:spcAft>
               <a:buSzPct val="100000"/>
               <a:buChar char="▪"/>
             </a:pPr>
             <a:r>
-              <a:rPr lang="en-US" sz="1300" dirty="0">
+              <a:rPr lang="en-US" sz="1250" dirty="0">
                 <a:solidFill>
                   <a:srgbClr val="E9F2EC"/>
                 </a:solidFill>
@@ -13386,13 +13475,113 @@
               </a:rPr>
               <a:t>ByteToBreach specializes in stealing and selling data rather than encrypting it — a shift from classic ransomware to data-theft-and-extortion.</a:t>
             </a:r>
-            <a:endParaRPr lang="en-US" sz="1300" dirty="0"/>
-          </a:p>
-        </p:txBody>
-      </p:sp>
-      <p:sp>
-        <p:nvSpPr>
-          <p:cNvPr id="15" name="Text 13"/>
+            <a:endParaRPr lang="en-US" sz="1250" dirty="0"/>
+          </a:p>
+        </p:txBody>
+      </p:sp>
+      <p:sp>
+        <p:nvSpPr>
+          <p:cNvPr id="15" name="Shape 13"/>
+          <p:cNvSpPr/>
+          <p:nvPr/>
+        </p:nvSpPr>
+        <p:spPr>
+          <a:xfrm>
+            <a:off x="7086600" y="3703320"/>
+            <a:ext cx="4297680" cy="2103120"/>
+          </a:xfrm>
+          <a:prstGeom prst="roundRect">
+            <a:avLst>
+              <a:gd name="adj" fmla="val 4348"/>
+            </a:avLst>
+          </a:prstGeom>
+          <a:solidFill>
+            <a:srgbClr val="0B5E34"/>
+          </a:solidFill>
+          <a:ln/>
+        </p:spPr>
+      </p:sp>
+      <p:sp>
+        <p:nvSpPr>
+          <p:cNvPr id="16" name="Text 14"/>
+          <p:cNvSpPr/>
+          <p:nvPr/>
+        </p:nvSpPr>
+        <p:spPr>
+          <a:xfrm>
+            <a:off x="7315200" y="3931920"/>
+            <a:ext cx="3840480" cy="1280160"/>
+          </a:xfrm>
+          <a:prstGeom prst="rect">
+            <a:avLst/>
+          </a:prstGeom>
+          <a:noFill/>
+          <a:ln/>
+        </p:spPr>
+        <p:txBody>
+          <a:bodyPr wrap="square" lIns="0" tIns="0" rIns="0" bIns="0" rtlCol="0" anchor="t"/>
+          <a:lstStyle/>
+          <a:p>
+            <a:pPr indent="0" marL="0">
+              <a:buNone/>
+            </a:pPr>
+            <a:r>
+              <a:rPr lang="en-US" sz="1400" i="1" dirty="0">
+                <a:solidFill>
+                  <a:srgbClr val="FFFFFF"/>
+                </a:solidFill>
+                <a:latin typeface="Cambria" pitchFamily="34" charset="0"/>
+                <a:ea typeface="Cambria" pitchFamily="34" charset="-122"/>
+                <a:cs typeface="Cambria" pitchFamily="34" charset="-120"/>
+              </a:rPr>
+              <a:t>“These are coordinated operations targeting identity systems, financial rails and national databases.”</a:t>
+            </a:r>
+            <a:endParaRPr lang="en-US" sz="1400" dirty="0"/>
+          </a:p>
+        </p:txBody>
+      </p:sp>
+      <p:sp>
+        <p:nvSpPr>
+          <p:cNvPr id="17" name="Text 15"/>
+          <p:cNvSpPr/>
+          <p:nvPr/>
+        </p:nvSpPr>
+        <p:spPr>
+          <a:xfrm>
+            <a:off x="7315200" y="5349240"/>
+            <a:ext cx="3840480" cy="320040"/>
+          </a:xfrm>
+          <a:prstGeom prst="rect">
+            <a:avLst/>
+          </a:prstGeom>
+          <a:noFill/>
+          <a:ln/>
+        </p:spPr>
+        <p:txBody>
+          <a:bodyPr wrap="square" lIns="0" tIns="0" rIns="0" bIns="0" rtlCol="0" anchor="ctr"/>
+          <a:lstStyle/>
+          <a:p>
+            <a:pPr indent="0" marL="0">
+              <a:buNone/>
+            </a:pPr>
+            <a:r>
+              <a:rPr lang="en-US" sz="1050" dirty="0">
+                <a:solidFill>
+                  <a:srgbClr val="CFE3D8"/>
+                </a:solidFill>
+                <a:latin typeface="Calibri" pitchFamily="34" charset="0"/>
+                <a:ea typeface="Calibri" pitchFamily="34" charset="-122"/>
+                <a:cs typeface="Calibri" pitchFamily="34" charset="-120"/>
+              </a:rPr>
+              <a:t>— Adewale Odunsi, cybersecurity expert</a:t>
+            </a:r>
+            <a:endParaRPr lang="en-US" sz="1050" dirty="0"/>
+          </a:p>
+        </p:txBody>
+      </p:sp>
+      <p:sp>
+        <p:nvSpPr>
+          <p:cNvPr id="18" name="Text 16"/>
           <p:cNvSpPr/>
           <p:nvPr/>
         </p:nvSpPr>
